--- a/docs/presentation.pptx
+++ b/docs/presentation.pptx
@@ -118,41 +118,41 @@
   <p:extLst>
     <p:ext uri="{521415D9-36F7-43E2-AB2F-B90AF26B5E84}">
       <p14:sectionLst xmlns:p14="http://schemas.microsoft.com/office/powerpoint/2010/main">
-        <p14:section name="Introduction" id="{6f4c74a2-73ba-6539-4255-39d70c994fa6}">
+        <p14:section name="Introduction" id="{a9fe0de1-f20d-65b0-7541-18c2297b6454}">
           <p14:sldIdLst>
             <p14:sldId id="256"/>
             <p14:sldId id="257"/>
             <p14:sldId id="258"/>
           </p14:sldIdLst>
         </p14:section>
-        <p14:section name="Stage 1 — RAG" id="{df83f2f3-f518-233a-c808-fdbc615dd231}">
+        <p14:section name="Stage 1 — RAG" id="{1bf7d64f-2d2a-bbea-b722-6da16dc4a3e0}">
           <p14:sldIdLst>
             <p14:sldId id="259"/>
             <p14:sldId id="260"/>
           </p14:sldIdLst>
         </p14:section>
-        <p14:section name="In action" id="{2eb14f61-b1ef-efca-e8f1-5172ab9a8920}">
+        <p14:section name="In action" id="{7c54c093-785d-d71d-0380-739f193160c2}">
           <p14:sldIdLst>
             <p14:sldId id="261"/>
             <p14:sldId id="262"/>
           </p14:sldIdLst>
         </p14:section>
-        <p14:section name="Stage 2 — Human-in-the-loop" id="{181bf89c-2062-0778-ef97-4a13ffa0c29c}">
+        <p14:section name="Stage 2 — Human-in-the-loop" id="{01fe570f-62dd-105d-bf09-e1c915b932ef}">
           <p14:sldIdLst>
             <p14:sldId id="263"/>
           </p14:sldIdLst>
         </p14:section>
-        <p14:section name="Stage 3 — MCP server" id="{f5bd0a09-b5b9-5307-7080-76cf241ad36c}">
+        <p14:section name="Stage 3 — MCP server" id="{f8446826-963b-7aa1-e230-150140159f42}">
           <p14:sldIdLst>
             <p14:sldId id="264"/>
           </p14:sldIdLst>
         </p14:section>
-        <p14:section name="Stage 4 — Orchestration" id="{8d6383a5-3dfe-5423-3524-04932bfefd6a}">
+        <p14:section name="Stage 4 — Orchestration" id="{d494e626-e859-4659-bcd9-a977fb10b207}">
           <p14:sldIdLst>
             <p14:sldId id="265"/>
           </p14:sldIdLst>
         </p14:section>
-        <p14:section name="Testing" id="{29789db1-92ed-beaa-5450-f6355fd758bc}">
+        <p14:section name="Testing" id="{16bf9296-67c8-c460-474d-6822690e8f76}">
           <p14:sldIdLst>
             <p14:sldId id="266"/>
             <p14:sldId id="267"/>
@@ -2501,7 +2501,7 @@
                 <a:ea typeface="Calibri" pitchFamily="34" charset="-122"/>
                 <a:cs typeface="Calibri" pitchFamily="34" charset="-120"/>
               </a:rPr>
-              <a:t>sqlite-checkpointed</a:t>
+              <a:t>Postgres-checkpointed</a:t>
             </a:r>
             <a:endParaRPr lang="en-US" sz="1000" dirty="0"/>
           </a:p>

--- a/docs/presentation.pptx
+++ b/docs/presentation.pptx
@@ -2231,7 +2231,7 @@
                 <a:ea typeface="Calibri" pitchFamily="34" charset="-122"/>
                 <a:cs typeface="Calibri" pitchFamily="34" charset="-120"/>
               </a:rPr>
-              <a:t>Two graphs, not one: the admin's decision can take hours, so a single synchronous graph.ainvoke() per chat message would block on a human. The approval graph pauses instead, and resumes on its own schedule.</a:t>
+              <a:t>One graph per chat session: user_agent → admin → record → notification. The admin's decision can take hours, so the admin node pauses the whole conversation (Postgres-checkpointed) and the admin API resumes it.</a:t>
             </a:r>
             <a:endParaRPr lang="en-US" sz="1400" dirty="0"/>
           </a:p>
@@ -2292,7 +2292,7 @@
                 <a:ea typeface="Calibri" pitchFamily="34" charset="-122"/>
                 <a:cs typeface="Calibri" pitchFamily="34" charset="-120"/>
               </a:rPr>
-              <a:t>user_interaction</a:t>
+              <a:t>user_agent</a:t>
             </a:r>
             <a:endParaRPr lang="en-US" sz="1300" dirty="0"/>
           </a:p>
@@ -2334,7 +2334,7 @@
                 <a:ea typeface="Calibri" pitchFamily="34" charset="-122"/>
                 <a:cs typeface="Calibri" pitchFamily="34" charset="-120"/>
               </a:rPr>
-              <a:t>1-node graph wrapping</a:t>
+              <a:t>commands first, then</a:t>
             </a:r>
             <a:endParaRPr lang="en-US" sz="1000" dirty="0"/>
           </a:p>
@@ -2354,7 +2354,7 @@
                 <a:ea typeface="Calibri" pitchFamily="34" charset="-122"/>
                 <a:cs typeface="Calibri" pitchFamily="34" charset="-120"/>
               </a:rPr>
-              <a:t>the existing chat loop</a:t>
+              <a:t>the RAG user agent</a:t>
             </a:r>
             <a:endParaRPr lang="en-US" sz="1000" dirty="0"/>
           </a:p>
@@ -2439,7 +2439,7 @@
                 <a:ea typeface="Calibri" pitchFamily="34" charset="-122"/>
                 <a:cs typeface="Calibri" pitchFamily="34" charset="-120"/>
               </a:rPr>
-              <a:t>admin_approval</a:t>
+              <a:t>admin</a:t>
             </a:r>
             <a:endParaRPr lang="en-US" sz="1300" dirty="0"/>
           </a:p>
@@ -2481,7 +2481,7 @@
                 <a:ea typeface="Calibri" pitchFamily="34" charset="-122"/>
                 <a:cs typeface="Calibri" pitchFamily="34" charset="-120"/>
               </a:rPr>
-              <a:t>interrupt() — paused,</a:t>
+              <a:t>HITL middleware pause,</a:t>
             </a:r>
             <a:endParaRPr lang="en-US" sz="1000" dirty="0"/>
           </a:p>
@@ -2586,7 +2586,7 @@
                 <a:ea typeface="Calibri" pitchFamily="34" charset="-122"/>
                 <a:cs typeface="Calibri" pitchFamily="34" charset="-120"/>
               </a:rPr>
-              <a:t>record_or_close</a:t>
+              <a:t>record → notification</a:t>
             </a:r>
             <a:endParaRPr lang="en-US" sz="1300" dirty="0"/>
           </a:p>
@@ -2628,7 +2628,7 @@
                 <a:ea typeface="Calibri" pitchFamily="34" charset="-122"/>
                 <a:cs typeface="Calibri" pitchFamily="34" charset="-120"/>
               </a:rPr>
-              <a:t>resumed via</a:t>
+              <a:t>MCP on approval,</a:t>
             </a:r>
             <a:endParaRPr lang="en-US" sz="1000" dirty="0"/>
           </a:p>
@@ -2648,7 +2648,7 @@
                 <a:ea typeface="Calibri" pitchFamily="34" charset="-122"/>
                 <a:cs typeface="Calibri" pitchFamily="34" charset="-120"/>
               </a:rPr>
-              <a:t>Command(resume=...)</a:t>
+              <a:t>then the chat pop-up</a:t>
             </a:r>
             <a:endParaRPr lang="en-US" sz="1000" dirty="0"/>
           </a:p>
@@ -2690,7 +2690,7 @@
                 <a:ea typeface="Calibri" pitchFamily="34" charset="-122"/>
                 <a:cs typeface="Calibri" pitchFamily="34" charset="-120"/>
               </a:rPr>
-              <a:t>Both graphs are kept in app/ai/graph.py. ApprovalPipeline.start() returns as soon as the graph pauses; resume() is called from POST /admin/reservations/{id}/decision.</a:t>
+              <a:t>ParkingGraph.chat() returns as soon as the graph pauses; ParkingGraph.resume() is called from POST /admin/reservations/{id}/decision, and retries a step that failed.</a:t>
             </a:r>
             <a:endParaRPr lang="en-US" sz="1300" dirty="0"/>
           </a:p>
@@ -2939,7 +2939,7 @@
                 <a:ea typeface="Cambria" pitchFamily="34" charset="-122"/>
                 <a:cs typeface="Cambria" pitchFamily="34" charset="-120"/>
               </a:rPr>
-              <a:t>37</a:t>
+              <a:t>96</a:t>
             </a:r>
             <a:endParaRPr lang="en-US" sz="4000" dirty="0"/>
           </a:p>
@@ -3185,7 +3185,7 @@
                 <a:ea typeface="Cambria" pitchFamily="34" charset="-122"/>
                 <a:cs typeface="Cambria" pitchFamily="34" charset="-120"/>
               </a:rPr>
-              <a:t>2</a:t>
+              <a:t>0.93</a:t>
             </a:r>
             <a:endParaRPr lang="en-US" sz="4000" dirty="0"/>
           </a:p>
@@ -3227,7 +3227,7 @@
                 <a:ea typeface="Calibri" pitchFamily="34" charset="-122"/>
                 <a:cs typeface="Calibri" pitchFamily="34" charset="-120"/>
               </a:rPr>
-              <a:t>real bugs found and fixed</a:t>
+              <a:t>Recall@4 on the</a:t>
             </a:r>
             <a:endParaRPr lang="en-US" sz="1150" dirty="0"/>
           </a:p>
@@ -3247,7 +3247,7 @@
                 <a:ea typeface="Calibri" pitchFamily="34" charset="-122"/>
                 <a:cs typeface="Calibri" pitchFamily="34" charset="-120"/>
               </a:rPr>
-              <a:t>by live manual testing</a:t>
+              <a:t>15-question golden set</a:t>
             </a:r>
             <a:endParaRPr lang="en-US" sz="1150" dirty="0"/>
           </a:p>
@@ -3440,7 +3440,7 @@
                 <a:ea typeface="Calibri" pitchFamily="34" charset="-122"/>
                 <a:cs typeface="Calibri" pitchFamily="34" charset="-120"/>
               </a:rPr>
-              <a:t>evals/rag_eval.py measures Precision@K / Recall@K against a 15-question hand-labelled golden set, plus retrieval latency</a:t>
+              <a:t>evals/report.md: Precision@4 0.58, Recall@4 0.93; retrieval about 0.6 s, a full chat turn about 3.7 s</a:t>
             </a:r>
             <a:endParaRPr lang="en-US" sz="1350" dirty="0"/>
           </a:p>
@@ -3464,7 +3464,7 @@
                 <a:ea typeface="Calibri" pitchFamily="34" charset="-122"/>
                 <a:cs typeface="Calibri" pitchFamily="34" charset="-120"/>
               </a:rPr>
-              <a:t>load_tests/locustfile.py drives /chat for load testing, respecting the per-session rate limit</a:t>
+              <a:t>load_tests/report.md: chatbot, admin and MCP load-tested with 0 failures; 1,112 MCP writes, none lost</a:t>
             </a:r>
             <a:endParaRPr lang="en-US" sz="1350" dirty="0"/>
           </a:p>
@@ -3488,7 +3488,7 @@
                 <a:ea typeface="Calibri" pitchFamily="34" charset="-122"/>
                 <a:cs typeface="Calibri" pitchFamily="34" charset="-120"/>
               </a:rPr>
-              <a:t>The two bugs on the previous slides (PII false positive, a skipped tool call) were only found by actually running the live stack end to end</a:t>
+              <a:t>Load testing caught a real bug: summarizing long chats sent parallel_tool_calls without tools (HTTP 500) - fixed and covered by a test</a:t>
             </a:r>
             <a:endParaRPr lang="en-US" sz="1350" dirty="0"/>
           </a:p>
@@ -4449,7 +4449,7 @@
                 <a:ea typeface="Calibri" pitchFamily="34" charset="-122"/>
                 <a:cs typeface="Calibri" pitchFamily="34" charset="-120"/>
               </a:rPr>
-              <a:t>A second agent drafts the admin's approval request</a:t>
+              <a:t>A HITL agent pauses each booking for the admin</a:t>
             </a:r>
             <a:endParaRPr lang="en-US" sz="1250" dirty="0"/>
           </a:p>
@@ -4787,7 +4787,7 @@
                 <a:ea typeface="Calibri" pitchFamily="34" charset="-122"/>
                 <a:cs typeface="Calibri" pitchFamily="34" charset="-120"/>
               </a:rPr>
-              <a:t>Durable orchestration ties stages 1–3 together</a:t>
+              <a:t>One checkpointed graph ties stages 1–3 together</a:t>
             </a:r>
             <a:endParaRPr lang="en-US" sz="1250" dirty="0"/>
           </a:p>
@@ -5205,7 +5205,7 @@
                 <a:ea typeface="Calibri" pitchFamily="34" charset="-122"/>
                 <a:cs typeface="Calibri" pitchFamily="34" charset="-120"/>
               </a:rPr>
-              <a:t>user_interaction node</a:t>
+              <a:t>user_agent node</a:t>
             </a:r>
             <a:endParaRPr lang="en-US" sz="1000" dirty="0"/>
           </a:p>
@@ -5578,7 +5578,7 @@
                 <a:ea typeface="Calibri" pitchFamily="34" charset="-122"/>
                 <a:cs typeface="Calibri" pitchFamily="34" charset="-120"/>
               </a:rPr>
-              <a:t>Approval graph</a:t>
+              <a:t>admin node</a:t>
             </a:r>
             <a:endParaRPr lang="en-US" sz="1300" dirty="0"/>
           </a:p>
@@ -5620,7 +5620,7 @@
                 <a:ea typeface="Calibri" pitchFamily="34" charset="-122"/>
                 <a:cs typeface="Calibri" pitchFamily="34" charset="-120"/>
               </a:rPr>
-              <a:t>interrupt() · checkpointed</a:t>
+              <a:t>HITL pause · checkpointed</a:t>
             </a:r>
             <a:endParaRPr lang="en-US" sz="1000" dirty="0"/>
           </a:p>
@@ -6086,7 +6086,7 @@
                 <a:ea typeface="Calibri" pitchFamily="34" charset="-122"/>
                 <a:cs typeface="Calibri" pitchFamily="34" charset="-120"/>
               </a:rPr>
-              <a:t>Reservation.status updated (recorded / rejected) — customer notified on their next chat message</a:t>
+              <a:t>record node sets approved / rejected — notification node pops the outcome up in the chat</a:t>
             </a:r>
             <a:endParaRPr lang="en-US" sz="1300" dirty="0"/>
           </a:p>
@@ -6368,7 +6368,7 @@
                 <a:ea typeface="Calibri" pitchFamily="34" charset="-122"/>
                 <a:cs typeface="Calibri" pitchFamily="34" charset="-120"/>
               </a:rPr>
-              <a:t>The model decides which tool to call each turn, in a loop that runs until it has a final answer</a:t>
+              <a:t>check_availability counts free spaces per period; a row lock stops two bookings taking the last one</a:t>
             </a:r>
             <a:endParaRPr lang="en-US" sz="1450" dirty="0"/>
           </a:p>
@@ -6831,7 +6831,7 @@
                 <a:ea typeface="Calibri" pitchFamily="34" charset="-122"/>
                 <a:cs typeface="Calibri" pitchFamily="34" charset="-120"/>
               </a:rPr>
-              <a:t>app/ai/tools.py · app/ai/parking_chat.py · app/db/repositories/*.py</a:t>
+              <a:t>app/ai/tools.py · app/ai/graph.py · app/db/repositories/*.py</a:t>
             </a:r>
             <a:endParaRPr lang="en-US" sz="1000" dirty="0"/>
           </a:p>
@@ -7026,7 +7026,7 @@
                 <a:ea typeface="Calibri" pitchFamily="34" charset="-122"/>
                 <a:cs typeface="Calibri" pitchFamily="34" charset="-120"/>
               </a:rPr>
-              <a:t>PIIGuard (Presidio + spaCy) blocks personal data in search queries and redacts it from free-text answers</a:t>
+              <a:t>PIIGuard (Presidio + spaCy) keeps PII out of search queries and Milvus; PIIMiddleware redacts the agent's traffic</a:t>
             </a:r>
             <a:endParaRPr lang="en-US" sz="1450" dirty="0"/>
           </a:p>
@@ -8139,7 +8139,7 @@
                 <a:ea typeface="Calibri" pitchFamily="34" charset="-122"/>
                 <a:cs typeface="Calibri" pitchFamily="34" charset="-120"/>
               </a:rPr>
-              <a:t>confirm → status = pending</a:t>
+              <a:t>Confirm → pending, awaiting the admin</a:t>
             </a:r>
             <a:endParaRPr lang="en-US" sz="1100" dirty="0"/>
           </a:p>
@@ -8178,7 +8178,7 @@
                 <a:ea typeface="Calibri" pitchFamily="34" charset="-122"/>
                 <a:cs typeface="Calibri" pitchFamily="34" charset="-120"/>
               </a:rPr>
-              <a:t>app/ai/tools.py · app/ai/parking_chat.py</a:t>
+              <a:t>app/ai/tools.py · app/ai/graph.py</a:t>
             </a:r>
             <a:endParaRPr lang="en-US" sz="1000" dirty="0"/>
           </a:p>
@@ -8327,7 +8327,7 @@
                 <a:ea typeface="Cambria" pitchFamily="34" charset="-122"/>
                 <a:cs typeface="Cambria" pitchFamily="34" charset="-120"/>
               </a:rPr>
-              <a:t>A second agent for the administrator</a:t>
+              <a:t>A human-in-the-loop admin agent</a:t>
             </a:r>
             <a:endParaRPr lang="en-US" sz="3000" dirty="0"/>
           </a:p>
@@ -8373,7 +8373,7 @@
                 <a:ea typeface="Calibri" pitchFamily="34" charset="-122"/>
                 <a:cs typeface="Calibri" pitchFamily="34" charset="-120"/>
               </a:rPr>
-              <a:t>admin_agent.py is the “second agent”: a small LangChain chain that drafts a plain-language approval request from the reservation's details</a:t>
+              <a:t>The second agent proposes request_admin_approval(summary); LangChain's HumanInTheLoopMiddleware pauses that call until the administrator decides</a:t>
             </a:r>
             <a:endParaRPr lang="en-US" sz="1400" dirty="0"/>
           </a:p>
@@ -8397,7 +8397,7 @@
                 <a:ea typeface="Calibri" pitchFamily="34" charset="-122"/>
                 <a:cs typeface="Calibri" pitchFamily="34" charset="-120"/>
               </a:rPr>
-              <a:t>The administrator decides over a REST API (GET /admin/reservations, POST .../decision), guarded by a static X-Admin-Key header</a:t>
+              <a:t>The administrator decides over a REST API (GET /admin/reservations, POST .../decision), guarded by X-Admin-Key with lockout</a:t>
             </a:r>
             <a:endParaRPr lang="en-US" sz="1400" dirty="0"/>
           </a:p>
@@ -8445,7 +8445,7 @@
                 <a:ea typeface="Calibri" pitchFamily="34" charset="-122"/>
                 <a:cs typeface="Calibri" pitchFamily="34" charset="-120"/>
               </a:rPr>
-              <a:t>The customer finds out too: the next chat message leads with an approved/rejected notice before anything else</a:t>
+              <a:t>The customer finds out too: the chat page polls and pops up “Reservation approved” or “rejected”</a:t>
             </a:r>
             <a:endParaRPr lang="en-US" sz="1400" dirty="0"/>
           </a:p>
@@ -8580,7 +8580,7 @@
                 <a:ea typeface="Calibri" pitchFamily="34" charset="-122"/>
                 <a:cs typeface="Calibri" pitchFamily="34" charset="-120"/>
               </a:rPr>
-              <a:t>app/ai/admin_agent.py · app/api/routers/admin.py · ui/admin_app.py</a:t>
+              <a:t>app/ai/agents.py · app/api/routers/admin.py · ui/admin_app.py</a:t>
             </a:r>
             <a:endParaRPr lang="en-US" sz="1000" dirty="0"/>
           </a:p>

--- a/docs/presentation.pptx
+++ b/docs/presentation.pptx
@@ -2939,7 +2939,7 @@
                 <a:ea typeface="Cambria" pitchFamily="34" charset="-122"/>
                 <a:cs typeface="Cambria" pitchFamily="34" charset="-120"/>
               </a:rPr>
-              <a:t>96</a:t>
+              <a:t>105</a:t>
             </a:r>
             <a:endParaRPr lang="en-US" sz="4000" dirty="0"/>
           </a:p>

--- a/docs/presentation.pptx
+++ b/docs/presentation.pptx
@@ -7947,7 +7947,7 @@
                 <a:ea typeface="Cambria" pitchFamily="34" charset="-122"/>
                 <a:cs typeface="Cambria" pitchFamily="34" charset="-120"/>
               </a:rPr>
-              <a:t>From review to a pending reservation</a:t>
+              <a:t>From review to an approved reservation</a:t>
             </a:r>
             <a:endParaRPr lang="en-US" sz="3000" dirty="0"/>
           </a:p>
@@ -8043,7 +8043,7 @@
                 <a:ea typeface="Calibri" pitchFamily="34" charset="-122"/>
                 <a:cs typeface="Calibri" pitchFamily="34" charset="-120"/>
               </a:rPr>
-              <a:t>prepare_reservation's review</a:t>
+              <a:t>prepare_reservation's review, with Confirm / Cancel</a:t>
             </a:r>
             <a:endParaRPr lang="en-US" sz="1100" dirty="0"/>
           </a:p>
@@ -8139,7 +8139,7 @@
                 <a:ea typeface="Calibri" pitchFamily="34" charset="-122"/>
                 <a:cs typeface="Calibri" pitchFamily="34" charset="-120"/>
               </a:rPr>
-              <a:t>Confirm → pending, awaiting the admin</a:t>
+              <a:t>Confirm → admin approves → pop-up in the chat</a:t>
             </a:r>
             <a:endParaRPr lang="en-US" sz="1100" dirty="0"/>
           </a:p>

--- a/docs/presentation.pptx
+++ b/docs/presentation.pptx
@@ -15,6 +15,7 @@
     <p:sldId id="263" r:id="rId9"/>
     <p:sldId id="264" r:id="rId10"/>
     <p:sldId id="265" r:id="rId11"/>
+    <p:sldId id="268" r:id="rId19"/>
     <p:sldId id="266" r:id="rId12"/>
     <p:sldId id="267" r:id="rId13"/>
   </p:sldIdLst>
@@ -3973,6 +3974,302 @@
 </p:sld>
 </file>
 
+<file path=ppt/slides/slide13.xml><?xml version="1.0" encoding="utf-8"?>
+<p:sld xmlns:a="http://schemas.openxmlformats.org/drawingml/2006/main" xmlns:r="http://schemas.openxmlformats.org/officeDocument/2006/relationships" xmlns:p="http://schemas.openxmlformats.org/presentationml/2006/main">
+  <p:cSld name="Slide 10">
+    <p:bg>
+      <p:bgPr>
+        <a:solidFill>
+          <a:schemeClr val="bg1"/>
+        </a:solidFill>
+      </p:bgPr>
+    </p:bg>
+    <p:spTree>
+      <p:nvGrpSpPr>
+        <p:cNvPr id="1" name=""/>
+        <p:cNvGrpSpPr/>
+        <p:nvPr/>
+      </p:nvGrpSpPr>
+      <p:grpSpPr>
+        <a:xfrm>
+          <a:off x="0" y="0"/>
+          <a:ext cx="0" cy="0"/>
+          <a:chOff x="0" y="0"/>
+          <a:chExt cx="0" cy="0"/>
+        </a:xfrm>
+      </p:grpSpPr>
+      <p:sp>
+        <p:nvSpPr>
+          <p:cNvPr id="2" name="Text 0"/>
+          <p:cNvSpPr txBox="1"/>
+          <p:nvPr/>
+        </p:nvSpPr>
+        <p:spPr>
+          <a:xfrm>
+            <a:off x="548640" y="457200"/>
+            <a:ext cx="9144000" cy="320040"/>
+          </a:xfrm>
+          <a:prstGeom prst="rect">
+            <a:avLst/>
+          </a:prstGeom>
+          <a:noFill/>
+          <a:ln/>
+        </p:spPr>
+        <p:txBody>
+          <a:bodyPr wrap="square" lIns="0" tIns="0" rIns="0" bIns="0" rtlCol="0" anchor="ctr"/>
+          <a:lstStyle/>
+          <a:p>
+            <a:pPr indent="0" marL="0">
+              <a:buNone/>
+            </a:pPr>
+            <a:r>
+              <a:rPr lang="en-US" sz="1200" b="1" spc="200" kern="0" dirty="0">
+                <a:solidFill>
+                  <a:schemeClr val="accent1"/>
+                </a:solidFill>
+                <a:latin typeface="Calibri" pitchFamily="34" charset="0"/>
+                <a:ea typeface="Calibri" pitchFamily="34" charset="-122"/>
+                <a:cs typeface="Calibri" pitchFamily="34" charset="-120"/>
+              </a:rPr>
+              <a:t>STAGE 4</a:t>
+            </a:r>
+            <a:endParaRPr lang="en-US" sz="1200" dirty="0"/>
+          </a:p>
+        </p:txBody>
+      </p:sp>
+      <p:sp>
+        <p:nvSpPr>
+          <p:cNvPr id="3" name="Text 1"/>
+          <p:cNvSpPr txBox="1"/>
+          <p:nvPr/>
+        </p:nvSpPr>
+        <p:spPr>
+          <a:xfrm>
+            <a:off x="548640" y="777240"/>
+            <a:ext cx="11091672" cy="731520"/>
+          </a:xfrm>
+          <a:prstGeom prst="rect">
+            <a:avLst/>
+          </a:prstGeom>
+          <a:noFill/>
+          <a:ln/>
+        </p:spPr>
+        <p:txBody>
+          <a:bodyPr wrap="square" lIns="0" tIns="0" rIns="0" bIns="0" rtlCol="0" anchor="ctr"/>
+          <a:lstStyle/>
+          <a:p>
+            <a:pPr indent="0" marL="0">
+              <a:buNone/>
+            </a:pPr>
+            <a:r>
+              <a:rPr lang="en-US" sz="3000" b="1" dirty="0">
+                <a:solidFill>
+                  <a:schemeClr val="tx1"/>
+                </a:solidFill>
+                <a:latin typeface="Cambria" pitchFamily="34" charset="0"/>
+                <a:ea typeface="Cambria" pitchFamily="34" charset="-122"/>
+                <a:cs typeface="Cambria" pitchFamily="34" charset="-120"/>
+              </a:rPr>
+              <a:t>The graph, as LangGraph draws it</a:t>
+            </a:r>
+            <a:endParaRPr lang="en-US" sz="3000" dirty="0"/>
+          </a:p>
+        </p:txBody>
+      </p:sp>
+      <p:sp>
+        <p:nvSpPr>
+          <p:cNvPr id="4" name="Text 2"/>
+          <p:cNvSpPr txBox="1"/>
+          <p:nvPr/>
+        </p:nvSpPr>
+        <p:spPr>
+          <a:xfrm>
+            <a:off x="548640" y="1600200"/>
+            <a:ext cx="11091672" cy="640080"/>
+          </a:xfrm>
+          <a:prstGeom prst="rect">
+            <a:avLst/>
+          </a:prstGeom>
+          <a:noFill/>
+          <a:ln/>
+        </p:spPr>
+        <p:txBody>
+          <a:bodyPr wrap="square" lIns="0" tIns="0" rIns="0" bIns="0" rtlCol="0" anchor="ctr"/>
+          <a:lstStyle/>
+          <a:p>
+            <a:pPr indent="0" marL="0">
+              <a:lnSpc>
+                <a:spcPct val="130000"/>
+              </a:lnSpc>
+              <a:buNone/>
+            </a:pPr>
+            <a:r>
+              <a:rPr lang="en-US" sz="1400" dirty="0">
+                <a:solidFill>
+                  <a:schemeClr val="tx2"/>
+                </a:solidFill>
+                <a:latin typeface="Calibri" pitchFamily="34" charset="0"/>
+                <a:ea typeface="Calibri" pitchFamily="34" charset="-122"/>
+                <a:cs typeface="Calibri" pitchFamily="34" charset="-120"/>
+              </a:rPr>
+              <a:t>Rendered from the compiled graph itself, not drawn by hand. Solid arrows are fixed edges; dotted ones are conditional: after confirm, user_agent routes to admin - any other turn ends.</a:t>
+            </a:r>
+            <a:endParaRPr lang="en-US" sz="1400" dirty="0"/>
+          </a:p>
+        </p:txBody>
+      </p:sp>
+      <p:sp>
+        <p:nvSpPr>
+          <p:cNvPr id="16" name="Text 14"/>
+          <p:cNvSpPr txBox="1"/>
+          <p:nvPr/>
+        </p:nvSpPr>
+        <p:spPr>
+          <a:xfrm>
+            <a:off x="548640" y="4846320"/>
+            <a:ext cx="11091672" cy="731520"/>
+          </a:xfrm>
+          <a:prstGeom prst="rect">
+            <a:avLst/>
+          </a:prstGeom>
+          <a:noFill/>
+          <a:ln/>
+        </p:spPr>
+        <p:txBody>
+          <a:bodyPr wrap="square" lIns="0" tIns="0" rIns="0" bIns="0" rtlCol="0" anchor="ctr"/>
+          <a:lstStyle/>
+          <a:p>
+            <a:pPr indent="0" marL="0">
+              <a:lnSpc>
+                <a:spcPct val="130000"/>
+              </a:lnSpc>
+              <a:buNone/>
+            </a:pPr>
+            <a:r>
+              <a:rPr lang="en-US" sz="1300" i="1" dirty="0">
+                <a:solidFill>
+                  <a:schemeClr val="tx2"/>
+                </a:solidFill>
+                <a:latin typeface="Calibri" pitchFamily="34" charset="0"/>
+                <a:ea typeface="Calibri" pitchFamily="34" charset="-122"/>
+                <a:cs typeface="Calibri" pitchFamily="34" charset="-120"/>
+              </a:rPr>
+              <a:t>docs/graph.md also has the user and admin agents' own graphs, where middleware - history summarization, the human-in-the-loop pause - shows up as steps. Regenerate with python -m scripts.export_graph.</a:t>
+            </a:r>
+            <a:endParaRPr lang="en-US" sz="1300" dirty="0"/>
+          </a:p>
+        </p:txBody>
+      </p:sp>
+      <p:sp>
+        <p:nvSpPr>
+          <p:cNvPr id="17" name="Text 15"/>
+          <p:cNvSpPr txBox="1"/>
+          <p:nvPr/>
+        </p:nvSpPr>
+        <p:spPr>
+          <a:xfrm>
+            <a:off x="548640" y="6473952"/>
+            <a:ext cx="6400800" cy="274320"/>
+          </a:xfrm>
+          <a:prstGeom prst="rect">
+            <a:avLst/>
+          </a:prstGeom>
+          <a:noFill/>
+          <a:ln/>
+        </p:spPr>
+        <p:txBody>
+          <a:bodyPr wrap="square" lIns="0" tIns="0" rIns="0" bIns="0" rtlCol="0" anchor="ctr"/>
+          <a:lstStyle/>
+          <a:p>
+            <a:pPr indent="0" marL="0">
+              <a:buNone/>
+            </a:pPr>
+            <a:r>
+              <a:rPr lang="en-US" sz="1000" dirty="0">
+                <a:solidFill>
+                  <a:schemeClr val="tx2"/>
+                </a:solidFill>
+                <a:latin typeface="Calibri" pitchFamily="34" charset="0"/>
+                <a:ea typeface="Calibri" pitchFamily="34" charset="-122"/>
+                <a:cs typeface="Calibri" pitchFamily="34" charset="-120"/>
+              </a:rPr>
+              <a:t>scripts/export_graph.py · docs/graph.md</a:t>
+            </a:r>
+            <a:endParaRPr lang="en-US" sz="1000" dirty="0"/>
+          </a:p>
+        </p:txBody>
+      </p:sp>
+      <p:sp>
+        <p:nvSpPr>
+          <p:cNvPr id="18" name="Text 16"/>
+          <p:cNvSpPr txBox="1"/>
+          <p:nvPr/>
+        </p:nvSpPr>
+        <p:spPr>
+          <a:xfrm>
+            <a:off x="8897112" y="6473952"/>
+            <a:ext cx="2743200" cy="274320"/>
+          </a:xfrm>
+          <a:prstGeom prst="rect">
+            <a:avLst/>
+          </a:prstGeom>
+          <a:noFill/>
+          <a:ln/>
+        </p:spPr>
+        <p:txBody>
+          <a:bodyPr wrap="square" lIns="0" tIns="0" rIns="0" bIns="0" rtlCol="0" anchor="ctr"/>
+          <a:lstStyle/>
+          <a:p>
+            <a:pPr algn="r" indent="0" marL="0">
+              <a:buNone/>
+            </a:pPr>
+            <a:r>
+              <a:rPr lang="en-US" sz="1000" dirty="0">
+                <a:solidFill>
+                  <a:schemeClr val="tx2"/>
+                </a:solidFill>
+                <a:latin typeface="Calibri" pitchFamily="34" charset="0"/>
+                <a:ea typeface="Calibri" pitchFamily="34" charset="-122"/>
+                <a:cs typeface="Calibri" pitchFamily="34" charset="-120"/>
+              </a:rPr>
+              <a:t>VilniusPark Chatbot</a:t>
+            </a:r>
+            <a:endParaRPr lang="en-US" sz="1000" dirty="0"/>
+          </a:p>
+        </p:txBody>
+      </p:sp>
+      <p:pic>
+        <p:nvPicPr>
+          <p:cNvPr id="30" name="ParkingGraph diagram" descr="ParkingGraph rendered by LangGraph: start, user_agent, then either end or admin, record, notification, end"/>
+          <p:cNvPicPr>
+            <a:picLocks noChangeAspect="1"/>
+          </p:cNvPicPr>
+          <p:nvPr/>
+        </p:nvPicPr>
+        <p:blipFill>
+          <a:blip r:embed="rIdGraph"/>
+          <a:stretch>
+            <a:fillRect/>
+          </a:stretch>
+        </p:blipFill>
+        <p:spPr>
+          <a:xfrm>
+            <a:off x="548640" y="2854625"/>
+            <a:ext cx="11091672" cy="1423069"/>
+          </a:xfrm>
+          <a:prstGeom prst="rect">
+            <a:avLst/>
+          </a:prstGeom>
+        </p:spPr>
+      </p:pic>
+    </p:spTree>
+  </p:cSld>
+  <p:clrMapOvr>
+    <a:masterClrMapping/>
+  </p:clrMapOvr>
+</p:sld>
+</file>
+
 <file path=ppt/slides/slide2.xml><?xml version="1.0" encoding="utf-8"?>
 <p:sld xmlns:a="http://schemas.openxmlformats.org/drawingml/2006/main" xmlns:r="http://schemas.openxmlformats.org/officeDocument/2006/relationships" xmlns:p="http://schemas.openxmlformats.org/presentationml/2006/main">
   <p:cSld name="Slide 2">

--- a/docs/presentation.pptx
+++ b/docs/presentation.pptx
@@ -2940,7 +2940,7 @@
                 <a:ea typeface="Cambria" pitchFamily="34" charset="-122"/>
                 <a:cs typeface="Cambria" pitchFamily="34" charset="-120"/>
               </a:rPr>
-              <a:t>105</a:t>
+              <a:t>161</a:t>
             </a:r>
             <a:endParaRPr lang="en-US" sz="4000" dirty="0"/>
           </a:p>
@@ -3186,7 +3186,7 @@
                 <a:ea typeface="Cambria" pitchFamily="34" charset="-122"/>
                 <a:cs typeface="Cambria" pitchFamily="34" charset="-120"/>
               </a:rPr>
-              <a:t>0.93</a:t>
+              <a:t>1.00</a:t>
             </a:r>
             <a:endParaRPr lang="en-US" sz="4000" dirty="0"/>
           </a:p>
@@ -3228,7 +3228,7 @@
                 <a:ea typeface="Calibri" pitchFamily="34" charset="-122"/>
                 <a:cs typeface="Calibri" pitchFamily="34" charset="-120"/>
               </a:rPr>
-              <a:t>Recall@4 on the</a:t>
+              <a:t>Recall@3 on the</a:t>
             </a:r>
             <a:endParaRPr lang="en-US" sz="1150" dirty="0"/>
           </a:p>
@@ -3441,7 +3441,7 @@
                 <a:ea typeface="Calibri" pitchFamily="34" charset="-122"/>
                 <a:cs typeface="Calibri" pitchFamily="34" charset="-120"/>
               </a:rPr>
-              <a:t>evals/report.md: Precision@4 0.58, Recall@4 0.93; retrieval about 0.6 s, a full chat turn about 3.7 s</a:t>
+              <a:t>evals/report.md: hybrid search (vector + BM25): Recall@3 1.00, right doc first 87% (MRR 0.92); Evidently judges: faithful 93%, complete 93%, no PII</a:t>
             </a:r>
             <a:endParaRPr lang="en-US" sz="1350" dirty="0"/>
           </a:p>
@@ -6989,7 +6989,7 @@
                 <a:ea typeface="Calibri" pitchFamily="34" charset="-122"/>
                 <a:cs typeface="Calibri" pitchFamily="34" charset="-120"/>
               </a:rPr>
-              <a:t>Milvus search, PII-guarded</a:t>
+              <a:t>hybrid vector + BM25 search, PII-guarded</a:t>
             </a:r>
             <a:endParaRPr lang="en-US" sz="1150" dirty="0"/>
           </a:p>

--- a/docs/presentation.pptx
+++ b/docs/presentation.pptx
@@ -2940,7 +2940,7 @@
                 <a:ea typeface="Cambria" pitchFamily="34" charset="-122"/>
                 <a:cs typeface="Cambria" pitchFamily="34" charset="-120"/>
               </a:rPr>
-              <a:t>161</a:t>
+              <a:t>166</a:t>
             </a:r>
             <a:endParaRPr lang="en-US" sz="4000" dirty="0"/>
           </a:p>
@@ -3248,7 +3248,7 @@
                 <a:ea typeface="Calibri" pitchFamily="34" charset="-122"/>
                 <a:cs typeface="Calibri" pitchFamily="34" charset="-120"/>
               </a:rPr>
-              <a:t>15-question golden set</a:t>
+              <a:t>15 single-fact questions</a:t>
             </a:r>
             <a:endParaRPr lang="en-US" sz="1150" dirty="0"/>
           </a:p>
@@ -3441,7 +3441,7 @@
                 <a:ea typeface="Calibri" pitchFamily="34" charset="-122"/>
                 <a:cs typeface="Calibri" pitchFamily="34" charset="-120"/>
               </a:rPr>
-              <a:t>evals/report.md: hybrid search (vector + BM25): Recall@3 1.00, right doc first 87% (MRR 0.92); Evidently judges: faithful 93%, complete 93%, no PII</a:t>
+              <a:t>evals/report.md: 30 questions incl. 15 hard ones; Evidently: 67% pass every check, no PII; reviewing failures found 2 real bugs, 7 judge errors</a:t>
             </a:r>
             <a:endParaRPr lang="en-US" sz="1350" dirty="0"/>
           </a:p>

--- a/docs/presentation.pptx
+++ b/docs/presentation.pptx
@@ -7,16 +7,26 @@
   <p:sldIdLst>
     <p:sldId id="256" r:id="rId2"/>
     <p:sldId id="257" r:id="rId3"/>
-    <p:sldId id="258" r:id="rId4"/>
+    <p:sldId id="261" r:id="rId7"/>
+    <p:sldId id="269" r:id="rId20"/>
+    <p:sldId id="270" r:id="rId21"/>
+    <p:sldId id="271" r:id="rId22"/>
+    <p:sldId id="272" r:id="rId23"/>
+    <p:sldId id="273" r:id="rId24"/>
+    <p:sldId id="274" r:id="rId25"/>
+    <p:sldId id="275" r:id="rId26"/>
+    <p:sldId id="276" r:id="rId27"/>
+    <p:sldId id="260" r:id="rId6"/>
     <p:sldId id="259" r:id="rId5"/>
-    <p:sldId id="260" r:id="rId6"/>
-    <p:sldId id="261" r:id="rId7"/>
-    <p:sldId id="262" r:id="rId8"/>
     <p:sldId id="263" r:id="rId9"/>
     <p:sldId id="264" r:id="rId10"/>
     <p:sldId id="265" r:id="rId11"/>
     <p:sldId id="268" r:id="rId19"/>
+    <p:sldId id="258" r:id="rId4"/>
+    <p:sldId id="277" r:id="rId28"/>
+    <p:sldId id="278" r:id="rId29"/>
     <p:sldId id="266" r:id="rId12"/>
+    <p:sldId id="279" r:id="rId30"/>
     <p:sldId id="267" r:id="rId13"/>
   </p:sldIdLst>
   <p:notesMasterIdLst>
@@ -168,6 +178,235 @@
 </p:presentation>
 </file>
 
+<file path=ppt/charts/chart1.xml><?xml version="1.0" encoding="utf-8"?>
+<c:chartSpace xmlns:c="http://schemas.openxmlformats.org/drawingml/2006/chart" xmlns:a="http://schemas.openxmlformats.org/drawingml/2006/main" xmlns:r="http://schemas.openxmlformats.org/officeDocument/2006/relationships">
+  <c:date1904 val="0"/>
+  <c:chart>
+    <c:title>
+      <c:tx>
+        <c:rich>
+          <a:bodyPr/>
+          <a:lstStyle/>
+          <a:p>
+            <a:r>
+              <a:rPr sz="1200" b="1">
+                <a:solidFill>
+                  <a:srgbClr val="132257"/>
+                </a:solidFill>
+              </a:rPr>
+              <a:t>Evidently: share of questions passing every check, by category</a:t>
+            </a:r>
+          </a:p>
+        </c:rich>
+      </c:tx>
+      <c:layout/>
+      <c:overlay val="0"/>
+    </c:title>
+    <c:autoTitleDeleted val="0"/>
+    <c:plotArea>
+      <c:barChart>
+        <c:barDir val="bar"/>
+        <c:grouping val="clustered"/>
+        <c:ser>
+          <c:idx val="0"/>
+          <c:order val="0"/>
+          <c:tx>
+            <c:strRef>
+              <c:f>Sheet1!$B$1</c:f>
+              <c:strCache>
+                <c:ptCount val="1"/>
+                <c:pt idx="0">
+                  <c:v>Passing every check</c:v>
+                </c:pt>
+              </c:strCache>
+            </c:strRef>
+          </c:tx>
+          <c:spPr>
+            <a:solidFill>
+              <a:srgbClr val="2563EB"/>
+            </a:solidFill>
+          </c:spPr>
+          <c:cat>
+            <c:strRef>
+              <c:f>Sheet1!$A$2:$A$8</c:f>
+              <c:strCache>
+                <c:ptCount val="7"/>
+                <c:pt idx="0">
+                  <c:v>single_fact (15)</c:v>
+                </c:pt>
+                <c:pt idx="1">
+                  <c:v>paraphrase (5)</c:v>
+                </c:pt>
+                <c:pt idx="2">
+                  <c:v>multi_fact (3)</c:v>
+                </c:pt>
+                <c:pt idx="3">
+                  <c:v>not_in_docs (2)</c:v>
+                </c:pt>
+                <c:pt idx="4">
+                  <c:v>out_of_scope (2)</c:v>
+                </c:pt>
+                <c:pt idx="5">
+                  <c:v>private_data (2)</c:v>
+                </c:pt>
+                <c:pt idx="6">
+                  <c:v>injection (1)</c:v>
+                </c:pt>
+              </c:strCache>
+            </c:strRef>
+          </c:cat>
+          <c:val>
+            <c:numRef>
+              <c:f>Sheet1!$B$2:$B$8</c:f>
+              <c:numCache>
+                <c:formatCode>General</c:formatCode>
+                <c:ptCount val="7"/>
+                <c:pt idx="0">
+                  <c:v>1.0</c:v>
+                </c:pt>
+                <c:pt idx="1">
+                  <c:v>0.2</c:v>
+                </c:pt>
+                <c:pt idx="2">
+                  <c:v>0.3333333333333333</c:v>
+                </c:pt>
+                <c:pt idx="3">
+                  <c:v>0.5</c:v>
+                </c:pt>
+                <c:pt idx="4">
+                  <c:v>1.0</c:v>
+                </c:pt>
+                <c:pt idx="5">
+                  <c:v>1.0</c:v>
+                </c:pt>
+                <c:pt idx="6">
+                  <c:v>1.0</c:v>
+                </c:pt>
+              </c:numCache>
+            </c:numRef>
+          </c:val>
+        </c:ser>
+        <c:dLbls>
+          <c:numFmt formatCode="0%" sourceLinked="0"/>
+          <c:txPr>
+            <a:bodyPr/>
+            <a:lstStyle/>
+            <a:p>
+              <a:pPr>
+                <a:defRPr sz="1000">
+                  <a:solidFill>
+                    <a:srgbClr val="132257"/>
+                  </a:solidFill>
+                </a:defRPr>
+              </a:pPr>
+            </a:p>
+          </c:txPr>
+          <c:dLblPos val="outEnd"/>
+          <c:showLegendKey val="0"/>
+          <c:showVal val="1"/>
+          <c:showCatName val="0"/>
+          <c:showSerName val="0"/>
+          <c:showPercent val="0"/>
+          <c:showBubbleSize val="0"/>
+          <c:showLeaderLines val="1"/>
+        </c:dLbls>
+        <c:gapWidth val="60"/>
+        <c:axId val="-2068027336"/>
+        <c:axId val="-2113994440"/>
+      </c:barChart>
+      <c:catAx>
+        <c:axId val="-2068027336"/>
+        <c:scaling>
+          <c:orientation val="maxMin"/>
+        </c:scaling>
+        <c:delete val="0"/>
+        <c:axPos val="l"/>
+        <c:majorTickMark val="out"/>
+        <c:minorTickMark val="none"/>
+        <c:tickLblPos val="nextTo"/>
+        <c:spPr>
+          <a:ln>
+            <a:solidFill>
+              <a:srgbClr val="DBE4EF"/>
+            </a:solidFill>
+          </a:ln>
+        </c:spPr>
+        <c:txPr>
+          <a:bodyPr/>
+          <a:lstStyle/>
+          <a:p>
+            <a:pPr>
+              <a:defRPr sz="1000">
+                <a:solidFill>
+                  <a:srgbClr val="132257"/>
+                </a:solidFill>
+              </a:defRPr>
+            </a:pPr>
+          </a:p>
+        </c:txPr>
+        <c:crossAx val="-2113994440"/>
+        <c:crosses val="autoZero"/>
+        <c:auto val="1"/>
+        <c:lblAlgn val="ctr"/>
+        <c:lblOffset val="100"/>
+        <c:noMultiLvlLbl val="0"/>
+      </c:catAx>
+      <c:valAx>
+        <c:axId val="-2113994440"/>
+        <c:scaling>
+          <c:max val="1.0"/>
+          <c:min val="0.0"/>
+        </c:scaling>
+        <c:delete val="0"/>
+        <c:axPos val="b"/>
+        <c:majorGridlines>
+          <c:spPr>
+            <a:ln>
+              <a:solidFill>
+                <a:srgbClr val="DBE4EF"/>
+              </a:solidFill>
+            </a:ln>
+          </c:spPr>
+        </c:majorGridlines>
+        <c:numFmt formatCode="0%" sourceLinked="0"/>
+        <c:majorTickMark val="out"/>
+        <c:minorTickMark val="none"/>
+        <c:tickLblPos val="nextTo"/>
+        <c:txPr>
+          <a:bodyPr/>
+          <a:lstStyle/>
+          <a:p>
+            <a:pPr>
+              <a:defRPr sz="900">
+                <a:solidFill>
+                  <a:srgbClr val="64748B"/>
+                </a:solidFill>
+              </a:defRPr>
+            </a:pPr>
+          </a:p>
+        </c:txPr>
+        <c:crossAx val="-2068027336"/>
+        <c:crosses val="autoZero"/>
+      </c:valAx>
+    </c:plotArea>
+    <c:dispBlanksAs val="gap"/>
+  </c:chart>
+  <c:txPr>
+    <a:bodyPr/>
+    <a:lstStyle/>
+    <a:p>
+      <a:pPr>
+        <a:defRPr sz="1800"/>
+      </a:pPr>
+      <a:endParaRPr lang="en-US"/>
+    </a:p>
+  </c:txPr>
+  <c:externalData r:id="rId1">
+    <c:autoUpdate val="0"/>
+  </c:externalData>
+</c:chartSpace>
+</file>
+
 <file path=ppt/notesMasters/notesMaster1.xml><?xml version="1.0" encoding="utf-8"?>
 <p:notesMaster xmlns:a="http://schemas.openxmlformats.org/drawingml/2006/main" xmlns:r="http://schemas.openxmlformats.org/officeDocument/2006/relationships" xmlns:p="http://schemas.openxmlformats.org/presentationml/2006/main">
   <p:cSld>
@@ -1291,94 +1530,6 @@
             <a:fld id="{F7021451-1387-4CA6-816F-3879F97B5CBC}" type="slidenum">
               <a:rPr lang="en-US"/>
               <a:t>6</a:t>
-            </a:fld>
-            <a:endParaRPr lang="en-US"/>
-          </a:p>
-        </p:txBody>
-      </p:sp>
-    </p:spTree>
-    <p:extLst>
-      <p:ext uri="{BB962C8B-B14F-4D97-AF65-F5344CB8AC3E}">
-        <p14:creationId xmlns:p14="http://schemas.microsoft.com/office/powerpoint/2010/main" val="1024086991"/>
-      </p:ext>
-    </p:extLst>
-  </p:cSld>
-  <p:clrMapOvr>
-    <a:masterClrMapping/>
-  </p:clrMapOvr>
-</p:notes>
-</file>
-
-<file path=ppt/notesSlides/notesSlide7.xml><?xml version="1.0" encoding="utf-8"?>
-<p:notes xmlns:a="http://schemas.openxmlformats.org/drawingml/2006/main" xmlns:r="http://schemas.openxmlformats.org/officeDocument/2006/relationships" xmlns:p="http://schemas.openxmlformats.org/presentationml/2006/main">
-  <p:cSld>
-    <p:spTree>
-      <p:nvGrpSpPr>
-        <p:cNvPr id="1" name=""/>
-        <p:cNvGrpSpPr/>
-        <p:nvPr/>
-      </p:nvGrpSpPr>
-      <p:grpSpPr>
-        <a:xfrm>
-          <a:off x="0" y="0"/>
-          <a:ext cx="0" cy="0"/>
-          <a:chOff x="0" y="0"/>
-          <a:chExt cx="0" cy="0"/>
-        </a:xfrm>
-      </p:grpSpPr>
-      <p:sp>
-        <p:nvSpPr>
-          <p:cNvPr id="2" name="Slide Image Placeholder 1"/>
-          <p:cNvSpPr>
-            <a:spLocks noGrp="1" noRot="1" noChangeAspect="1"/>
-          </p:cNvSpPr>
-          <p:nvPr>
-            <p:ph type="sldImg"/>
-          </p:nvPr>
-        </p:nvSpPr>
-        <p:spPr/>
-      </p:sp>
-      <p:sp>
-        <p:nvSpPr>
-          <p:cNvPr id="3" name="Notes Placeholder 2"/>
-          <p:cNvSpPr>
-            <a:spLocks noGrp="1"/>
-          </p:cNvSpPr>
-          <p:nvPr>
-            <p:ph type="body" idx="1"/>
-          </p:nvPr>
-        </p:nvSpPr>
-        <p:spPr/>
-        <p:txBody>
-          <a:bodyPr/>
-          <a:lstStyle/>
-          <a:p>
-            <a:r>
-              <a:rPr lang="en-US" dirty="0"/>
-              <a:t/>
-            </a:r>
-            <a:endParaRPr lang="en-US" dirty="0"/>
-          </a:p>
-        </p:txBody>
-      </p:sp>
-      <p:sp>
-        <p:nvSpPr>
-          <p:cNvPr id="4" name="Slide Number Placeholder 3"/>
-          <p:cNvSpPr>
-            <a:spLocks noGrp="1"/>
-          </p:cNvSpPr>
-          <p:nvPr>
-            <p:ph type="sldNum" sz="quarter" idx="10"/>
-          </p:nvPr>
-        </p:nvSpPr>
-        <p:spPr/>
-        <p:txBody>
-          <a:bodyPr/>
-          <a:lstStyle/>
-          <a:p>
-            <a:fld id="{F7021451-1387-4CA6-816F-3879F97B5CBC}" type="slidenum">
-              <a:rPr lang="en-US"/>
-              <a:t>7</a:t>
             </a:fld>
             <a:endParaRPr lang="en-US"/>
           </a:p>
@@ -2785,6 +2936,302 @@
 
 <file path=ppt/slides/slide11.xml><?xml version="1.0" encoding="utf-8"?>
 <p:sld xmlns:a="http://schemas.openxmlformats.org/drawingml/2006/main" xmlns:r="http://schemas.openxmlformats.org/officeDocument/2006/relationships" xmlns:p="http://schemas.openxmlformats.org/presentationml/2006/main">
+  <p:cSld name="Slide 10">
+    <p:bg>
+      <p:bgPr>
+        <a:solidFill>
+          <a:schemeClr val="bg1"/>
+        </a:solidFill>
+      </p:bgPr>
+    </p:bg>
+    <p:spTree>
+      <p:nvGrpSpPr>
+        <p:cNvPr id="1" name=""/>
+        <p:cNvGrpSpPr/>
+        <p:nvPr/>
+      </p:nvGrpSpPr>
+      <p:grpSpPr>
+        <a:xfrm>
+          <a:off x="0" y="0"/>
+          <a:ext cx="0" cy="0"/>
+          <a:chOff x="0" y="0"/>
+          <a:chExt cx="0" cy="0"/>
+        </a:xfrm>
+      </p:grpSpPr>
+      <p:sp>
+        <p:nvSpPr>
+          <p:cNvPr id="2" name="Text 0"/>
+          <p:cNvSpPr txBox="1"/>
+          <p:nvPr/>
+        </p:nvSpPr>
+        <p:spPr>
+          <a:xfrm>
+            <a:off x="548640" y="457200"/>
+            <a:ext cx="9144000" cy="320040"/>
+          </a:xfrm>
+          <a:prstGeom prst="rect">
+            <a:avLst/>
+          </a:prstGeom>
+          <a:noFill/>
+          <a:ln/>
+        </p:spPr>
+        <p:txBody>
+          <a:bodyPr wrap="square" lIns="0" tIns="0" rIns="0" bIns="0" rtlCol="0" anchor="ctr"/>
+          <a:lstStyle/>
+          <a:p>
+            <a:pPr indent="0" marL="0">
+              <a:buNone/>
+            </a:pPr>
+            <a:r>
+              <a:rPr lang="en-US" sz="1200" b="1" spc="200" kern="0" dirty="0">
+                <a:solidFill>
+                  <a:schemeClr val="accent1"/>
+                </a:solidFill>
+                <a:latin typeface="Calibri" pitchFamily="34" charset="0"/>
+                <a:ea typeface="Calibri" pitchFamily="34" charset="-122"/>
+                <a:cs typeface="Calibri" pitchFamily="34" charset="-120"/>
+              </a:rPr>
+              <a:t>STAGE 4</a:t>
+            </a:r>
+            <a:endParaRPr lang="en-US" sz="1200" dirty="0"/>
+          </a:p>
+        </p:txBody>
+      </p:sp>
+      <p:sp>
+        <p:nvSpPr>
+          <p:cNvPr id="3" name="Text 1"/>
+          <p:cNvSpPr txBox="1"/>
+          <p:nvPr/>
+        </p:nvSpPr>
+        <p:spPr>
+          <a:xfrm>
+            <a:off x="548640" y="777240"/>
+            <a:ext cx="11091672" cy="731520"/>
+          </a:xfrm>
+          <a:prstGeom prst="rect">
+            <a:avLst/>
+          </a:prstGeom>
+          <a:noFill/>
+          <a:ln/>
+        </p:spPr>
+        <p:txBody>
+          <a:bodyPr wrap="square" lIns="0" tIns="0" rIns="0" bIns="0" rtlCol="0" anchor="ctr"/>
+          <a:lstStyle/>
+          <a:p>
+            <a:pPr indent="0" marL="0">
+              <a:buNone/>
+            </a:pPr>
+            <a:r>
+              <a:rPr lang="en-US" sz="3000" b="1" dirty="0">
+                <a:solidFill>
+                  <a:schemeClr val="tx1"/>
+                </a:solidFill>
+                <a:latin typeface="Cambria" pitchFamily="34" charset="0"/>
+                <a:ea typeface="Cambria" pitchFamily="34" charset="-122"/>
+                <a:cs typeface="Cambria" pitchFamily="34" charset="-120"/>
+              </a:rPr>
+              <a:t>The graph, as LangGraph draws it</a:t>
+            </a:r>
+            <a:endParaRPr lang="en-US" sz="3000" dirty="0"/>
+          </a:p>
+        </p:txBody>
+      </p:sp>
+      <p:sp>
+        <p:nvSpPr>
+          <p:cNvPr id="4" name="Text 2"/>
+          <p:cNvSpPr txBox="1"/>
+          <p:nvPr/>
+        </p:nvSpPr>
+        <p:spPr>
+          <a:xfrm>
+            <a:off x="548640" y="1600200"/>
+            <a:ext cx="11091672" cy="640080"/>
+          </a:xfrm>
+          <a:prstGeom prst="rect">
+            <a:avLst/>
+          </a:prstGeom>
+          <a:noFill/>
+          <a:ln/>
+        </p:spPr>
+        <p:txBody>
+          <a:bodyPr wrap="square" lIns="0" tIns="0" rIns="0" bIns="0" rtlCol="0" anchor="ctr"/>
+          <a:lstStyle/>
+          <a:p>
+            <a:pPr indent="0" marL="0">
+              <a:lnSpc>
+                <a:spcPct val="130000"/>
+              </a:lnSpc>
+              <a:buNone/>
+            </a:pPr>
+            <a:r>
+              <a:rPr lang="en-US" sz="1400" dirty="0">
+                <a:solidFill>
+                  <a:schemeClr val="tx2"/>
+                </a:solidFill>
+                <a:latin typeface="Calibri" pitchFamily="34" charset="0"/>
+                <a:ea typeface="Calibri" pitchFamily="34" charset="-122"/>
+                <a:cs typeface="Calibri" pitchFamily="34" charset="-120"/>
+              </a:rPr>
+              <a:t>Rendered from the compiled graph itself, not drawn by hand. Solid arrows are fixed edges; dotted ones are conditional: after confirm, user_agent routes to admin - any other turn ends.</a:t>
+            </a:r>
+            <a:endParaRPr lang="en-US" sz="1400" dirty="0"/>
+          </a:p>
+        </p:txBody>
+      </p:sp>
+      <p:sp>
+        <p:nvSpPr>
+          <p:cNvPr id="16" name="Text 14"/>
+          <p:cNvSpPr txBox="1"/>
+          <p:nvPr/>
+        </p:nvSpPr>
+        <p:spPr>
+          <a:xfrm>
+            <a:off x="548640" y="4846320"/>
+            <a:ext cx="11091672" cy="731520"/>
+          </a:xfrm>
+          <a:prstGeom prst="rect">
+            <a:avLst/>
+          </a:prstGeom>
+          <a:noFill/>
+          <a:ln/>
+        </p:spPr>
+        <p:txBody>
+          <a:bodyPr wrap="square" lIns="0" tIns="0" rIns="0" bIns="0" rtlCol="0" anchor="ctr"/>
+          <a:lstStyle/>
+          <a:p>
+            <a:pPr indent="0" marL="0">
+              <a:lnSpc>
+                <a:spcPct val="130000"/>
+              </a:lnSpc>
+              <a:buNone/>
+            </a:pPr>
+            <a:r>
+              <a:rPr lang="en-US" sz="1300" i="1" dirty="0">
+                <a:solidFill>
+                  <a:schemeClr val="tx2"/>
+                </a:solidFill>
+                <a:latin typeface="Calibri" pitchFamily="34" charset="0"/>
+                <a:ea typeface="Calibri" pitchFamily="34" charset="-122"/>
+                <a:cs typeface="Calibri" pitchFamily="34" charset="-120"/>
+              </a:rPr>
+              <a:t>docs/graph.md also has the user and admin agents' own graphs, where middleware - history summarization, the human-in-the-loop pause - shows up as steps. Regenerate with python -m scripts.export_graph.</a:t>
+            </a:r>
+            <a:endParaRPr lang="en-US" sz="1300" dirty="0"/>
+          </a:p>
+        </p:txBody>
+      </p:sp>
+      <p:sp>
+        <p:nvSpPr>
+          <p:cNvPr id="17" name="Text 15"/>
+          <p:cNvSpPr txBox="1"/>
+          <p:nvPr/>
+        </p:nvSpPr>
+        <p:spPr>
+          <a:xfrm>
+            <a:off x="548640" y="6473952"/>
+            <a:ext cx="6400800" cy="274320"/>
+          </a:xfrm>
+          <a:prstGeom prst="rect">
+            <a:avLst/>
+          </a:prstGeom>
+          <a:noFill/>
+          <a:ln/>
+        </p:spPr>
+        <p:txBody>
+          <a:bodyPr wrap="square" lIns="0" tIns="0" rIns="0" bIns="0" rtlCol="0" anchor="ctr"/>
+          <a:lstStyle/>
+          <a:p>
+            <a:pPr indent="0" marL="0">
+              <a:buNone/>
+            </a:pPr>
+            <a:r>
+              <a:rPr lang="en-US" sz="1000" dirty="0">
+                <a:solidFill>
+                  <a:schemeClr val="tx2"/>
+                </a:solidFill>
+                <a:latin typeface="Calibri" pitchFamily="34" charset="0"/>
+                <a:ea typeface="Calibri" pitchFamily="34" charset="-122"/>
+                <a:cs typeface="Calibri" pitchFamily="34" charset="-120"/>
+              </a:rPr>
+              <a:t>scripts/export_graph.py · docs/graph.md</a:t>
+            </a:r>
+            <a:endParaRPr lang="en-US" sz="1000" dirty="0"/>
+          </a:p>
+        </p:txBody>
+      </p:sp>
+      <p:sp>
+        <p:nvSpPr>
+          <p:cNvPr id="18" name="Text 16"/>
+          <p:cNvSpPr txBox="1"/>
+          <p:nvPr/>
+        </p:nvSpPr>
+        <p:spPr>
+          <a:xfrm>
+            <a:off x="8897112" y="6473952"/>
+            <a:ext cx="2743200" cy="274320"/>
+          </a:xfrm>
+          <a:prstGeom prst="rect">
+            <a:avLst/>
+          </a:prstGeom>
+          <a:noFill/>
+          <a:ln/>
+        </p:spPr>
+        <p:txBody>
+          <a:bodyPr wrap="square" lIns="0" tIns="0" rIns="0" bIns="0" rtlCol="0" anchor="ctr"/>
+          <a:lstStyle/>
+          <a:p>
+            <a:pPr algn="r" indent="0" marL="0">
+              <a:buNone/>
+            </a:pPr>
+            <a:r>
+              <a:rPr lang="en-US" sz="1000" dirty="0">
+                <a:solidFill>
+                  <a:schemeClr val="tx2"/>
+                </a:solidFill>
+                <a:latin typeface="Calibri" pitchFamily="34" charset="0"/>
+                <a:ea typeface="Calibri" pitchFamily="34" charset="-122"/>
+                <a:cs typeface="Calibri" pitchFamily="34" charset="-120"/>
+              </a:rPr>
+              <a:t>VilniusPark Chatbot</a:t>
+            </a:r>
+            <a:endParaRPr lang="en-US" sz="1000" dirty="0"/>
+          </a:p>
+        </p:txBody>
+      </p:sp>
+      <p:pic>
+        <p:nvPicPr>
+          <p:cNvPr id="30" name="ParkingGraph diagram" descr="ParkingGraph rendered by LangGraph: start, user_agent, then either end or admin, record, notification, end"/>
+          <p:cNvPicPr>
+            <a:picLocks noChangeAspect="1"/>
+          </p:cNvPicPr>
+          <p:nvPr/>
+        </p:nvPicPr>
+        <p:blipFill>
+          <a:blip r:embed="rIdGraph"/>
+          <a:stretch>
+            <a:fillRect/>
+          </a:stretch>
+        </p:blipFill>
+        <p:spPr>
+          <a:xfrm>
+            <a:off x="548640" y="2854625"/>
+            <a:ext cx="11091672" cy="1423069"/>
+          </a:xfrm>
+          <a:prstGeom prst="rect">
+            <a:avLst/>
+          </a:prstGeom>
+        </p:spPr>
+      </p:pic>
+    </p:spTree>
+  </p:cSld>
+  <p:clrMapOvr>
+    <a:masterClrMapping/>
+  </p:clrMapOvr>
+</p:sld>
+</file>
+
+<file path=ppt/slides/slide12.xml><?xml version="1.0" encoding="utf-8"?>
+<p:sld xmlns:a="http://schemas.openxmlformats.org/drawingml/2006/main" xmlns:r="http://schemas.openxmlformats.org/officeDocument/2006/relationships" xmlns:p="http://schemas.openxmlformats.org/presentationml/2006/main">
   <p:cSld name="Slide 11">
     <p:bg>
       <p:bgPr>
@@ -2906,6 +3353,10 @@
           </a:solidFill>
           <a:ln/>
         </p:spPr>
+        <p:txBody>
+          <a:bodyPr/>
+          <a:p/>
+        </p:txBody>
       </p:sp>
       <p:sp>
         <p:nvSpPr>
@@ -2940,7 +3391,7 @@
                 <a:ea typeface="Cambria" pitchFamily="34" charset="-122"/>
                 <a:cs typeface="Cambria" pitchFamily="34" charset="-120"/>
               </a:rPr>
-              <a:t>166</a:t>
+              <a:t>168</a:t>
             </a:r>
             <a:endParaRPr lang="en-US" sz="4000" dirty="0"/>
           </a:p>
@@ -3029,6 +3480,10 @@
           </a:solidFill>
           <a:ln/>
         </p:spPr>
+        <p:txBody>
+          <a:bodyPr/>
+          <a:p/>
+        </p:txBody>
       </p:sp>
       <p:sp>
         <p:nvSpPr>
@@ -3152,6 +3607,10 @@
           </a:solidFill>
           <a:ln/>
         </p:spPr>
+        <p:txBody>
+          <a:bodyPr/>
+          <a:p/>
+        </p:txBody>
       </p:sp>
       <p:sp>
         <p:nvSpPr>
@@ -3275,6 +3734,10 @@
           </a:solidFill>
           <a:ln/>
         </p:spPr>
+        <p:txBody>
+          <a:bodyPr/>
+          <a:p/>
+        </p:txBody>
       </p:sp>
       <p:sp>
         <p:nvSpPr>
@@ -3441,7 +3904,7 @@
                 <a:ea typeface="Calibri" pitchFamily="34" charset="-122"/>
                 <a:cs typeface="Calibri" pitchFamily="34" charset="-120"/>
               </a:rPr>
-              <a:t>evals/report.md: 30 questions incl. 15 hard ones; Evidently: 67% pass every check, no PII; reviewing failures found 2 real bugs, 7 judge errors</a:t>
+              <a:t>evals/report.md: 30 questions incl. 15 hard ones; Evidently: 77% pass every check, no PII; reviewing failures found 2 real bugs, 5 judge errors</a:t>
             </a:r>
             <a:endParaRPr lang="en-US" sz="1350" dirty="0"/>
           </a:p>
@@ -3581,7 +4044,7 @@
 </p:sld>
 </file>
 
-<file path=ppt/slides/slide12.xml><?xml version="1.0" encoding="utf-8"?>
+<file path=ppt/slides/slide13.xml><?xml version="1.0" encoding="utf-8"?>
 <p:sld xmlns:a="http://schemas.openxmlformats.org/drawingml/2006/main" xmlns:r="http://schemas.openxmlformats.org/officeDocument/2006/relationships" xmlns:p="http://schemas.openxmlformats.org/presentationml/2006/main">
   <p:cSld name="Slide 12">
     <p:bg>
@@ -3974,33 +4437,19 @@
 </p:sld>
 </file>
 
-<file path=ppt/slides/slide13.xml><?xml version="1.0" encoding="utf-8"?>
-<p:sld xmlns:a="http://schemas.openxmlformats.org/drawingml/2006/main" xmlns:r="http://schemas.openxmlformats.org/officeDocument/2006/relationships" xmlns:p="http://schemas.openxmlformats.org/presentationml/2006/main">
-  <p:cSld name="Slide 10">
-    <p:bg>
-      <p:bgPr>
-        <a:solidFill>
-          <a:schemeClr val="bg1"/>
-        </a:solidFill>
-      </p:bgPr>
-    </p:bg>
+<file path=ppt/slides/slide14.xml><?xml version="1.0" encoding="utf-8"?>
+<p:sld xmlns:a="http://schemas.openxmlformats.org/drawingml/2006/main" xmlns:p="http://schemas.openxmlformats.org/presentationml/2006/main" xmlns:r="http://schemas.openxmlformats.org/officeDocument/2006/relationships">
+  <p:cSld>
     <p:spTree>
       <p:nvGrpSpPr>
         <p:cNvPr id="1" name=""/>
         <p:cNvGrpSpPr/>
         <p:nvPr/>
       </p:nvGrpSpPr>
-      <p:grpSpPr>
-        <a:xfrm>
-          <a:off x="0" y="0"/>
-          <a:ext cx="0" cy="0"/>
-          <a:chOff x="0" y="0"/>
-          <a:chExt cx="0" cy="0"/>
-        </a:xfrm>
-      </p:grpSpPr>
-      <p:sp>
-        <p:nvSpPr>
-          <p:cNvPr id="2" name="Text 0"/>
+      <p:grpSpPr/>
+      <p:sp>
+        <p:nvSpPr>
+          <p:cNvPr id="2" name="Kicker"/>
           <p:cNvSpPr txBox="1"/>
           <p:nvPr/>
         </p:nvSpPr>
@@ -4013,33 +4462,28 @@
             <a:avLst/>
           </a:prstGeom>
           <a:noFill/>
-          <a:ln/>
-        </p:spPr>
-        <p:txBody>
-          <a:bodyPr wrap="square" lIns="0" tIns="0" rIns="0" bIns="0" rtlCol="0" anchor="ctr"/>
-          <a:lstStyle/>
-          <a:p>
-            <a:pPr indent="0" marL="0">
-              <a:buNone/>
-            </a:pPr>
-            <a:r>
-              <a:rPr lang="en-US" sz="1200" b="1" spc="200" kern="0" dirty="0">
+        </p:spPr>
+        <p:txBody>
+          <a:bodyPr wrap="square" lIns="0" rIns="0" tIns="0" bIns="0" anchor="t">
+            <a:spAutoFit/>
+          </a:bodyPr>
+          <a:lstStyle/>
+          <a:p>
+            <a:r>
+              <a:rPr sz="1200" b="1" spc="200">
                 <a:solidFill>
                   <a:schemeClr val="accent1"/>
                 </a:solidFill>
-                <a:latin typeface="Calibri" pitchFamily="34" charset="0"/>
-                <a:ea typeface="Calibri" pitchFamily="34" charset="-122"/>
-                <a:cs typeface="Calibri" pitchFamily="34" charset="-120"/>
-              </a:rPr>
-              <a:t>STAGE 4</a:t>
-            </a:r>
-            <a:endParaRPr lang="en-US" sz="1200" dirty="0"/>
-          </a:p>
-        </p:txBody>
-      </p:sp>
-      <p:sp>
-        <p:nvSpPr>
-          <p:cNvPr id="3" name="Text 1"/>
+                <a:latin typeface="Calibri"/>
+              </a:rPr>
+              <a:t>IN ACTION — STATIC INFORMATION</a:t>
+            </a:r>
+          </a:p>
+        </p:txBody>
+      </p:sp>
+      <p:sp>
+        <p:nvSpPr>
+          <p:cNvPr id="3" name="Title"/>
           <p:cNvSpPr txBox="1"/>
           <p:nvPr/>
         </p:nvSpPr>
@@ -4052,117 +4496,28 @@
             <a:avLst/>
           </a:prstGeom>
           <a:noFill/>
-          <a:ln/>
-        </p:spPr>
-        <p:txBody>
-          <a:bodyPr wrap="square" lIns="0" tIns="0" rIns="0" bIns="0" rtlCol="0" anchor="ctr"/>
-          <a:lstStyle/>
-          <a:p>
-            <a:pPr indent="0" marL="0">
-              <a:buNone/>
-            </a:pPr>
-            <a:r>
-              <a:rPr lang="en-US" sz="3000" b="1" dirty="0">
+        </p:spPr>
+        <p:txBody>
+          <a:bodyPr wrap="square" lIns="0" rIns="0" tIns="0" bIns="0" anchor="t">
+            <a:spAutoFit/>
+          </a:bodyPr>
+          <a:lstStyle/>
+          <a:p>
+            <a:r>
+              <a:rPr sz="3000" b="1">
                 <a:solidFill>
                   <a:schemeClr val="tx1"/>
                 </a:solidFill>
-                <a:latin typeface="Cambria" pitchFamily="34" charset="0"/>
-                <a:ea typeface="Cambria" pitchFamily="34" charset="-122"/>
-                <a:cs typeface="Cambria" pitchFamily="34" charset="-120"/>
-              </a:rPr>
-              <a:t>The graph, as LangGraph draws it</a:t>
-            </a:r>
-            <a:endParaRPr lang="en-US" sz="3000" dirty="0"/>
-          </a:p>
-        </p:txBody>
-      </p:sp>
-      <p:sp>
-        <p:nvSpPr>
-          <p:cNvPr id="4" name="Text 2"/>
-          <p:cNvSpPr txBox="1"/>
-          <p:nvPr/>
-        </p:nvSpPr>
-        <p:spPr>
-          <a:xfrm>
-            <a:off x="548640" y="1600200"/>
-            <a:ext cx="11091672" cy="640080"/>
-          </a:xfrm>
-          <a:prstGeom prst="rect">
-            <a:avLst/>
-          </a:prstGeom>
-          <a:noFill/>
-          <a:ln/>
-        </p:spPr>
-        <p:txBody>
-          <a:bodyPr wrap="square" lIns="0" tIns="0" rIns="0" bIns="0" rtlCol="0" anchor="ctr"/>
-          <a:lstStyle/>
-          <a:p>
-            <a:pPr indent="0" marL="0">
-              <a:lnSpc>
-                <a:spcPct val="130000"/>
-              </a:lnSpc>
-              <a:buNone/>
-            </a:pPr>
-            <a:r>
-              <a:rPr lang="en-US" sz="1400" dirty="0">
-                <a:solidFill>
-                  <a:schemeClr val="tx2"/>
-                </a:solidFill>
-                <a:latin typeface="Calibri" pitchFamily="34" charset="0"/>
-                <a:ea typeface="Calibri" pitchFamily="34" charset="-122"/>
-                <a:cs typeface="Calibri" pitchFamily="34" charset="-120"/>
-              </a:rPr>
-              <a:t>Rendered from the compiled graph itself, not drawn by hand. Solid arrows are fixed edges; dotted ones are conditional: after confirm, user_agent routes to admin - any other turn ends.</a:t>
-            </a:r>
-            <a:endParaRPr lang="en-US" sz="1400" dirty="0"/>
-          </a:p>
-        </p:txBody>
-      </p:sp>
-      <p:sp>
-        <p:nvSpPr>
-          <p:cNvPr id="16" name="Text 14"/>
-          <p:cNvSpPr txBox="1"/>
-          <p:nvPr/>
-        </p:nvSpPr>
-        <p:spPr>
-          <a:xfrm>
-            <a:off x="548640" y="4846320"/>
-            <a:ext cx="11091672" cy="731520"/>
-          </a:xfrm>
-          <a:prstGeom prst="rect">
-            <a:avLst/>
-          </a:prstGeom>
-          <a:noFill/>
-          <a:ln/>
-        </p:spPr>
-        <p:txBody>
-          <a:bodyPr wrap="square" lIns="0" tIns="0" rIns="0" bIns="0" rtlCol="0" anchor="ctr"/>
-          <a:lstStyle/>
-          <a:p>
-            <a:pPr indent="0" marL="0">
-              <a:lnSpc>
-                <a:spcPct val="130000"/>
-              </a:lnSpc>
-              <a:buNone/>
-            </a:pPr>
-            <a:r>
-              <a:rPr lang="en-US" sz="1300" i="1" dirty="0">
-                <a:solidFill>
-                  <a:schemeClr val="tx2"/>
-                </a:solidFill>
-                <a:latin typeface="Calibri" pitchFamily="34" charset="0"/>
-                <a:ea typeface="Calibri" pitchFamily="34" charset="-122"/>
-                <a:cs typeface="Calibri" pitchFamily="34" charset="-120"/>
-              </a:rPr>
-              <a:t>docs/graph.md also has the user and admin agents' own graphs, where middleware - history summarization, the human-in-the-loop pause - shows up as steps. Regenerate with python -m scripts.export_graph.</a:t>
-            </a:r>
-            <a:endParaRPr lang="en-US" sz="1300" dirty="0"/>
-          </a:p>
-        </p:txBody>
-      </p:sp>
-      <p:sp>
-        <p:nvSpPr>
-          <p:cNvPr id="17" name="Text 15"/>
+                <a:latin typeface="Cambria"/>
+              </a:rPr>
+              <a:t>Where is the car park? Answered from the docs</a:t>
+            </a:r>
+          </a:p>
+        </p:txBody>
+      </p:sp>
+      <p:sp>
+        <p:nvSpPr>
+          <p:cNvPr id="4" name="Footer"/>
           <p:cNvSpPr txBox="1"/>
           <p:nvPr/>
         </p:nvSpPr>
@@ -4175,33 +4530,28 @@
             <a:avLst/>
           </a:prstGeom>
           <a:noFill/>
-          <a:ln/>
-        </p:spPr>
-        <p:txBody>
-          <a:bodyPr wrap="square" lIns="0" tIns="0" rIns="0" bIns="0" rtlCol="0" anchor="ctr"/>
-          <a:lstStyle/>
-          <a:p>
-            <a:pPr indent="0" marL="0">
-              <a:buNone/>
-            </a:pPr>
-            <a:r>
-              <a:rPr lang="en-US" sz="1000" dirty="0">
+        </p:spPr>
+        <p:txBody>
+          <a:bodyPr wrap="square" lIns="0" rIns="0" tIns="0" bIns="0" anchor="t">
+            <a:spAutoFit/>
+          </a:bodyPr>
+          <a:lstStyle/>
+          <a:p>
+            <a:r>
+              <a:rPr sz="1000" b="0">
                 <a:solidFill>
                   <a:schemeClr val="tx2"/>
                 </a:solidFill>
-                <a:latin typeface="Calibri" pitchFamily="34" charset="0"/>
-                <a:ea typeface="Calibri" pitchFamily="34" charset="-122"/>
-                <a:cs typeface="Calibri" pitchFamily="34" charset="-120"/>
-              </a:rPr>
-              <a:t>scripts/export_graph.py · docs/graph.md</a:t>
-            </a:r>
-            <a:endParaRPr lang="en-US" sz="1000" dirty="0"/>
-          </a:p>
-        </p:txBody>
-      </p:sp>
-      <p:sp>
-        <p:nvSpPr>
-          <p:cNvPr id="18" name="Text 16"/>
+                <a:latin typeface="Calibri"/>
+              </a:rPr>
+              <a:t>app/ai/tools.py (search_public_rules) · app/db/repositories/milvus.py · data/…/static/*.md</a:t>
+            </a:r>
+          </a:p>
+        </p:txBody>
+      </p:sp>
+      <p:sp>
+        <p:nvSpPr>
+          <p:cNvPr id="5" name="Footer brand"/>
           <p:cNvSpPr txBox="1"/>
           <p:nvPr/>
         </p:nvSpPr>
@@ -4214,54 +4564,2317 @@
             <a:avLst/>
           </a:prstGeom>
           <a:noFill/>
-          <a:ln/>
-        </p:spPr>
-        <p:txBody>
-          <a:bodyPr wrap="square" lIns="0" tIns="0" rIns="0" bIns="0" rtlCol="0" anchor="ctr"/>
-          <a:lstStyle/>
-          <a:p>
-            <a:pPr algn="r" indent="0" marL="0">
-              <a:buNone/>
-            </a:pPr>
-            <a:r>
-              <a:rPr lang="en-US" sz="1000" dirty="0">
+        </p:spPr>
+        <p:txBody>
+          <a:bodyPr wrap="square" lIns="0" rIns="0" tIns="0" bIns="0" anchor="t">
+            <a:spAutoFit/>
+          </a:bodyPr>
+          <a:lstStyle/>
+          <a:p>
+            <a:pPr algn="r"/>
+            <a:r>
+              <a:rPr sz="1000" b="0">
                 <a:solidFill>
                   <a:schemeClr val="tx2"/>
                 </a:solidFill>
-                <a:latin typeface="Calibri" pitchFamily="34" charset="0"/>
-                <a:ea typeface="Calibri" pitchFamily="34" charset="-122"/>
-                <a:cs typeface="Calibri" pitchFamily="34" charset="-120"/>
+                <a:latin typeface="Calibri"/>
               </a:rPr>
               <a:t>VilniusPark Chatbot</a:t>
             </a:r>
-            <a:endParaRPr lang="en-US" sz="1000" dirty="0"/>
+          </a:p>
+        </p:txBody>
+      </p:sp>
+      <p:sp>
+        <p:nvSpPr>
+          <p:cNvPr id="6" name="Bullets"/>
+          <p:cNvSpPr txBox="1"/>
+          <p:nvPr/>
+        </p:nvSpPr>
+        <p:spPr>
+          <a:xfrm>
+            <a:off x="548640" y="1691640"/>
+            <a:ext cx="5486400" cy="4480560"/>
+          </a:xfrm>
+          <a:prstGeom prst="rect">
+            <a:avLst/>
+          </a:prstGeom>
+          <a:noFill/>
+        </p:spPr>
+        <p:txBody>
+          <a:bodyPr wrap="square" lIns="0" rIns="0" tIns="0" bIns="0" anchor="t">
+            <a:spAutoFit/>
+          </a:bodyPr>
+          <a:lstStyle/>
+          <a:p>
+            <a:pPr marL="342900" indent="-342900">
+              <a:lnSpc>
+                <a:spcPct val="125000"/>
+              </a:lnSpc>
+              <a:spcAft>
+                <a:spcPts val="1200"/>
+              </a:spcAft>
+              <a:buSzPct val="100000"/>
+              <a:buChar char="•"/>
+            </a:pPr>
+            <a:r>
+              <a:rPr sz="1400" b="1">
+                <a:solidFill>
+                  <a:schemeClr val="tx1"/>
+                </a:solidFill>
+                <a:latin typeface="Calibri"/>
+              </a:rPr>
+              <a:t>Static info </a:t>
+            </a:r>
+            <a:r>
+              <a:rPr sz="1400" b="0">
+                <a:solidFill>
+                  <a:schemeClr val="tx1"/>
+                </a:solidFill>
+                <a:latin typeface="Calibri"/>
+              </a:rPr>
+              <a:t>(locations, rules, booking process, per-car-park pages) lives in Markdown docs, embedded into Milvus</a:t>
+            </a:r>
+          </a:p>
+          <a:p>
+            <a:pPr marL="342900" indent="-342900">
+              <a:lnSpc>
+                <a:spcPct val="125000"/>
+              </a:lnSpc>
+              <a:spcAft>
+                <a:spcPts val="1200"/>
+              </a:spcAft>
+              <a:buSzPct val="100000"/>
+              <a:buChar char="•"/>
+            </a:pPr>
+            <a:r>
+              <a:rPr sz="1400" b="1">
+                <a:solidFill>
+                  <a:schemeClr val="tx1"/>
+                </a:solidFill>
+                <a:latin typeface="Calibri"/>
+              </a:rPr>
+              <a:t>search_public_rules </a:t>
+            </a:r>
+            <a:r>
+              <a:rPr sz="1400" b="0">
+                <a:solidFill>
+                  <a:schemeClr val="tx1"/>
+                </a:solidFill>
+                <a:latin typeface="Calibri"/>
+              </a:rPr>
+              <a:t>runs a hybrid search: semantic vectors + BM25 keywords, top 3 chunks</a:t>
+            </a:r>
+          </a:p>
+          <a:p>
+            <a:pPr marL="342900" indent="-342900">
+              <a:lnSpc>
+                <a:spcPct val="125000"/>
+              </a:lnSpc>
+              <a:spcAft>
+                <a:spcPts val="1200"/>
+              </a:spcAft>
+              <a:buSzPct val="100000"/>
+              <a:buChar char="•"/>
+            </a:pPr>
+            <a:r>
+              <a:rPr sz="1400" b="1">
+                <a:solidFill>
+                  <a:schemeClr val="tx1"/>
+                </a:solidFill>
+                <a:latin typeface="Calibri"/>
+              </a:rPr>
+              <a:t>Every chunk carries its heading path </a:t>
+            </a:r>
+            <a:r>
+              <a:rPr sz="1400" b="0">
+                <a:solidFill>
+                  <a:schemeClr val="tx1"/>
+                </a:solidFill>
+                <a:latin typeface="Calibri"/>
+              </a:rPr>
+              <a:t>(“# Old Town / ## Location and access”), so the right section is found</a:t>
+            </a:r>
+          </a:p>
+          <a:p>
+            <a:pPr marL="342900" indent="-342900">
+              <a:lnSpc>
+                <a:spcPct val="125000"/>
+              </a:lnSpc>
+              <a:spcAft>
+                <a:spcPts val="1200"/>
+              </a:spcAft>
+              <a:buSzPct val="100000"/>
+              <a:buChar char="•"/>
+            </a:pPr>
+            <a:r>
+              <a:rPr sz="1400" b="1">
+                <a:solidFill>
+                  <a:schemeClr val="tx1"/>
+                </a:solidFill>
+                <a:latin typeface="Calibri"/>
+              </a:rPr>
+              <a:t>The answer cites its sources </a:t>
+            </a:r>
+            <a:r>
+              <a:rPr sz="1400" b="0">
+                <a:solidFill>
+                  <a:schemeClr val="tx1"/>
+                </a:solidFill>
+                <a:latin typeface="Calibri"/>
+              </a:rPr>
+              <a:t>[1], [2] … and lists them under the message</a:t>
+            </a:r>
+          </a:p>
+        </p:txBody>
+      </p:sp>
+      <p:sp>
+        <p:nvSpPr>
+          <p:cNvPr id="7" name="Card"/>
+          <p:cNvSpPr/>
+          <p:nvPr/>
+        </p:nvSpPr>
+        <p:spPr>
+          <a:xfrm>
+            <a:off x="6355080" y="1600200"/>
+            <a:ext cx="5257800" cy="4663440"/>
+          </a:xfrm>
+          <a:prstGeom prst="roundRect">
+            <a:avLst>
+              <a:gd name="adj" fmla="val 1250"/>
+            </a:avLst>
+          </a:prstGeom>
+          <a:solidFill>
+            <a:srgbClr val="FFFFFF"/>
+          </a:solidFill>
+          <a:ln w="12700">
+            <a:solidFill>
+              <a:srgbClr val="DBE4EF"/>
+            </a:solidFill>
+          </a:ln>
+          <a:effectLst>
+            <a:outerShdw blurRad="127000" dist="38100" dir="5400000" algn="bl" rotWithShape="0">
+              <a:srgbClr val="172033">
+                <a:alpha val="15000"/>
+              </a:srgbClr>
+            </a:outerShdw>
+          </a:effectLst>
+        </p:spPr>
+        <p:style>
+          <a:lnRef idx="1">
+            <a:schemeClr val="accent1"/>
+          </a:lnRef>
+          <a:fillRef idx="3">
+            <a:schemeClr val="accent1"/>
+          </a:fillRef>
+          <a:effectRef idx="2">
+            <a:schemeClr val="accent1"/>
+          </a:effectRef>
+          <a:fontRef idx="minor">
+            <a:schemeClr val="lt1"/>
+          </a:fontRef>
+        </p:style>
+        <p:txBody>
+          <a:bodyPr rtlCol="0" anchor="ctr"/>
+          <a:lstStyle/>
+          <a:p>
+            <a:pPr algn="ctr"/>
           </a:p>
         </p:txBody>
       </p:sp>
       <p:pic>
         <p:nvPicPr>
-          <p:cNvPr id="30" name="ParkingGraph diagram" descr="ParkingGraph rendered by LangGraph: start, user_agent, then either end or admin, record, notification, end"/>
+          <p:cNvPr id="8" name="01-static-location.png" descr="“Where is the Old Town car park and how do I get there?”"/>
           <p:cNvPicPr>
             <a:picLocks noChangeAspect="1"/>
           </p:cNvPicPr>
           <p:nvPr/>
         </p:nvPicPr>
         <p:blipFill>
-          <a:blip r:embed="rIdGraph"/>
+          <a:blip r:embed="rId2"/>
           <a:stretch>
             <a:fillRect/>
           </a:stretch>
         </p:blipFill>
         <p:spPr>
           <a:xfrm>
-            <a:off x="548640" y="2854625"/>
-            <a:ext cx="11091672" cy="1423069"/>
-          </a:xfrm>
-          <a:prstGeom prst="rect">
-            <a:avLst/>
-          </a:prstGeom>
+            <a:off x="6942200" y="1673352"/>
+            <a:ext cx="4083558" cy="4105655"/>
+          </a:xfrm>
+          <a:prstGeom prst="rect">
+            <a:avLst/>
+          </a:prstGeom>
+          <a:ln w="9525">
+            <a:solidFill>
+              <a:srgbClr val="DBE4EF"/>
+            </a:solidFill>
+          </a:ln>
         </p:spPr>
       </p:pic>
+      <p:sp>
+        <p:nvSpPr>
+          <p:cNvPr id="9" name="TextBox 8"/>
+          <p:cNvSpPr txBox="1"/>
+          <p:nvPr/>
+        </p:nvSpPr>
+        <p:spPr>
+          <a:xfrm>
+            <a:off x="6446520" y="5879592"/>
+            <a:ext cx="5074920" cy="320040"/>
+          </a:xfrm>
+          <a:prstGeom prst="rect">
+            <a:avLst/>
+          </a:prstGeom>
+          <a:noFill/>
+        </p:spPr>
+        <p:txBody>
+          <a:bodyPr wrap="square" lIns="0" rIns="0" tIns="0" bIns="0" anchor="ctr">
+            <a:spAutoFit/>
+          </a:bodyPr>
+          <a:lstStyle/>
+          <a:p>
+            <a:pPr algn="ctr"/>
+            <a:r>
+              <a:rPr sz="1100" b="0">
+                <a:solidFill>
+                  <a:schemeClr val="tx2"/>
+                </a:solidFill>
+                <a:latin typeface="Calibri"/>
+              </a:rPr>
+              <a:t>“Where is the Old Town car park and how do I get there?”</a:t>
+            </a:r>
+          </a:p>
+        </p:txBody>
+      </p:sp>
+    </p:spTree>
+  </p:cSld>
+  <p:clrMapOvr>
+    <a:masterClrMapping/>
+  </p:clrMapOvr>
+</p:sld>
+</file>
+
+<file path=ppt/slides/slide15.xml><?xml version="1.0" encoding="utf-8"?>
+<p:sld xmlns:a="http://schemas.openxmlformats.org/drawingml/2006/main" xmlns:p="http://schemas.openxmlformats.org/presentationml/2006/main" xmlns:r="http://schemas.openxmlformats.org/officeDocument/2006/relationships">
+  <p:cSld>
+    <p:spTree>
+      <p:nvGrpSpPr>
+        <p:cNvPr id="1" name=""/>
+        <p:cNvGrpSpPr/>
+        <p:nvPr/>
+      </p:nvGrpSpPr>
+      <p:grpSpPr/>
+      <p:sp>
+        <p:nvSpPr>
+          <p:cNvPr id="2" name="Kicker"/>
+          <p:cNvSpPr txBox="1"/>
+          <p:nvPr/>
+        </p:nvSpPr>
+        <p:spPr>
+          <a:xfrm>
+            <a:off x="548640" y="457200"/>
+            <a:ext cx="9144000" cy="320040"/>
+          </a:xfrm>
+          <a:prstGeom prst="rect">
+            <a:avLst/>
+          </a:prstGeom>
+          <a:noFill/>
+        </p:spPr>
+        <p:txBody>
+          <a:bodyPr wrap="square" lIns="0" rIns="0" tIns="0" bIns="0" anchor="t">
+            <a:spAutoFit/>
+          </a:bodyPr>
+          <a:lstStyle/>
+          <a:p>
+            <a:r>
+              <a:rPr sz="1200" b="1" spc="200">
+                <a:solidFill>
+                  <a:schemeClr val="accent1"/>
+                </a:solidFill>
+                <a:latin typeface="Calibri"/>
+              </a:rPr>
+              <a:t>IN ACTION — DYNAMIC INFORMATION</a:t>
+            </a:r>
+          </a:p>
+        </p:txBody>
+      </p:sp>
+      <p:sp>
+        <p:nvSpPr>
+          <p:cNvPr id="3" name="Title"/>
+          <p:cNvSpPr txBox="1"/>
+          <p:nvPr/>
+        </p:nvSpPr>
+        <p:spPr>
+          <a:xfrm>
+            <a:off x="548640" y="777240"/>
+            <a:ext cx="11091672" cy="731520"/>
+          </a:xfrm>
+          <a:prstGeom prst="rect">
+            <a:avLst/>
+          </a:prstGeom>
+          <a:noFill/>
+        </p:spPr>
+        <p:txBody>
+          <a:bodyPr wrap="square" lIns="0" rIns="0" tIns="0" bIns="0" anchor="t">
+            <a:spAutoFit/>
+          </a:bodyPr>
+          <a:lstStyle/>
+          <a:p>
+            <a:r>
+              <a:rPr sz="3000" b="1">
+                <a:solidFill>
+                  <a:schemeClr val="tx1"/>
+                </a:solidFill>
+                <a:latin typeface="Cambria"/>
+              </a:rPr>
+              <a:t>What does it cost on Wednesday? Live from Postgres</a:t>
+            </a:r>
+          </a:p>
+        </p:txBody>
+      </p:sp>
+      <p:sp>
+        <p:nvSpPr>
+          <p:cNvPr id="4" name="Footer"/>
+          <p:cNvSpPr txBox="1"/>
+          <p:nvPr/>
+        </p:nvSpPr>
+        <p:spPr>
+          <a:xfrm>
+            <a:off x="548640" y="6473952"/>
+            <a:ext cx="6400800" cy="274320"/>
+          </a:xfrm>
+          <a:prstGeom prst="rect">
+            <a:avLst/>
+          </a:prstGeom>
+          <a:noFill/>
+        </p:spPr>
+        <p:txBody>
+          <a:bodyPr wrap="square" lIns="0" rIns="0" tIns="0" bIns="0" anchor="t">
+            <a:spAutoFit/>
+          </a:bodyPr>
+          <a:lstStyle/>
+          <a:p>
+            <a:r>
+              <a:rPr sz="1000" b="0">
+                <a:solidFill>
+                  <a:schemeClr val="tx2"/>
+                </a:solidFill>
+                <a:latin typeface="Calibri"/>
+              </a:rPr>
+              <a:t>app/ai/tools.py (get_parking_info) · app/db/repositories/parking.py · app/ai/middleware.py</a:t>
+            </a:r>
+          </a:p>
+        </p:txBody>
+      </p:sp>
+      <p:sp>
+        <p:nvSpPr>
+          <p:cNvPr id="5" name="Footer brand"/>
+          <p:cNvSpPr txBox="1"/>
+          <p:nvPr/>
+        </p:nvSpPr>
+        <p:spPr>
+          <a:xfrm>
+            <a:off x="8897112" y="6473952"/>
+            <a:ext cx="2743200" cy="274320"/>
+          </a:xfrm>
+          <a:prstGeom prst="rect">
+            <a:avLst/>
+          </a:prstGeom>
+          <a:noFill/>
+        </p:spPr>
+        <p:txBody>
+          <a:bodyPr wrap="square" lIns="0" rIns="0" tIns="0" bIns="0" anchor="t">
+            <a:spAutoFit/>
+          </a:bodyPr>
+          <a:lstStyle/>
+          <a:p>
+            <a:pPr algn="r"/>
+            <a:r>
+              <a:rPr sz="1000" b="0">
+                <a:solidFill>
+                  <a:schemeClr val="tx2"/>
+                </a:solidFill>
+                <a:latin typeface="Calibri"/>
+              </a:rPr>
+              <a:t>VilniusPark Chatbot</a:t>
+            </a:r>
+          </a:p>
+        </p:txBody>
+      </p:sp>
+      <p:sp>
+        <p:nvSpPr>
+          <p:cNvPr id="6" name="Bullets"/>
+          <p:cNvSpPr txBox="1"/>
+          <p:nvPr/>
+        </p:nvSpPr>
+        <p:spPr>
+          <a:xfrm>
+            <a:off x="548640" y="1691640"/>
+            <a:ext cx="5486400" cy="4480560"/>
+          </a:xfrm>
+          <a:prstGeom prst="rect">
+            <a:avLst/>
+          </a:prstGeom>
+          <a:noFill/>
+        </p:spPr>
+        <p:txBody>
+          <a:bodyPr wrap="square" lIns="0" rIns="0" tIns="0" bIns="0" anchor="t">
+            <a:spAutoFit/>
+          </a:bodyPr>
+          <a:lstStyle/>
+          <a:p>
+            <a:pPr marL="342900" indent="-342900">
+              <a:lnSpc>
+                <a:spcPct val="125000"/>
+              </a:lnSpc>
+              <a:spcAft>
+                <a:spcPts val="1200"/>
+              </a:spcAft>
+              <a:buSzPct val="100000"/>
+              <a:buChar char="•"/>
+            </a:pPr>
+            <a:r>
+              <a:rPr sz="1400" b="1">
+                <a:solidFill>
+                  <a:schemeClr val="tx1"/>
+                </a:solidFill>
+                <a:latin typeface="Calibri"/>
+              </a:rPr>
+              <a:t>Prices, opening hours and capacity </a:t>
+            </a:r>
+            <a:r>
+              <a:rPr sz="1400" b="0">
+                <a:solidFill>
+                  <a:schemeClr val="tx1"/>
+                </a:solidFill>
+                <a:latin typeface="Calibri"/>
+              </a:rPr>
+              <a:t>change, so they are never embedded: get_parking_info reads them from Postgres for the exact date</a:t>
+            </a:r>
+          </a:p>
+          <a:p>
+            <a:pPr marL="342900" indent="-342900">
+              <a:lnSpc>
+                <a:spcPct val="125000"/>
+              </a:lnSpc>
+              <a:spcAft>
+                <a:spcPts val="1200"/>
+              </a:spcAft>
+              <a:buSzPct val="100000"/>
+              <a:buChar char="•"/>
+            </a:pPr>
+            <a:r>
+              <a:rPr sz="1400" b="1">
+                <a:solidFill>
+                  <a:schemeClr val="tx1"/>
+                </a:solidFill>
+                <a:latin typeface="Calibri"/>
+              </a:rPr>
+              <a:t>Weekday and weekend tariffs, </a:t>
+            </a:r>
+            <a:r>
+              <a:rPr sz="1400" b="0">
+                <a:solidFill>
+                  <a:schemeClr val="tx1"/>
+                </a:solidFill>
+                <a:latin typeface="Calibri"/>
+              </a:rPr>
+              <a:t>special hours and capacity overrides are applied per date</a:t>
+            </a:r>
+          </a:p>
+          <a:p>
+            <a:pPr marL="342900" indent="-342900">
+              <a:lnSpc>
+                <a:spcPct val="125000"/>
+              </a:lnSpc>
+              <a:spcAft>
+                <a:spcPts val="1200"/>
+              </a:spcAft>
+              <a:buSzPct val="100000"/>
+              <a:buChar char="•"/>
+            </a:pPr>
+            <a:r>
+              <a:rPr sz="1400" b="1">
+                <a:solidFill>
+                  <a:schemeClr val="tx1"/>
+                </a:solidFill>
+                <a:latin typeface="Calibri"/>
+              </a:rPr>
+              <a:t>“Wednesday” is looked up, not computed: </a:t>
+            </a:r>
+            <a:r>
+              <a:rPr sz="1400" b="0">
+                <a:solidFill>
+                  <a:schemeClr val="tx1"/>
+                </a:solidFill>
+                <a:latin typeface="Calibri"/>
+              </a:rPr>
+              <a:t>the prompt lists the coming 7 days — the model had once resolved Wednesday to a Monday</a:t>
+            </a:r>
+          </a:p>
+          <a:p>
+            <a:pPr marL="342900" indent="-342900">
+              <a:lnSpc>
+                <a:spcPct val="125000"/>
+              </a:lnSpc>
+              <a:spcAft>
+                <a:spcPts val="1200"/>
+              </a:spcAft>
+              <a:buSzPct val="100000"/>
+              <a:buChar char="•"/>
+            </a:pPr>
+            <a:r>
+              <a:rPr sz="1400" b="1">
+                <a:solidFill>
+                  <a:schemeClr val="tx1"/>
+                </a:solidFill>
+                <a:latin typeface="Calibri"/>
+              </a:rPr>
+              <a:t>Free spaces </a:t>
+            </a:r>
+            <a:r>
+              <a:rPr sz="1400" b="0">
+                <a:solidFill>
+                  <a:schemeClr val="tx1"/>
+                </a:solidFill>
+                <a:latin typeface="Calibri"/>
+              </a:rPr>
+              <a:t>come from check_availability — bookable capacity minus overlapping pending and approved reservations</a:t>
+            </a:r>
+          </a:p>
+        </p:txBody>
+      </p:sp>
+      <p:sp>
+        <p:nvSpPr>
+          <p:cNvPr id="7" name="Card"/>
+          <p:cNvSpPr/>
+          <p:nvPr/>
+        </p:nvSpPr>
+        <p:spPr>
+          <a:xfrm>
+            <a:off x="6355080" y="1600200"/>
+            <a:ext cx="5257800" cy="4663440"/>
+          </a:xfrm>
+          <a:prstGeom prst="roundRect">
+            <a:avLst>
+              <a:gd name="adj" fmla="val 1250"/>
+            </a:avLst>
+          </a:prstGeom>
+          <a:solidFill>
+            <a:srgbClr val="FFFFFF"/>
+          </a:solidFill>
+          <a:ln w="12700">
+            <a:solidFill>
+              <a:srgbClr val="DBE4EF"/>
+            </a:solidFill>
+          </a:ln>
+          <a:effectLst>
+            <a:outerShdw blurRad="127000" dist="38100" dir="5400000" algn="bl" rotWithShape="0">
+              <a:srgbClr val="172033">
+                <a:alpha val="15000"/>
+              </a:srgbClr>
+            </a:outerShdw>
+          </a:effectLst>
+        </p:spPr>
+        <p:style>
+          <a:lnRef idx="1">
+            <a:schemeClr val="accent1"/>
+          </a:lnRef>
+          <a:fillRef idx="3">
+            <a:schemeClr val="accent1"/>
+          </a:fillRef>
+          <a:effectRef idx="2">
+            <a:schemeClr val="accent1"/>
+          </a:effectRef>
+          <a:fontRef idx="minor">
+            <a:schemeClr val="lt1"/>
+          </a:fontRef>
+        </p:style>
+        <p:txBody>
+          <a:bodyPr rtlCol="0" anchor="ctr"/>
+          <a:lstStyle/>
+          <a:p>
+            <a:pPr algn="ctr"/>
+          </a:p>
+        </p:txBody>
+      </p:sp>
+      <p:pic>
+        <p:nvPicPr>
+          <p:cNvPr id="8" name="02-dynamic-prices.png" descr="“What are the prices at the Old Town car park on Wednesday?”"/>
+          <p:cNvPicPr>
+            <a:picLocks noChangeAspect="1"/>
+          </p:cNvPicPr>
+          <p:nvPr/>
+        </p:nvPicPr>
+        <p:blipFill>
+          <a:blip r:embed="rId2"/>
+          <a:stretch>
+            <a:fillRect/>
+          </a:stretch>
+        </p:blipFill>
+        <p:spPr>
+          <a:xfrm>
+            <a:off x="6942200" y="1673352"/>
+            <a:ext cx="4083558" cy="4105655"/>
+          </a:xfrm>
+          <a:prstGeom prst="rect">
+            <a:avLst/>
+          </a:prstGeom>
+          <a:ln w="9525">
+            <a:solidFill>
+              <a:srgbClr val="DBE4EF"/>
+            </a:solidFill>
+          </a:ln>
+        </p:spPr>
+      </p:pic>
+      <p:sp>
+        <p:nvSpPr>
+          <p:cNvPr id="9" name="TextBox 8"/>
+          <p:cNvSpPr txBox="1"/>
+          <p:nvPr/>
+        </p:nvSpPr>
+        <p:spPr>
+          <a:xfrm>
+            <a:off x="6446520" y="5879592"/>
+            <a:ext cx="5074920" cy="320040"/>
+          </a:xfrm>
+          <a:prstGeom prst="rect">
+            <a:avLst/>
+          </a:prstGeom>
+          <a:noFill/>
+        </p:spPr>
+        <p:txBody>
+          <a:bodyPr wrap="square" lIns="0" rIns="0" tIns="0" bIns="0" anchor="ctr">
+            <a:spAutoFit/>
+          </a:bodyPr>
+          <a:lstStyle/>
+          <a:p>
+            <a:pPr algn="ctr"/>
+            <a:r>
+              <a:rPr sz="1100" b="0">
+                <a:solidFill>
+                  <a:schemeClr val="tx2"/>
+                </a:solidFill>
+                <a:latin typeface="Calibri"/>
+              </a:rPr>
+              <a:t>“What are the prices at the Old Town car park on Wednesday?”</a:t>
+            </a:r>
+          </a:p>
+        </p:txBody>
+      </p:sp>
+    </p:spTree>
+  </p:cSld>
+  <p:clrMapOvr>
+    <a:masterClrMapping/>
+  </p:clrMapOvr>
+</p:sld>
+</file>
+
+<file path=ppt/slides/slide16.xml><?xml version="1.0" encoding="utf-8"?>
+<p:sld xmlns:a="http://schemas.openxmlformats.org/drawingml/2006/main" xmlns:p="http://schemas.openxmlformats.org/presentationml/2006/main" xmlns:r="http://schemas.openxmlformats.org/officeDocument/2006/relationships">
+  <p:cSld>
+    <p:spTree>
+      <p:nvGrpSpPr>
+        <p:cNvPr id="1" name=""/>
+        <p:cNvGrpSpPr/>
+        <p:nvPr/>
+      </p:nvGrpSpPr>
+      <p:grpSpPr/>
+      <p:sp>
+        <p:nvSpPr>
+          <p:cNvPr id="2" name="Kicker"/>
+          <p:cNvSpPr txBox="1"/>
+          <p:nvPr/>
+        </p:nvSpPr>
+        <p:spPr>
+          <a:xfrm>
+            <a:off x="548640" y="457200"/>
+            <a:ext cx="9144000" cy="320040"/>
+          </a:xfrm>
+          <a:prstGeom prst="rect">
+            <a:avLst/>
+          </a:prstGeom>
+          <a:noFill/>
+        </p:spPr>
+        <p:txBody>
+          <a:bodyPr wrap="square" lIns="0" rIns="0" tIns="0" bIns="0" anchor="t">
+            <a:spAutoFit/>
+          </a:bodyPr>
+          <a:lstStyle/>
+          <a:p>
+            <a:r>
+              <a:rPr sz="1200" b="1" spc="200">
+                <a:solidFill>
+                  <a:schemeClr val="accent1"/>
+                </a:solidFill>
+                <a:latin typeface="Calibri"/>
+              </a:rPr>
+              <a:t>IN ACTION — BOOKING</a:t>
+            </a:r>
+          </a:p>
+        </p:txBody>
+      </p:sp>
+      <p:sp>
+        <p:nvSpPr>
+          <p:cNvPr id="3" name="Title"/>
+          <p:cNvSpPr txBox="1"/>
+          <p:nvPr/>
+        </p:nvSpPr>
+        <p:spPr>
+          <a:xfrm>
+            <a:off x="548640" y="777240"/>
+            <a:ext cx="11091672" cy="731520"/>
+          </a:xfrm>
+          <a:prstGeom prst="rect">
+            <a:avLst/>
+          </a:prstGeom>
+          <a:noFill/>
+        </p:spPr>
+        <p:txBody>
+          <a:bodyPr wrap="square" lIns="0" rIns="0" tIns="0" bIns="0" anchor="t">
+            <a:spAutoFit/>
+          </a:bodyPr>
+          <a:lstStyle/>
+          <a:p>
+            <a:r>
+              <a:rPr sz="3000" b="1">
+                <a:solidFill>
+                  <a:schemeClr val="tx1"/>
+                </a:solidFill>
+                <a:latin typeface="Cambria"/>
+              </a:rPr>
+              <a:t>Book a space: review first, then confirm</a:t>
+            </a:r>
+          </a:p>
+        </p:txBody>
+      </p:sp>
+      <p:sp>
+        <p:nvSpPr>
+          <p:cNvPr id="4" name="Footer"/>
+          <p:cNvSpPr txBox="1"/>
+          <p:nvPr/>
+        </p:nvSpPr>
+        <p:spPr>
+          <a:xfrm>
+            <a:off x="548640" y="6473952"/>
+            <a:ext cx="6400800" cy="274320"/>
+          </a:xfrm>
+          <a:prstGeom prst="rect">
+            <a:avLst/>
+          </a:prstGeom>
+          <a:noFill/>
+        </p:spPr>
+        <p:txBody>
+          <a:bodyPr wrap="square" lIns="0" rIns="0" tIns="0" bIns="0" anchor="t">
+            <a:spAutoFit/>
+          </a:bodyPr>
+          <a:lstStyle/>
+          <a:p>
+            <a:r>
+              <a:rPr sz="1000" b="0">
+                <a:solidFill>
+                  <a:schemeClr val="tx2"/>
+                </a:solidFill>
+                <a:latin typeface="Calibri"/>
+              </a:rPr>
+              <a:t>app/ai/tools.py (prepare_reservation) · app/services/parking.py (book) · app/static/chat.js</a:t>
+            </a:r>
+          </a:p>
+        </p:txBody>
+      </p:sp>
+      <p:sp>
+        <p:nvSpPr>
+          <p:cNvPr id="5" name="Footer brand"/>
+          <p:cNvSpPr txBox="1"/>
+          <p:nvPr/>
+        </p:nvSpPr>
+        <p:spPr>
+          <a:xfrm>
+            <a:off x="8897112" y="6473952"/>
+            <a:ext cx="2743200" cy="274320"/>
+          </a:xfrm>
+          <a:prstGeom prst="rect">
+            <a:avLst/>
+          </a:prstGeom>
+          <a:noFill/>
+        </p:spPr>
+        <p:txBody>
+          <a:bodyPr wrap="square" lIns="0" rIns="0" tIns="0" bIns="0" anchor="t">
+            <a:spAutoFit/>
+          </a:bodyPr>
+          <a:lstStyle/>
+          <a:p>
+            <a:pPr algn="r"/>
+            <a:r>
+              <a:rPr sz="1000" b="0">
+                <a:solidFill>
+                  <a:schemeClr val="tx2"/>
+                </a:solidFill>
+                <a:latin typeface="Calibri"/>
+              </a:rPr>
+              <a:t>VilniusPark Chatbot</a:t>
+            </a:r>
+          </a:p>
+        </p:txBody>
+      </p:sp>
+      <p:sp>
+        <p:nvSpPr>
+          <p:cNvPr id="6" name="Card"/>
+          <p:cNvSpPr/>
+          <p:nvPr/>
+        </p:nvSpPr>
+        <p:spPr>
+          <a:xfrm>
+            <a:off x="548640" y="1691640"/>
+            <a:ext cx="5349240" cy="4434840"/>
+          </a:xfrm>
+          <a:prstGeom prst="roundRect">
+            <a:avLst>
+              <a:gd name="adj" fmla="val 1250"/>
+            </a:avLst>
+          </a:prstGeom>
+          <a:solidFill>
+            <a:srgbClr val="FFFFFF"/>
+          </a:solidFill>
+          <a:ln w="12700">
+            <a:solidFill>
+              <a:srgbClr val="DBE4EF"/>
+            </a:solidFill>
+          </a:ln>
+          <a:effectLst>
+            <a:outerShdw blurRad="127000" dist="38100" dir="5400000" algn="bl" rotWithShape="0">
+              <a:srgbClr val="172033">
+                <a:alpha val="15000"/>
+              </a:srgbClr>
+            </a:outerShdw>
+          </a:effectLst>
+        </p:spPr>
+        <p:style>
+          <a:lnRef idx="1">
+            <a:schemeClr val="accent1"/>
+          </a:lnRef>
+          <a:fillRef idx="3">
+            <a:schemeClr val="accent1"/>
+          </a:fillRef>
+          <a:effectRef idx="2">
+            <a:schemeClr val="accent1"/>
+          </a:effectRef>
+          <a:fontRef idx="minor">
+            <a:schemeClr val="lt1"/>
+          </a:fontRef>
+        </p:style>
+        <p:txBody>
+          <a:bodyPr rtlCol="0" anchor="ctr"/>
+          <a:lstStyle/>
+          <a:p>
+            <a:pPr algn="ctr"/>
+          </a:p>
+        </p:txBody>
+      </p:sp>
+      <p:pic>
+        <p:nvPicPr>
+          <p:cNvPr id="7" name="03-booking-review.png" descr="prepare_reservation’s review: tariff, hours, free spaces"/>
+          <p:cNvPicPr>
+            <a:picLocks noChangeAspect="1"/>
+          </p:cNvPicPr>
+          <p:nvPr/>
+        </p:nvPicPr>
+        <p:blipFill>
+          <a:blip r:embed="rId2"/>
+          <a:stretch>
+            <a:fillRect/>
+          </a:stretch>
+        </p:blipFill>
+        <p:spPr>
+          <a:xfrm>
+            <a:off x="1295165" y="1764792"/>
+            <a:ext cx="3856189" cy="3877055"/>
+          </a:xfrm>
+          <a:prstGeom prst="rect">
+            <a:avLst/>
+          </a:prstGeom>
+          <a:ln w="9525">
+            <a:solidFill>
+              <a:srgbClr val="DBE4EF"/>
+            </a:solidFill>
+          </a:ln>
+        </p:spPr>
+      </p:pic>
+      <p:sp>
+        <p:nvSpPr>
+          <p:cNvPr id="8" name="TextBox 7"/>
+          <p:cNvSpPr txBox="1"/>
+          <p:nvPr/>
+        </p:nvSpPr>
+        <p:spPr>
+          <a:xfrm>
+            <a:off x="640080" y="5742431"/>
+            <a:ext cx="5166359" cy="320040"/>
+          </a:xfrm>
+          <a:prstGeom prst="rect">
+            <a:avLst/>
+          </a:prstGeom>
+          <a:noFill/>
+        </p:spPr>
+        <p:txBody>
+          <a:bodyPr wrap="square" lIns="0" rIns="0" tIns="0" bIns="0" anchor="ctr">
+            <a:spAutoFit/>
+          </a:bodyPr>
+          <a:lstStyle/>
+          <a:p>
+            <a:pPr algn="ctr"/>
+            <a:r>
+              <a:rPr sz="1100" b="0">
+                <a:solidFill>
+                  <a:schemeClr val="tx2"/>
+                </a:solidFill>
+                <a:latin typeface="Calibri"/>
+              </a:rPr>
+              <a:t>prepare_reservation’s review: tariff, hours, free spaces</a:t>
+            </a:r>
+          </a:p>
+        </p:txBody>
+      </p:sp>
+      <p:sp>
+        <p:nvSpPr>
+          <p:cNvPr id="9" name="Card"/>
+          <p:cNvSpPr/>
+          <p:nvPr/>
+        </p:nvSpPr>
+        <p:spPr>
+          <a:xfrm>
+            <a:off x="6172200" y="1691640"/>
+            <a:ext cx="5349240" cy="4434840"/>
+          </a:xfrm>
+          <a:prstGeom prst="roundRect">
+            <a:avLst>
+              <a:gd name="adj" fmla="val 1250"/>
+            </a:avLst>
+          </a:prstGeom>
+          <a:solidFill>
+            <a:srgbClr val="FFFFFF"/>
+          </a:solidFill>
+          <a:ln w="12700">
+            <a:solidFill>
+              <a:srgbClr val="DBE4EF"/>
+            </a:solidFill>
+          </a:ln>
+          <a:effectLst>
+            <a:outerShdw blurRad="127000" dist="38100" dir="5400000" algn="bl" rotWithShape="0">
+              <a:srgbClr val="172033">
+                <a:alpha val="15000"/>
+              </a:srgbClr>
+            </a:outerShdw>
+          </a:effectLst>
+        </p:spPr>
+        <p:style>
+          <a:lnRef idx="1">
+            <a:schemeClr val="accent1"/>
+          </a:lnRef>
+          <a:fillRef idx="3">
+            <a:schemeClr val="accent1"/>
+          </a:fillRef>
+          <a:effectRef idx="2">
+            <a:schemeClr val="accent1"/>
+          </a:effectRef>
+          <a:fontRef idx="minor">
+            <a:schemeClr val="lt1"/>
+          </a:fontRef>
+        </p:style>
+        <p:txBody>
+          <a:bodyPr rtlCol="0" anchor="ctr"/>
+          <a:lstStyle/>
+          <a:p>
+            <a:pPr algn="ctr"/>
+          </a:p>
+        </p:txBody>
+      </p:sp>
+      <p:pic>
+        <p:nvPicPr>
+          <p:cNvPr id="10" name="04-booking-pending.png" descr="Confirm → saved as pending, awaiting the administrator"/>
+          <p:cNvPicPr>
+            <a:picLocks noChangeAspect="1"/>
+          </p:cNvPicPr>
+          <p:nvPr/>
+        </p:nvPicPr>
+        <p:blipFill>
+          <a:blip r:embed="rId3"/>
+          <a:stretch>
+            <a:fillRect/>
+          </a:stretch>
+        </p:blipFill>
+        <p:spPr>
+          <a:xfrm>
+            <a:off x="6918725" y="1764792"/>
+            <a:ext cx="3856189" cy="3877055"/>
+          </a:xfrm>
+          <a:prstGeom prst="rect">
+            <a:avLst/>
+          </a:prstGeom>
+          <a:ln w="9525">
+            <a:solidFill>
+              <a:srgbClr val="DBE4EF"/>
+            </a:solidFill>
+          </a:ln>
+        </p:spPr>
+      </p:pic>
+      <p:sp>
+        <p:nvSpPr>
+          <p:cNvPr id="11" name="TextBox 10"/>
+          <p:cNvSpPr txBox="1"/>
+          <p:nvPr/>
+        </p:nvSpPr>
+        <p:spPr>
+          <a:xfrm>
+            <a:off x="6263640" y="5742431"/>
+            <a:ext cx="5166359" cy="320040"/>
+          </a:xfrm>
+          <a:prstGeom prst="rect">
+            <a:avLst/>
+          </a:prstGeom>
+          <a:noFill/>
+        </p:spPr>
+        <p:txBody>
+          <a:bodyPr wrap="square" lIns="0" rIns="0" tIns="0" bIns="0" anchor="ctr">
+            <a:spAutoFit/>
+          </a:bodyPr>
+          <a:lstStyle/>
+          <a:p>
+            <a:pPr algn="ctr"/>
+            <a:r>
+              <a:rPr sz="1100" b="0">
+                <a:solidFill>
+                  <a:schemeClr val="tx2"/>
+                </a:solidFill>
+                <a:latin typeface="Calibri"/>
+              </a:rPr>
+              <a:t>Confirm → saved as pending, awaiting the administrator</a:t>
+            </a:r>
+          </a:p>
+        </p:txBody>
+      </p:sp>
+    </p:spTree>
+  </p:cSld>
+  <p:clrMapOvr>
+    <a:masterClrMapping/>
+  </p:clrMapOvr>
+</p:sld>
+</file>
+
+<file path=ppt/slides/slide17.xml><?xml version="1.0" encoding="utf-8"?>
+<p:sld xmlns:a="http://schemas.openxmlformats.org/drawingml/2006/main" xmlns:p="http://schemas.openxmlformats.org/presentationml/2006/main" xmlns:r="http://schemas.openxmlformats.org/officeDocument/2006/relationships">
+  <p:cSld>
+    <p:spTree>
+      <p:nvGrpSpPr>
+        <p:cNvPr id="1" name=""/>
+        <p:cNvGrpSpPr/>
+        <p:nvPr/>
+      </p:nvGrpSpPr>
+      <p:grpSpPr/>
+      <p:sp>
+        <p:nvSpPr>
+          <p:cNvPr id="2" name="Kicker"/>
+          <p:cNvSpPr txBox="1"/>
+          <p:nvPr/>
+        </p:nvSpPr>
+        <p:spPr>
+          <a:xfrm>
+            <a:off x="548640" y="457200"/>
+            <a:ext cx="9144000" cy="320040"/>
+          </a:xfrm>
+          <a:prstGeom prst="rect">
+            <a:avLst/>
+          </a:prstGeom>
+          <a:noFill/>
+        </p:spPr>
+        <p:txBody>
+          <a:bodyPr wrap="square" lIns="0" rIns="0" tIns="0" bIns="0" anchor="t">
+            <a:spAutoFit/>
+          </a:bodyPr>
+          <a:lstStyle/>
+          <a:p>
+            <a:r>
+              <a:rPr sz="1200" b="1" spc="200">
+                <a:solidFill>
+                  <a:schemeClr val="accent1"/>
+                </a:solidFill>
+                <a:latin typeface="Calibri"/>
+              </a:rPr>
+              <a:t>IN ACTION — ADMIN PANEL</a:t>
+            </a:r>
+          </a:p>
+        </p:txBody>
+      </p:sp>
+      <p:sp>
+        <p:nvSpPr>
+          <p:cNvPr id="3" name="Title"/>
+          <p:cNvSpPr txBox="1"/>
+          <p:nvPr/>
+        </p:nvSpPr>
+        <p:spPr>
+          <a:xfrm>
+            <a:off x="548640" y="777240"/>
+            <a:ext cx="11091672" cy="731520"/>
+          </a:xfrm>
+          <a:prstGeom prst="rect">
+            <a:avLst/>
+          </a:prstGeom>
+          <a:noFill/>
+        </p:spPr>
+        <p:txBody>
+          <a:bodyPr wrap="square" lIns="0" rIns="0" tIns="0" bIns="0" anchor="t">
+            <a:spAutoFit/>
+          </a:bodyPr>
+          <a:lstStyle/>
+          <a:p>
+            <a:r>
+              <a:rPr sz="3000" b="1">
+                <a:solidFill>
+                  <a:schemeClr val="tx1"/>
+                </a:solidFill>
+                <a:latin typeface="Cambria"/>
+              </a:rPr>
+              <a:t>The administrator decides</a:t>
+            </a:r>
+          </a:p>
+        </p:txBody>
+      </p:sp>
+      <p:sp>
+        <p:nvSpPr>
+          <p:cNvPr id="4" name="Footer"/>
+          <p:cNvSpPr txBox="1"/>
+          <p:nvPr/>
+        </p:nvSpPr>
+        <p:spPr>
+          <a:xfrm>
+            <a:off x="548640" y="6473952"/>
+            <a:ext cx="6400800" cy="274320"/>
+          </a:xfrm>
+          <a:prstGeom prst="rect">
+            <a:avLst/>
+          </a:prstGeom>
+          <a:noFill/>
+        </p:spPr>
+        <p:txBody>
+          <a:bodyPr wrap="square" lIns="0" rIns="0" tIns="0" bIns="0" anchor="t">
+            <a:spAutoFit/>
+          </a:bodyPr>
+          <a:lstStyle/>
+          <a:p>
+            <a:r>
+              <a:rPr sz="1000" b="0">
+                <a:solidFill>
+                  <a:schemeClr val="tx2"/>
+                </a:solidFill>
+                <a:latin typeface="Calibri"/>
+              </a:rPr>
+              <a:t>app/ai/agents.py (admin agent) · app/api/routers/admin.py · app/templates/admin.html</a:t>
+            </a:r>
+          </a:p>
+        </p:txBody>
+      </p:sp>
+      <p:sp>
+        <p:nvSpPr>
+          <p:cNvPr id="5" name="Footer brand"/>
+          <p:cNvSpPr txBox="1"/>
+          <p:nvPr/>
+        </p:nvSpPr>
+        <p:spPr>
+          <a:xfrm>
+            <a:off x="8897112" y="6473952"/>
+            <a:ext cx="2743200" cy="274320"/>
+          </a:xfrm>
+          <a:prstGeom prst="rect">
+            <a:avLst/>
+          </a:prstGeom>
+          <a:noFill/>
+        </p:spPr>
+        <p:txBody>
+          <a:bodyPr wrap="square" lIns="0" rIns="0" tIns="0" bIns="0" anchor="t">
+            <a:spAutoFit/>
+          </a:bodyPr>
+          <a:lstStyle/>
+          <a:p>
+            <a:pPr algn="r"/>
+            <a:r>
+              <a:rPr sz="1000" b="0">
+                <a:solidFill>
+                  <a:schemeClr val="tx2"/>
+                </a:solidFill>
+                <a:latin typeface="Calibri"/>
+              </a:rPr>
+              <a:t>VilniusPark Chatbot</a:t>
+            </a:r>
+          </a:p>
+        </p:txBody>
+      </p:sp>
+      <p:sp>
+        <p:nvSpPr>
+          <p:cNvPr id="6" name="Card"/>
+          <p:cNvSpPr/>
+          <p:nvPr/>
+        </p:nvSpPr>
+        <p:spPr>
+          <a:xfrm>
+            <a:off x="548640" y="1600200"/>
+            <a:ext cx="6309360" cy="4663440"/>
+          </a:xfrm>
+          <a:prstGeom prst="roundRect">
+            <a:avLst>
+              <a:gd name="adj" fmla="val 1250"/>
+            </a:avLst>
+          </a:prstGeom>
+          <a:solidFill>
+            <a:srgbClr val="FFFFFF"/>
+          </a:solidFill>
+          <a:ln w="12700">
+            <a:solidFill>
+              <a:srgbClr val="DBE4EF"/>
+            </a:solidFill>
+          </a:ln>
+          <a:effectLst>
+            <a:outerShdw blurRad="127000" dist="38100" dir="5400000" algn="bl" rotWithShape="0">
+              <a:srgbClr val="172033">
+                <a:alpha val="15000"/>
+              </a:srgbClr>
+            </a:outerShdw>
+          </a:effectLst>
+        </p:spPr>
+        <p:style>
+          <a:lnRef idx="1">
+            <a:schemeClr val="accent1"/>
+          </a:lnRef>
+          <a:fillRef idx="3">
+            <a:schemeClr val="accent1"/>
+          </a:fillRef>
+          <a:effectRef idx="2">
+            <a:schemeClr val="accent1"/>
+          </a:effectRef>
+          <a:fontRef idx="minor">
+            <a:schemeClr val="lt1"/>
+          </a:fontRef>
+        </p:style>
+        <p:txBody>
+          <a:bodyPr rtlCol="0" anchor="ctr"/>
+          <a:lstStyle/>
+          <a:p>
+            <a:pPr algn="ctr"/>
+          </a:p>
+        </p:txBody>
+      </p:sp>
+      <p:pic>
+        <p:nvPicPr>
+          <p:cNvPr id="7" name="05-admin-panel.png" descr="Admin console: two requests waiting"/>
+          <p:cNvPicPr>
+            <a:picLocks noChangeAspect="1"/>
+          </p:cNvPicPr>
+          <p:nvPr/>
+        </p:nvPicPr>
+        <p:blipFill>
+          <a:blip r:embed="rId2"/>
+          <a:stretch>
+            <a:fillRect/>
+          </a:stretch>
+        </p:blipFill>
+        <p:spPr>
+          <a:xfrm>
+            <a:off x="1126128" y="1673352"/>
+            <a:ext cx="5154383" cy="4105655"/>
+          </a:xfrm>
+          <a:prstGeom prst="rect">
+            <a:avLst/>
+          </a:prstGeom>
+          <a:ln w="9525">
+            <a:solidFill>
+              <a:srgbClr val="DBE4EF"/>
+            </a:solidFill>
+          </a:ln>
+        </p:spPr>
+      </p:pic>
+      <p:sp>
+        <p:nvSpPr>
+          <p:cNvPr id="8" name="TextBox 7"/>
+          <p:cNvSpPr txBox="1"/>
+          <p:nvPr/>
+        </p:nvSpPr>
+        <p:spPr>
+          <a:xfrm>
+            <a:off x="640080" y="5879592"/>
+            <a:ext cx="6126480" cy="320040"/>
+          </a:xfrm>
+          <a:prstGeom prst="rect">
+            <a:avLst/>
+          </a:prstGeom>
+          <a:noFill/>
+        </p:spPr>
+        <p:txBody>
+          <a:bodyPr wrap="square" lIns="0" rIns="0" tIns="0" bIns="0" anchor="ctr">
+            <a:spAutoFit/>
+          </a:bodyPr>
+          <a:lstStyle/>
+          <a:p>
+            <a:pPr algn="ctr"/>
+            <a:r>
+              <a:rPr sz="1100" b="0">
+                <a:solidFill>
+                  <a:schemeClr val="tx2"/>
+                </a:solidFill>
+                <a:latin typeface="Calibri"/>
+              </a:rPr>
+              <a:t>Admin console: two requests waiting</a:t>
+            </a:r>
+          </a:p>
+        </p:txBody>
+      </p:sp>
+      <p:sp>
+        <p:nvSpPr>
+          <p:cNvPr id="9" name="Bullets"/>
+          <p:cNvSpPr txBox="1"/>
+          <p:nvPr/>
+        </p:nvSpPr>
+        <p:spPr>
+          <a:xfrm>
+            <a:off x="7178040" y="1691640"/>
+            <a:ext cx="4434840" cy="4480560"/>
+          </a:xfrm>
+          <a:prstGeom prst="rect">
+            <a:avLst/>
+          </a:prstGeom>
+          <a:noFill/>
+        </p:spPr>
+        <p:txBody>
+          <a:bodyPr wrap="square" lIns="0" rIns="0" tIns="0" bIns="0" anchor="t">
+            <a:spAutoFit/>
+          </a:bodyPr>
+          <a:lstStyle/>
+          <a:p>
+            <a:pPr marL="342900" indent="-342900">
+              <a:lnSpc>
+                <a:spcPct val="125000"/>
+              </a:lnSpc>
+              <a:spcAft>
+                <a:spcPts val="1200"/>
+              </a:spcAft>
+              <a:buSzPct val="100000"/>
+              <a:buChar char="•"/>
+            </a:pPr>
+            <a:r>
+              <a:rPr sz="1350" b="1">
+                <a:solidFill>
+                  <a:schemeClr val="tx1"/>
+                </a:solidFill>
+                <a:latin typeface="Calibri"/>
+              </a:rPr>
+              <a:t>The admin agent </a:t>
+            </a:r>
+            <a:r>
+              <a:rPr sz="1350" b="0">
+                <a:solidFill>
+                  <a:schemeClr val="tx1"/>
+                </a:solidFill>
+                <a:latin typeface="Calibri"/>
+              </a:rPr>
+              <a:t>drafts each request’s summary from the stored facts only</a:t>
+            </a:r>
+          </a:p>
+          <a:p>
+            <a:pPr marL="342900" indent="-342900">
+              <a:lnSpc>
+                <a:spcPct val="125000"/>
+              </a:lnSpc>
+              <a:spcAft>
+                <a:spcPts val="1200"/>
+              </a:spcAft>
+              <a:buSzPct val="100000"/>
+              <a:buChar char="•"/>
+            </a:pPr>
+            <a:r>
+              <a:rPr sz="1350" b="1">
+                <a:solidFill>
+                  <a:schemeClr val="tx1"/>
+                </a:solidFill>
+                <a:latin typeface="Calibri"/>
+              </a:rPr>
+              <a:t>Human in the loop: </a:t>
+            </a:r>
+            <a:r>
+              <a:rPr sz="1350" b="0">
+                <a:solidFill>
+                  <a:schemeClr val="tx1"/>
+                </a:solidFill>
+                <a:latin typeface="Calibri"/>
+              </a:rPr>
+              <a:t>the graph pauses until the administrator approves or rejects</a:t>
+            </a:r>
+          </a:p>
+          <a:p>
+            <a:pPr marL="342900" indent="-342900">
+              <a:lnSpc>
+                <a:spcPct val="125000"/>
+              </a:lnSpc>
+              <a:spcAft>
+                <a:spcPts val="1200"/>
+              </a:spcAft>
+              <a:buSzPct val="100000"/>
+              <a:buChar char="•"/>
+            </a:pPr>
+            <a:r>
+              <a:rPr sz="1350" b="1">
+                <a:solidFill>
+                  <a:schemeClr val="tx1"/>
+                </a:solidFill>
+                <a:latin typeface="Calibri"/>
+              </a:rPr>
+              <a:t>Protected: </a:t>
+            </a:r>
+            <a:r>
+              <a:rPr sz="1350" b="0">
+                <a:solidFill>
+                  <a:schemeClr val="tx1"/>
+                </a:solidFill>
+                <a:latin typeface="Calibri"/>
+              </a:rPr>
+              <a:t>X-Admin-Key, compared in constant time; 10 wrong keys lock the client out</a:t>
+            </a:r>
+          </a:p>
+          <a:p>
+            <a:pPr marL="342900" indent="-342900">
+              <a:lnSpc>
+                <a:spcPct val="125000"/>
+              </a:lnSpc>
+              <a:spcAft>
+                <a:spcPts val="1200"/>
+              </a:spcAft>
+              <a:buSzPct val="100000"/>
+              <a:buChar char="•"/>
+            </a:pPr>
+            <a:r>
+              <a:rPr sz="1350" b="1">
+                <a:solidFill>
+                  <a:schemeClr val="tx1"/>
+                </a:solidFill>
+                <a:latin typeface="Calibri"/>
+              </a:rPr>
+              <a:t>Also as a Streamlit app </a:t>
+            </a:r>
+            <a:r>
+              <a:rPr sz="1350" b="0">
+                <a:solidFill>
+                  <a:schemeClr val="tx1"/>
+                </a:solidFill>
+                <a:latin typeface="Calibri"/>
+              </a:rPr>
+              <a:t>(make admin-ui) over the same API</a:t>
+            </a:r>
+          </a:p>
+        </p:txBody>
+      </p:sp>
+    </p:spTree>
+  </p:cSld>
+  <p:clrMapOvr>
+    <a:masterClrMapping/>
+  </p:clrMapOvr>
+</p:sld>
+</file>
+
+<file path=ppt/slides/slide18.xml><?xml version="1.0" encoding="utf-8"?>
+<p:sld xmlns:a="http://schemas.openxmlformats.org/drawingml/2006/main" xmlns:p="http://schemas.openxmlformats.org/presentationml/2006/main" xmlns:r="http://schemas.openxmlformats.org/officeDocument/2006/relationships">
+  <p:cSld>
+    <p:spTree>
+      <p:nvGrpSpPr>
+        <p:cNvPr id="1" name=""/>
+        <p:cNvGrpSpPr/>
+        <p:nvPr/>
+      </p:nvGrpSpPr>
+      <p:grpSpPr/>
+      <p:sp>
+        <p:nvSpPr>
+          <p:cNvPr id="2" name="Kicker"/>
+          <p:cNvSpPr txBox="1"/>
+          <p:nvPr/>
+        </p:nvSpPr>
+        <p:spPr>
+          <a:xfrm>
+            <a:off x="548640" y="457200"/>
+            <a:ext cx="9144000" cy="320040"/>
+          </a:xfrm>
+          <a:prstGeom prst="rect">
+            <a:avLst/>
+          </a:prstGeom>
+          <a:noFill/>
+        </p:spPr>
+        <p:txBody>
+          <a:bodyPr wrap="square" lIns="0" rIns="0" tIns="0" bIns="0" anchor="t">
+            <a:spAutoFit/>
+          </a:bodyPr>
+          <a:lstStyle/>
+          <a:p>
+            <a:r>
+              <a:rPr sz="1200" b="1" spc="200">
+                <a:solidFill>
+                  <a:schemeClr val="accent1"/>
+                </a:solidFill>
+                <a:latin typeface="Calibri"/>
+              </a:rPr>
+              <a:t>IN ACTION — APPROVED / REJECTED</a:t>
+            </a:r>
+          </a:p>
+        </p:txBody>
+      </p:sp>
+      <p:sp>
+        <p:nvSpPr>
+          <p:cNvPr id="3" name="Title"/>
+          <p:cNvSpPr txBox="1"/>
+          <p:nvPr/>
+        </p:nvSpPr>
+        <p:spPr>
+          <a:xfrm>
+            <a:off x="548640" y="777240"/>
+            <a:ext cx="11091672" cy="731520"/>
+          </a:xfrm>
+          <a:prstGeom prst="rect">
+            <a:avLst/>
+          </a:prstGeom>
+          <a:noFill/>
+        </p:spPr>
+        <p:txBody>
+          <a:bodyPr wrap="square" lIns="0" rIns="0" tIns="0" bIns="0" anchor="t">
+            <a:spAutoFit/>
+          </a:bodyPr>
+          <a:lstStyle/>
+          <a:p>
+            <a:r>
+              <a:rPr sz="3000" b="1">
+                <a:solidFill>
+                  <a:schemeClr val="tx1"/>
+                </a:solidFill>
+                <a:latin typeface="Cambria"/>
+              </a:rPr>
+              <a:t>The customer sees the decision live</a:t>
+            </a:r>
+          </a:p>
+        </p:txBody>
+      </p:sp>
+      <p:sp>
+        <p:nvSpPr>
+          <p:cNvPr id="4" name="Footer"/>
+          <p:cNvSpPr txBox="1"/>
+          <p:nvPr/>
+        </p:nvSpPr>
+        <p:spPr>
+          <a:xfrm>
+            <a:off x="548640" y="6473952"/>
+            <a:ext cx="6400800" cy="274320"/>
+          </a:xfrm>
+          <a:prstGeom prst="rect">
+            <a:avLst/>
+          </a:prstGeom>
+          <a:noFill/>
+        </p:spPr>
+        <p:txBody>
+          <a:bodyPr wrap="square" lIns="0" rIns="0" tIns="0" bIns="0" anchor="t">
+            <a:spAutoFit/>
+          </a:bodyPr>
+          <a:lstStyle/>
+          <a:p>
+            <a:r>
+              <a:rPr sz="1000" b="0">
+                <a:solidFill>
+                  <a:schemeClr val="tx2"/>
+                </a:solidFill>
+                <a:latin typeface="Calibri"/>
+              </a:rPr>
+              <a:t>app/ai/graph.py (record, notification nodes) · mcp_server/server.py · app/static/chat.js</a:t>
+            </a:r>
+          </a:p>
+        </p:txBody>
+      </p:sp>
+      <p:sp>
+        <p:nvSpPr>
+          <p:cNvPr id="5" name="Footer brand"/>
+          <p:cNvSpPr txBox="1"/>
+          <p:nvPr/>
+        </p:nvSpPr>
+        <p:spPr>
+          <a:xfrm>
+            <a:off x="8897112" y="6473952"/>
+            <a:ext cx="2743200" cy="274320"/>
+          </a:xfrm>
+          <a:prstGeom prst="rect">
+            <a:avLst/>
+          </a:prstGeom>
+          <a:noFill/>
+        </p:spPr>
+        <p:txBody>
+          <a:bodyPr wrap="square" lIns="0" rIns="0" tIns="0" bIns="0" anchor="t">
+            <a:spAutoFit/>
+          </a:bodyPr>
+          <a:lstStyle/>
+          <a:p>
+            <a:pPr algn="r"/>
+            <a:r>
+              <a:rPr sz="1000" b="0">
+                <a:solidFill>
+                  <a:schemeClr val="tx2"/>
+                </a:solidFill>
+                <a:latin typeface="Calibri"/>
+              </a:rPr>
+              <a:t>VilniusPark Chatbot</a:t>
+            </a:r>
+          </a:p>
+        </p:txBody>
+      </p:sp>
+      <p:sp>
+        <p:nvSpPr>
+          <p:cNvPr id="6" name="Card"/>
+          <p:cNvSpPr/>
+          <p:nvPr/>
+        </p:nvSpPr>
+        <p:spPr>
+          <a:xfrm>
+            <a:off x="548640" y="1691640"/>
+            <a:ext cx="5349240" cy="4434840"/>
+          </a:xfrm>
+          <a:prstGeom prst="roundRect">
+            <a:avLst>
+              <a:gd name="adj" fmla="val 1250"/>
+            </a:avLst>
+          </a:prstGeom>
+          <a:solidFill>
+            <a:srgbClr val="FFFFFF"/>
+          </a:solidFill>
+          <a:ln w="12700">
+            <a:solidFill>
+              <a:srgbClr val="DBE4EF"/>
+            </a:solidFill>
+          </a:ln>
+          <a:effectLst>
+            <a:outerShdw blurRad="127000" dist="38100" dir="5400000" algn="bl" rotWithShape="0">
+              <a:srgbClr val="172033">
+                <a:alpha val="15000"/>
+              </a:srgbClr>
+            </a:outerShdw>
+          </a:effectLst>
+        </p:spPr>
+        <p:style>
+          <a:lnRef idx="1">
+            <a:schemeClr val="accent1"/>
+          </a:lnRef>
+          <a:fillRef idx="3">
+            <a:schemeClr val="accent1"/>
+          </a:fillRef>
+          <a:effectRef idx="2">
+            <a:schemeClr val="accent1"/>
+          </a:effectRef>
+          <a:fontRef idx="minor">
+            <a:schemeClr val="lt1"/>
+          </a:fontRef>
+        </p:style>
+        <p:txBody>
+          <a:bodyPr rtlCol="0" anchor="ctr"/>
+          <a:lstStyle/>
+          <a:p>
+            <a:pPr algn="ctr"/>
+          </a:p>
+        </p:txBody>
+      </p:sp>
+      <p:pic>
+        <p:nvPicPr>
+          <p:cNvPr id="7" name="06-approved-popup.png" descr="Approved: recorded through the MCP server, pop-up in the chat"/>
+          <p:cNvPicPr>
+            <a:picLocks noChangeAspect="1"/>
+          </p:cNvPicPr>
+          <p:nvPr/>
+        </p:nvPicPr>
+        <p:blipFill>
+          <a:blip r:embed="rId2"/>
+          <a:stretch>
+            <a:fillRect/>
+          </a:stretch>
+        </p:blipFill>
+        <p:spPr>
+          <a:xfrm>
+            <a:off x="1295165" y="1764792"/>
+            <a:ext cx="3856189" cy="3877055"/>
+          </a:xfrm>
+          <a:prstGeom prst="rect">
+            <a:avLst/>
+          </a:prstGeom>
+          <a:ln w="9525">
+            <a:solidFill>
+              <a:srgbClr val="DBE4EF"/>
+            </a:solidFill>
+          </a:ln>
+        </p:spPr>
+      </p:pic>
+      <p:sp>
+        <p:nvSpPr>
+          <p:cNvPr id="8" name="TextBox 7"/>
+          <p:cNvSpPr txBox="1"/>
+          <p:nvPr/>
+        </p:nvSpPr>
+        <p:spPr>
+          <a:xfrm>
+            <a:off x="640080" y="5742431"/>
+            <a:ext cx="5166359" cy="320040"/>
+          </a:xfrm>
+          <a:prstGeom prst="rect">
+            <a:avLst/>
+          </a:prstGeom>
+          <a:noFill/>
+        </p:spPr>
+        <p:txBody>
+          <a:bodyPr wrap="square" lIns="0" rIns="0" tIns="0" bIns="0" anchor="ctr">
+            <a:spAutoFit/>
+          </a:bodyPr>
+          <a:lstStyle/>
+          <a:p>
+            <a:pPr algn="ctr"/>
+            <a:r>
+              <a:rPr sz="1100" b="0">
+                <a:solidFill>
+                  <a:schemeClr val="tx2"/>
+                </a:solidFill>
+                <a:latin typeface="Calibri"/>
+              </a:rPr>
+              <a:t>Approved: recorded through the MCP server, pop-up in the chat</a:t>
+            </a:r>
+          </a:p>
+        </p:txBody>
+      </p:sp>
+      <p:sp>
+        <p:nvSpPr>
+          <p:cNvPr id="9" name="Card"/>
+          <p:cNvSpPr/>
+          <p:nvPr/>
+        </p:nvSpPr>
+        <p:spPr>
+          <a:xfrm>
+            <a:off x="6172200" y="1691640"/>
+            <a:ext cx="5349240" cy="4434840"/>
+          </a:xfrm>
+          <a:prstGeom prst="roundRect">
+            <a:avLst>
+              <a:gd name="adj" fmla="val 1250"/>
+            </a:avLst>
+          </a:prstGeom>
+          <a:solidFill>
+            <a:srgbClr val="FFFFFF"/>
+          </a:solidFill>
+          <a:ln w="12700">
+            <a:solidFill>
+              <a:srgbClr val="DBE4EF"/>
+            </a:solidFill>
+          </a:ln>
+          <a:effectLst>
+            <a:outerShdw blurRad="127000" dist="38100" dir="5400000" algn="bl" rotWithShape="0">
+              <a:srgbClr val="172033">
+                <a:alpha val="15000"/>
+              </a:srgbClr>
+            </a:outerShdw>
+          </a:effectLst>
+        </p:spPr>
+        <p:style>
+          <a:lnRef idx="1">
+            <a:schemeClr val="accent1"/>
+          </a:lnRef>
+          <a:fillRef idx="3">
+            <a:schemeClr val="accent1"/>
+          </a:fillRef>
+          <a:effectRef idx="2">
+            <a:schemeClr val="accent1"/>
+          </a:effectRef>
+          <a:fontRef idx="minor">
+            <a:schemeClr val="lt1"/>
+          </a:fontRef>
+        </p:style>
+        <p:txBody>
+          <a:bodyPr rtlCol="0" anchor="ctr"/>
+          <a:lstStyle/>
+          <a:p>
+            <a:pPr algn="ctr"/>
+          </a:p>
+        </p:txBody>
+      </p:sp>
+      <p:pic>
+        <p:nvPicPr>
+          <p:cNvPr id="10" name="07-rejected-popup.png" descr="Rejected: the space is released, pop-up in the chat"/>
+          <p:cNvPicPr>
+            <a:picLocks noChangeAspect="1"/>
+          </p:cNvPicPr>
+          <p:nvPr/>
+        </p:nvPicPr>
+        <p:blipFill>
+          <a:blip r:embed="rId3"/>
+          <a:stretch>
+            <a:fillRect/>
+          </a:stretch>
+        </p:blipFill>
+        <p:spPr>
+          <a:xfrm>
+            <a:off x="6918725" y="1764792"/>
+            <a:ext cx="3856189" cy="3877055"/>
+          </a:xfrm>
+          <a:prstGeom prst="rect">
+            <a:avLst/>
+          </a:prstGeom>
+          <a:ln w="9525">
+            <a:solidFill>
+              <a:srgbClr val="DBE4EF"/>
+            </a:solidFill>
+          </a:ln>
+        </p:spPr>
+      </p:pic>
+      <p:sp>
+        <p:nvSpPr>
+          <p:cNvPr id="11" name="TextBox 10"/>
+          <p:cNvSpPr txBox="1"/>
+          <p:nvPr/>
+        </p:nvSpPr>
+        <p:spPr>
+          <a:xfrm>
+            <a:off x="6263640" y="5742431"/>
+            <a:ext cx="5166359" cy="320040"/>
+          </a:xfrm>
+          <a:prstGeom prst="rect">
+            <a:avLst/>
+          </a:prstGeom>
+          <a:noFill/>
+        </p:spPr>
+        <p:txBody>
+          <a:bodyPr wrap="square" lIns="0" rIns="0" tIns="0" bIns="0" anchor="ctr">
+            <a:spAutoFit/>
+          </a:bodyPr>
+          <a:lstStyle/>
+          <a:p>
+            <a:pPr algn="ctr"/>
+            <a:r>
+              <a:rPr sz="1100" b="0">
+                <a:solidFill>
+                  <a:schemeClr val="tx2"/>
+                </a:solidFill>
+                <a:latin typeface="Calibri"/>
+              </a:rPr>
+              <a:t>Rejected: the space is released, pop-up in the chat</a:t>
+            </a:r>
+          </a:p>
+        </p:txBody>
+      </p:sp>
+    </p:spTree>
+  </p:cSld>
+  <p:clrMapOvr>
+    <a:masterClrMapping/>
+  </p:clrMapOvr>
+</p:sld>
+</file>
+
+<file path=ppt/slides/slide19.xml><?xml version="1.0" encoding="utf-8"?>
+<p:sld xmlns:a="http://schemas.openxmlformats.org/drawingml/2006/main" xmlns:p="http://schemas.openxmlformats.org/presentationml/2006/main" xmlns:r="http://schemas.openxmlformats.org/officeDocument/2006/relationships">
+  <p:cSld>
+    <p:spTree>
+      <p:nvGrpSpPr>
+        <p:cNvPr id="1" name=""/>
+        <p:cNvGrpSpPr/>
+        <p:nvPr/>
+      </p:nvGrpSpPr>
+      <p:grpSpPr/>
+      <p:sp>
+        <p:nvSpPr>
+          <p:cNvPr id="2" name="Kicker"/>
+          <p:cNvSpPr txBox="1"/>
+          <p:nvPr/>
+        </p:nvSpPr>
+        <p:spPr>
+          <a:xfrm>
+            <a:off x="548640" y="457200"/>
+            <a:ext cx="9144000" cy="320040"/>
+          </a:xfrm>
+          <a:prstGeom prst="rect">
+            <a:avLst/>
+          </a:prstGeom>
+          <a:noFill/>
+        </p:spPr>
+        <p:txBody>
+          <a:bodyPr wrap="square" lIns="0" rIns="0" tIns="0" bIns="0" anchor="t">
+            <a:spAutoFit/>
+          </a:bodyPr>
+          <a:lstStyle/>
+          <a:p>
+            <a:r>
+              <a:rPr sz="1200" b="1" spc="200">
+                <a:solidFill>
+                  <a:schemeClr val="accent1"/>
+                </a:solidFill>
+                <a:latin typeface="Calibri"/>
+              </a:rPr>
+              <a:t>GUARDRAILS &amp; PROTECTION</a:t>
+            </a:r>
+          </a:p>
+        </p:txBody>
+      </p:sp>
+      <p:sp>
+        <p:nvSpPr>
+          <p:cNvPr id="3" name="Title"/>
+          <p:cNvSpPr txBox="1"/>
+          <p:nvPr/>
+        </p:nvSpPr>
+        <p:spPr>
+          <a:xfrm>
+            <a:off x="548640" y="777240"/>
+            <a:ext cx="11091672" cy="731520"/>
+          </a:xfrm>
+          <a:prstGeom prst="rect">
+            <a:avLst/>
+          </a:prstGeom>
+          <a:noFill/>
+        </p:spPr>
+        <p:txBody>
+          <a:bodyPr wrap="square" lIns="0" rIns="0" tIns="0" bIns="0" anchor="t">
+            <a:spAutoFit/>
+          </a:bodyPr>
+          <a:lstStyle/>
+          <a:p>
+            <a:r>
+              <a:rPr sz="3000" b="1">
+                <a:solidFill>
+                  <a:schemeClr val="tx1"/>
+                </a:solidFill>
+                <a:latin typeface="Cambria"/>
+              </a:rPr>
+              <a:t>Too many requests? Slowed down, not crashed</a:t>
+            </a:r>
+          </a:p>
+        </p:txBody>
+      </p:sp>
+      <p:sp>
+        <p:nvSpPr>
+          <p:cNvPr id="4" name="Footer"/>
+          <p:cNvSpPr txBox="1"/>
+          <p:nvPr/>
+        </p:nvSpPr>
+        <p:spPr>
+          <a:xfrm>
+            <a:off x="548640" y="6473952"/>
+            <a:ext cx="6400800" cy="274320"/>
+          </a:xfrm>
+          <a:prstGeom prst="rect">
+            <a:avLst/>
+          </a:prstGeom>
+          <a:noFill/>
+        </p:spPr>
+        <p:txBody>
+          <a:bodyPr wrap="square" lIns="0" rIns="0" tIns="0" bIns="0" anchor="t">
+            <a:spAutoFit/>
+          </a:bodyPr>
+          <a:lstStyle/>
+          <a:p>
+            <a:r>
+              <a:rPr sz="1000" b="0">
+                <a:solidFill>
+                  <a:schemeClr val="tx2"/>
+                </a:solidFill>
+                <a:latin typeface="Calibri"/>
+              </a:rPr>
+              <a:t>app/dependencies.py (cookie_rate_limit, active-user limit, require_admin) · app/config.py</a:t>
+            </a:r>
+          </a:p>
+        </p:txBody>
+      </p:sp>
+      <p:sp>
+        <p:nvSpPr>
+          <p:cNvPr id="5" name="Footer brand"/>
+          <p:cNvSpPr txBox="1"/>
+          <p:nvPr/>
+        </p:nvSpPr>
+        <p:spPr>
+          <a:xfrm>
+            <a:off x="8897112" y="6473952"/>
+            <a:ext cx="2743200" cy="274320"/>
+          </a:xfrm>
+          <a:prstGeom prst="rect">
+            <a:avLst/>
+          </a:prstGeom>
+          <a:noFill/>
+        </p:spPr>
+        <p:txBody>
+          <a:bodyPr wrap="square" lIns="0" rIns="0" tIns="0" bIns="0" anchor="t">
+            <a:spAutoFit/>
+          </a:bodyPr>
+          <a:lstStyle/>
+          <a:p>
+            <a:pPr algn="r"/>
+            <a:r>
+              <a:rPr sz="1000" b="0">
+                <a:solidFill>
+                  <a:schemeClr val="tx2"/>
+                </a:solidFill>
+                <a:latin typeface="Calibri"/>
+              </a:rPr>
+              <a:t>VilniusPark Chatbot</a:t>
+            </a:r>
+          </a:p>
+        </p:txBody>
+      </p:sp>
+      <p:sp>
+        <p:nvSpPr>
+          <p:cNvPr id="6" name="Bullets"/>
+          <p:cNvSpPr txBox="1"/>
+          <p:nvPr/>
+        </p:nvSpPr>
+        <p:spPr>
+          <a:xfrm>
+            <a:off x="548640" y="1691640"/>
+            <a:ext cx="5486400" cy="4480560"/>
+          </a:xfrm>
+          <a:prstGeom prst="rect">
+            <a:avLst/>
+          </a:prstGeom>
+          <a:noFill/>
+        </p:spPr>
+        <p:txBody>
+          <a:bodyPr wrap="square" lIns="0" rIns="0" tIns="0" bIns="0" anchor="t">
+            <a:spAutoFit/>
+          </a:bodyPr>
+          <a:lstStyle/>
+          <a:p>
+            <a:pPr marL="342900" indent="-342900">
+              <a:lnSpc>
+                <a:spcPct val="125000"/>
+              </a:lnSpc>
+              <a:spcAft>
+                <a:spcPts val="1200"/>
+              </a:spcAft>
+              <a:buSzPct val="100000"/>
+              <a:buChar char="•"/>
+            </a:pPr>
+            <a:r>
+              <a:rPr sz="1400" b="1">
+                <a:solidFill>
+                  <a:schemeClr val="tx1"/>
+                </a:solidFill>
+                <a:latin typeface="Calibri"/>
+              </a:rPr>
+              <a:t>Per chat session: </a:t>
+            </a:r>
+            <a:r>
+              <a:rPr sz="1400" b="0">
+                <a:solidFill>
+                  <a:schemeClr val="tx1"/>
+                </a:solidFill>
+                <a:latin typeface="Calibri"/>
+              </a:rPr>
+              <a:t>at most 2 messages per 10 seconds (RATE_LIMIT_TIMES / RATE_LIMIT_SECONDS) — the third gets HTTP 429</a:t>
+            </a:r>
+          </a:p>
+          <a:p>
+            <a:pPr marL="342900" indent="-342900">
+              <a:lnSpc>
+                <a:spcPct val="125000"/>
+              </a:lnSpc>
+              <a:spcAft>
+                <a:spcPts val="1200"/>
+              </a:spcAft>
+              <a:buSzPct val="100000"/>
+              <a:buChar char="•"/>
+            </a:pPr>
+            <a:r>
+              <a:rPr sz="1400" b="1">
+                <a:solidFill>
+                  <a:schemeClr val="tx1"/>
+                </a:solidFill>
+                <a:latin typeface="Calibri"/>
+              </a:rPr>
+              <a:t>Per service: </a:t>
+            </a:r>
+            <a:r>
+              <a:rPr sz="1400" b="0">
+                <a:solidFill>
+                  <a:schemeClr val="tx1"/>
+                </a:solidFill>
+                <a:latin typeface="Calibri"/>
+              </a:rPr>
+              <a:t>at most 100 active users at once (MAX_ACTIVE_USERS), so one burst can’t starve everyone else</a:t>
+            </a:r>
+          </a:p>
+          <a:p>
+            <a:pPr marL="342900" indent="-342900">
+              <a:lnSpc>
+                <a:spcPct val="125000"/>
+              </a:lnSpc>
+              <a:spcAft>
+                <a:spcPts val="1200"/>
+              </a:spcAft>
+              <a:buSzPct val="100000"/>
+              <a:buChar char="•"/>
+            </a:pPr>
+            <a:r>
+              <a:rPr sz="1400" b="1">
+                <a:solidFill>
+                  <a:schemeClr val="tx1"/>
+                </a:solidFill>
+                <a:latin typeface="Calibri"/>
+              </a:rPr>
+              <a:t>Admin API: </a:t>
+            </a:r>
+            <a:r>
+              <a:rPr sz="1400" b="0">
+                <a:solidFill>
+                  <a:schemeClr val="tx1"/>
+                </a:solidFill>
+                <a:latin typeface="Calibri"/>
+              </a:rPr>
+              <a:t>10 wrong keys from one IP within 5 minutes lock it out</a:t>
+            </a:r>
+          </a:p>
+          <a:p>
+            <a:pPr marL="342900" indent="-342900">
+              <a:lnSpc>
+                <a:spcPct val="125000"/>
+              </a:lnSpc>
+              <a:spcAft>
+                <a:spcPts val="1200"/>
+              </a:spcAft>
+              <a:buSzPct val="100000"/>
+              <a:buChar char="•"/>
+            </a:pPr>
+            <a:r>
+              <a:rPr sz="1400" b="1">
+                <a:solidFill>
+                  <a:schemeClr val="tx1"/>
+                </a:solidFill>
+                <a:latin typeface="Calibri"/>
+              </a:rPr>
+              <a:t>Counters live in Redis, </a:t>
+            </a:r>
+            <a:r>
+              <a:rPr sz="1400" b="0">
+                <a:solidFill>
+                  <a:schemeClr val="tx1"/>
+                </a:solidFill>
+                <a:latin typeface="Calibri"/>
+              </a:rPr>
+              <a:t>so the limits hold across API workers</a:t>
+            </a:r>
+          </a:p>
+        </p:txBody>
+      </p:sp>
+      <p:sp>
+        <p:nvSpPr>
+          <p:cNvPr id="7" name="Card"/>
+          <p:cNvSpPr/>
+          <p:nvPr/>
+        </p:nvSpPr>
+        <p:spPr>
+          <a:xfrm>
+            <a:off x="6355080" y="1600200"/>
+            <a:ext cx="5257800" cy="4663440"/>
+          </a:xfrm>
+          <a:prstGeom prst="roundRect">
+            <a:avLst>
+              <a:gd name="adj" fmla="val 1250"/>
+            </a:avLst>
+          </a:prstGeom>
+          <a:solidFill>
+            <a:srgbClr val="FFFFFF"/>
+          </a:solidFill>
+          <a:ln w="12700">
+            <a:solidFill>
+              <a:srgbClr val="DBE4EF"/>
+            </a:solidFill>
+          </a:ln>
+          <a:effectLst>
+            <a:outerShdw blurRad="127000" dist="38100" dir="5400000" algn="bl" rotWithShape="0">
+              <a:srgbClr val="172033">
+                <a:alpha val="15000"/>
+              </a:srgbClr>
+            </a:outerShdw>
+          </a:effectLst>
+        </p:spPr>
+        <p:style>
+          <a:lnRef idx="1">
+            <a:schemeClr val="accent1"/>
+          </a:lnRef>
+          <a:fillRef idx="3">
+            <a:schemeClr val="accent1"/>
+          </a:fillRef>
+          <a:effectRef idx="2">
+            <a:schemeClr val="accent1"/>
+          </a:effectRef>
+          <a:fontRef idx="minor">
+            <a:schemeClr val="lt1"/>
+          </a:fontRef>
+        </p:style>
+        <p:txBody>
+          <a:bodyPr rtlCol="0" anchor="ctr"/>
+          <a:lstStyle/>
+          <a:p>
+            <a:pPr algn="ctr"/>
+          </a:p>
+        </p:txBody>
+      </p:sp>
+      <p:pic>
+        <p:nvPicPr>
+          <p:cNvPr id="8" name="08-too-many-requests.png" descr="Three messages within 10 seconds: the third is refused"/>
+          <p:cNvPicPr>
+            <a:picLocks noChangeAspect="1"/>
+          </p:cNvPicPr>
+          <p:nvPr/>
+        </p:nvPicPr>
+        <p:blipFill>
+          <a:blip r:embed="rId2"/>
+          <a:stretch>
+            <a:fillRect/>
+          </a:stretch>
+        </p:blipFill>
+        <p:spPr>
+          <a:xfrm>
+            <a:off x="6942200" y="1673352"/>
+            <a:ext cx="4083558" cy="4105655"/>
+          </a:xfrm>
+          <a:prstGeom prst="rect">
+            <a:avLst/>
+          </a:prstGeom>
+          <a:ln w="9525">
+            <a:solidFill>
+              <a:srgbClr val="DBE4EF"/>
+            </a:solidFill>
+          </a:ln>
+        </p:spPr>
+      </p:pic>
+      <p:sp>
+        <p:nvSpPr>
+          <p:cNvPr id="9" name="TextBox 8"/>
+          <p:cNvSpPr txBox="1"/>
+          <p:nvPr/>
+        </p:nvSpPr>
+        <p:spPr>
+          <a:xfrm>
+            <a:off x="6446520" y="5879592"/>
+            <a:ext cx="5074920" cy="320040"/>
+          </a:xfrm>
+          <a:prstGeom prst="rect">
+            <a:avLst/>
+          </a:prstGeom>
+          <a:noFill/>
+        </p:spPr>
+        <p:txBody>
+          <a:bodyPr wrap="square" lIns="0" rIns="0" tIns="0" bIns="0" anchor="ctr">
+            <a:spAutoFit/>
+          </a:bodyPr>
+          <a:lstStyle/>
+          <a:p>
+            <a:pPr algn="ctr"/>
+            <a:r>
+              <a:rPr sz="1100" b="0">
+                <a:solidFill>
+                  <a:schemeClr val="tx2"/>
+                </a:solidFill>
+                <a:latin typeface="Calibri"/>
+              </a:rPr>
+              <a:t>Three messages within 10 seconds: the third is refused</a:t>
+            </a:r>
+          </a:p>
+        </p:txBody>
+      </p:sp>
     </p:spTree>
   </p:cSld>
   <p:clrMapOvr>
@@ -5176,6 +7789,4727 @@
 </p:sld>
 </file>
 
+<file path=ppt/slides/slide20.xml><?xml version="1.0" encoding="utf-8"?>
+<p:sld xmlns:a="http://schemas.openxmlformats.org/drawingml/2006/main" xmlns:p="http://schemas.openxmlformats.org/presentationml/2006/main" xmlns:r="http://schemas.openxmlformats.org/officeDocument/2006/relationships">
+  <p:cSld>
+    <p:spTree>
+      <p:nvGrpSpPr>
+        <p:cNvPr id="1" name=""/>
+        <p:cNvGrpSpPr/>
+        <p:nvPr/>
+      </p:nvGrpSpPr>
+      <p:grpSpPr/>
+      <p:sp>
+        <p:nvSpPr>
+          <p:cNvPr id="2" name="Kicker"/>
+          <p:cNvSpPr txBox="1"/>
+          <p:nvPr/>
+        </p:nvSpPr>
+        <p:spPr>
+          <a:xfrm>
+            <a:off x="548640" y="457200"/>
+            <a:ext cx="9144000" cy="320040"/>
+          </a:xfrm>
+          <a:prstGeom prst="rect">
+            <a:avLst/>
+          </a:prstGeom>
+          <a:noFill/>
+        </p:spPr>
+        <p:txBody>
+          <a:bodyPr wrap="square" lIns="0" rIns="0" tIns="0" bIns="0" anchor="t">
+            <a:spAutoFit/>
+          </a:bodyPr>
+          <a:lstStyle/>
+          <a:p>
+            <a:r>
+              <a:rPr sz="1200" b="1" spc="200">
+                <a:solidFill>
+                  <a:schemeClr val="accent1"/>
+                </a:solidFill>
+                <a:latin typeface="Calibri"/>
+              </a:rPr>
+              <a:t>GUARDRAILS &amp; PROTECTION</a:t>
+            </a:r>
+          </a:p>
+        </p:txBody>
+      </p:sp>
+      <p:sp>
+        <p:nvSpPr>
+          <p:cNvPr id="3" name="Title"/>
+          <p:cNvSpPr txBox="1"/>
+          <p:nvPr/>
+        </p:nvSpPr>
+        <p:spPr>
+          <a:xfrm>
+            <a:off x="548640" y="777240"/>
+            <a:ext cx="11091672" cy="731520"/>
+          </a:xfrm>
+          <a:prstGeom prst="rect">
+            <a:avLst/>
+          </a:prstGeom>
+          <a:noFill/>
+        </p:spPr>
+        <p:txBody>
+          <a:bodyPr wrap="square" lIns="0" rIns="0" tIns="0" bIns="0" anchor="t">
+            <a:spAutoFit/>
+          </a:bodyPr>
+          <a:lstStyle/>
+          <a:p>
+            <a:r>
+              <a:rPr sz="3000" b="1">
+                <a:solidFill>
+                  <a:schemeClr val="tx1"/>
+                </a:solidFill>
+                <a:latin typeface="Cambria"/>
+              </a:rPr>
+              <a:t>Personal emails and phone numbers stay private</a:t>
+            </a:r>
+          </a:p>
+        </p:txBody>
+      </p:sp>
+      <p:sp>
+        <p:nvSpPr>
+          <p:cNvPr id="4" name="Footer"/>
+          <p:cNvSpPr txBox="1"/>
+          <p:nvPr/>
+        </p:nvSpPr>
+        <p:spPr>
+          <a:xfrm>
+            <a:off x="548640" y="6473952"/>
+            <a:ext cx="6400800" cy="274320"/>
+          </a:xfrm>
+          <a:prstGeom prst="rect">
+            <a:avLst/>
+          </a:prstGeom>
+          <a:noFill/>
+        </p:spPr>
+        <p:txBody>
+          <a:bodyPr wrap="square" lIns="0" rIns="0" tIns="0" bIns="0" anchor="t">
+            <a:spAutoFit/>
+          </a:bodyPr>
+          <a:lstStyle/>
+          <a:p>
+            <a:r>
+              <a:rPr sz="1000" b="0">
+                <a:solidFill>
+                  <a:schemeClr val="tx2"/>
+                </a:solidFill>
+                <a:latin typeface="Calibri"/>
+              </a:rPr>
+              <a:t>app/ai/guardrails.py (PIIGuard, PIIMiddleware) · app/ai/prompts.py · app/ai/tools.py</a:t>
+            </a:r>
+          </a:p>
+        </p:txBody>
+      </p:sp>
+      <p:sp>
+        <p:nvSpPr>
+          <p:cNvPr id="5" name="Footer brand"/>
+          <p:cNvSpPr txBox="1"/>
+          <p:nvPr/>
+        </p:nvSpPr>
+        <p:spPr>
+          <a:xfrm>
+            <a:off x="8897112" y="6473952"/>
+            <a:ext cx="2743200" cy="274320"/>
+          </a:xfrm>
+          <a:prstGeom prst="rect">
+            <a:avLst/>
+          </a:prstGeom>
+          <a:noFill/>
+        </p:spPr>
+        <p:txBody>
+          <a:bodyPr wrap="square" lIns="0" rIns="0" tIns="0" bIns="0" anchor="t">
+            <a:spAutoFit/>
+          </a:bodyPr>
+          <a:lstStyle/>
+          <a:p>
+            <a:pPr algn="r"/>
+            <a:r>
+              <a:rPr sz="1000" b="0">
+                <a:solidFill>
+                  <a:schemeClr val="tx2"/>
+                </a:solidFill>
+                <a:latin typeface="Calibri"/>
+              </a:rPr>
+              <a:t>VilniusPark Chatbot</a:t>
+            </a:r>
+          </a:p>
+        </p:txBody>
+      </p:sp>
+      <p:sp>
+        <p:nvSpPr>
+          <p:cNvPr id="6" name="Card"/>
+          <p:cNvSpPr/>
+          <p:nvPr/>
+        </p:nvSpPr>
+        <p:spPr>
+          <a:xfrm>
+            <a:off x="548640" y="1691640"/>
+            <a:ext cx="5349240" cy="4434840"/>
+          </a:xfrm>
+          <a:prstGeom prst="roundRect">
+            <a:avLst>
+              <a:gd name="adj" fmla="val 1250"/>
+            </a:avLst>
+          </a:prstGeom>
+          <a:solidFill>
+            <a:srgbClr val="FFFFFF"/>
+          </a:solidFill>
+          <a:ln w="12700">
+            <a:solidFill>
+              <a:srgbClr val="DBE4EF"/>
+            </a:solidFill>
+          </a:ln>
+          <a:effectLst>
+            <a:outerShdw blurRad="127000" dist="38100" dir="5400000" algn="bl" rotWithShape="0">
+              <a:srgbClr val="172033">
+                <a:alpha val="15000"/>
+              </a:srgbClr>
+            </a:outerShdw>
+          </a:effectLst>
+        </p:spPr>
+        <p:style>
+          <a:lnRef idx="1">
+            <a:schemeClr val="accent1"/>
+          </a:lnRef>
+          <a:fillRef idx="3">
+            <a:schemeClr val="accent1"/>
+          </a:fillRef>
+          <a:effectRef idx="2">
+            <a:schemeClr val="accent1"/>
+          </a:effectRef>
+          <a:fontRef idx="minor">
+            <a:schemeClr val="lt1"/>
+          </a:fontRef>
+        </p:style>
+        <p:txBody>
+          <a:bodyPr rtlCol="0" anchor="ctr"/>
+          <a:lstStyle/>
+          <a:p>
+            <a:pPr algn="ctr"/>
+          </a:p>
+        </p:txBody>
+      </p:sp>
+      <p:pic>
+        <p:nvPicPr>
+          <p:cNvPr id="7" name="09-private-contacts.png" descr="Someone else’s email and phone: refused"/>
+          <p:cNvPicPr>
+            <a:picLocks noChangeAspect="1"/>
+          </p:cNvPicPr>
+          <p:nvPr/>
+        </p:nvPicPr>
+        <p:blipFill>
+          <a:blip r:embed="rId2"/>
+          <a:stretch>
+            <a:fillRect/>
+          </a:stretch>
+        </p:blipFill>
+        <p:spPr>
+          <a:xfrm>
+            <a:off x="1295165" y="1764792"/>
+            <a:ext cx="3856189" cy="3877055"/>
+          </a:xfrm>
+          <a:prstGeom prst="rect">
+            <a:avLst/>
+          </a:prstGeom>
+          <a:ln w="9525">
+            <a:solidFill>
+              <a:srgbClr val="DBE4EF"/>
+            </a:solidFill>
+          </a:ln>
+        </p:spPr>
+      </p:pic>
+      <p:sp>
+        <p:nvSpPr>
+          <p:cNvPr id="8" name="TextBox 7"/>
+          <p:cNvSpPr txBox="1"/>
+          <p:nvPr/>
+        </p:nvSpPr>
+        <p:spPr>
+          <a:xfrm>
+            <a:off x="640080" y="5742431"/>
+            <a:ext cx="5166359" cy="320040"/>
+          </a:xfrm>
+          <a:prstGeom prst="rect">
+            <a:avLst/>
+          </a:prstGeom>
+          <a:noFill/>
+        </p:spPr>
+        <p:txBody>
+          <a:bodyPr wrap="square" lIns="0" rIns="0" tIns="0" bIns="0" anchor="ctr">
+            <a:spAutoFit/>
+          </a:bodyPr>
+          <a:lstStyle/>
+          <a:p>
+            <a:pPr algn="ctr"/>
+            <a:r>
+              <a:rPr sz="1100" b="0">
+                <a:solidFill>
+                  <a:schemeClr val="tx2"/>
+                </a:solidFill>
+                <a:latin typeface="Calibri"/>
+              </a:rPr>
+              <a:t>Someone else’s email and phone: refused</a:t>
+            </a:r>
+          </a:p>
+        </p:txBody>
+      </p:sp>
+      <p:sp>
+        <p:nvSpPr>
+          <p:cNvPr id="9" name="Card"/>
+          <p:cNvSpPr/>
+          <p:nvPr/>
+        </p:nvSpPr>
+        <p:spPr>
+          <a:xfrm>
+            <a:off x="6172200" y="1691640"/>
+            <a:ext cx="5349240" cy="4434840"/>
+          </a:xfrm>
+          <a:prstGeom prst="roundRect">
+            <a:avLst>
+              <a:gd name="adj" fmla="val 1250"/>
+            </a:avLst>
+          </a:prstGeom>
+          <a:solidFill>
+            <a:srgbClr val="FFFFFF"/>
+          </a:solidFill>
+          <a:ln w="12700">
+            <a:solidFill>
+              <a:srgbClr val="DBE4EF"/>
+            </a:solidFill>
+          </a:ln>
+          <a:effectLst>
+            <a:outerShdw blurRad="127000" dist="38100" dir="5400000" algn="bl" rotWithShape="0">
+              <a:srgbClr val="172033">
+                <a:alpha val="15000"/>
+              </a:srgbClr>
+            </a:outerShdw>
+          </a:effectLst>
+        </p:spPr>
+        <p:style>
+          <a:lnRef idx="1">
+            <a:schemeClr val="accent1"/>
+          </a:lnRef>
+          <a:fillRef idx="3">
+            <a:schemeClr val="accent1"/>
+          </a:fillRef>
+          <a:effectRef idx="2">
+            <a:schemeClr val="accent1"/>
+          </a:effectRef>
+          <a:fontRef idx="minor">
+            <a:schemeClr val="lt1"/>
+          </a:fontRef>
+        </p:style>
+        <p:txBody>
+          <a:bodyPr rtlCol="0" anchor="ctr"/>
+          <a:lstStyle/>
+          <a:p>
+            <a:pPr algn="ctr"/>
+          </a:p>
+        </p:txBody>
+      </p:sp>
+      <p:pic>
+        <p:nvPicPr>
+          <p:cNvPr id="10" name="10-own-contacts.png" descr="Your own email and phone: not stored or repeated"/>
+          <p:cNvPicPr>
+            <a:picLocks noChangeAspect="1"/>
+          </p:cNvPicPr>
+          <p:nvPr/>
+        </p:nvPicPr>
+        <p:blipFill>
+          <a:blip r:embed="rId3"/>
+          <a:stretch>
+            <a:fillRect/>
+          </a:stretch>
+        </p:blipFill>
+        <p:spPr>
+          <a:xfrm>
+            <a:off x="6918725" y="1764792"/>
+            <a:ext cx="3856189" cy="3877055"/>
+          </a:xfrm>
+          <a:prstGeom prst="rect">
+            <a:avLst/>
+          </a:prstGeom>
+          <a:ln w="9525">
+            <a:solidFill>
+              <a:srgbClr val="DBE4EF"/>
+            </a:solidFill>
+          </a:ln>
+        </p:spPr>
+      </p:pic>
+      <p:sp>
+        <p:nvSpPr>
+          <p:cNvPr id="11" name="TextBox 10"/>
+          <p:cNvSpPr txBox="1"/>
+          <p:nvPr/>
+        </p:nvSpPr>
+        <p:spPr>
+          <a:xfrm>
+            <a:off x="6263640" y="5742431"/>
+            <a:ext cx="5166359" cy="320040"/>
+          </a:xfrm>
+          <a:prstGeom prst="rect">
+            <a:avLst/>
+          </a:prstGeom>
+          <a:noFill/>
+        </p:spPr>
+        <p:txBody>
+          <a:bodyPr wrap="square" lIns="0" rIns="0" tIns="0" bIns="0" anchor="ctr">
+            <a:spAutoFit/>
+          </a:bodyPr>
+          <a:lstStyle/>
+          <a:p>
+            <a:pPr algn="ctr"/>
+            <a:r>
+              <a:rPr sz="1100" b="0">
+                <a:solidFill>
+                  <a:schemeClr val="tx2"/>
+                </a:solidFill>
+                <a:latin typeface="Calibri"/>
+              </a:rPr>
+              <a:t>Your own email and phone: not stored or repeated</a:t>
+            </a:r>
+          </a:p>
+        </p:txBody>
+      </p:sp>
+    </p:spTree>
+  </p:cSld>
+  <p:clrMapOvr>
+    <a:masterClrMapping/>
+  </p:clrMapOvr>
+</p:sld>
+</file>
+
+<file path=ppt/slides/slide21.xml><?xml version="1.0" encoding="utf-8"?>
+<p:sld xmlns:a="http://schemas.openxmlformats.org/drawingml/2006/main" xmlns:p="http://schemas.openxmlformats.org/presentationml/2006/main" xmlns:r="http://schemas.openxmlformats.org/officeDocument/2006/relationships">
+  <p:cSld>
+    <p:spTree>
+      <p:nvGrpSpPr>
+        <p:cNvPr id="1" name=""/>
+        <p:cNvGrpSpPr/>
+        <p:nvPr/>
+      </p:nvGrpSpPr>
+      <p:grpSpPr/>
+      <p:sp>
+        <p:nvSpPr>
+          <p:cNvPr id="2" name="Kicker"/>
+          <p:cNvSpPr txBox="1"/>
+          <p:nvPr/>
+        </p:nvSpPr>
+        <p:spPr>
+          <a:xfrm>
+            <a:off x="548640" y="457200"/>
+            <a:ext cx="9144000" cy="320040"/>
+          </a:xfrm>
+          <a:prstGeom prst="rect">
+            <a:avLst/>
+          </a:prstGeom>
+          <a:noFill/>
+        </p:spPr>
+        <p:txBody>
+          <a:bodyPr wrap="square" lIns="0" rIns="0" tIns="0" bIns="0" anchor="t">
+            <a:spAutoFit/>
+          </a:bodyPr>
+          <a:lstStyle/>
+          <a:p>
+            <a:r>
+              <a:rPr sz="1200" b="1" spc="200">
+                <a:solidFill>
+                  <a:schemeClr val="accent1"/>
+                </a:solidFill>
+                <a:latin typeface="Calibri"/>
+              </a:rPr>
+              <a:t>GUARDRAILS &amp; PROTECTION</a:t>
+            </a:r>
+          </a:p>
+        </p:txBody>
+      </p:sp>
+      <p:sp>
+        <p:nvSpPr>
+          <p:cNvPr id="3" name="Title"/>
+          <p:cNvSpPr txBox="1"/>
+          <p:nvPr/>
+        </p:nvSpPr>
+        <p:spPr>
+          <a:xfrm>
+            <a:off x="548640" y="777240"/>
+            <a:ext cx="11091672" cy="731520"/>
+          </a:xfrm>
+          <a:prstGeom prst="rect">
+            <a:avLst/>
+          </a:prstGeom>
+          <a:noFill/>
+        </p:spPr>
+        <p:txBody>
+          <a:bodyPr wrap="square" lIns="0" rIns="0" tIns="0" bIns="0" anchor="t">
+            <a:spAutoFit/>
+          </a:bodyPr>
+          <a:lstStyle/>
+          <a:p>
+            <a:r>
+              <a:rPr sz="3000" b="1">
+                <a:solidFill>
+                  <a:schemeClr val="tx1"/>
+                </a:solidFill>
+                <a:latin typeface="Cambria"/>
+              </a:rPr>
+              <a:t>The operator’s public contacts are shown</a:t>
+            </a:r>
+          </a:p>
+        </p:txBody>
+      </p:sp>
+      <p:sp>
+        <p:nvSpPr>
+          <p:cNvPr id="4" name="Footer"/>
+          <p:cNvSpPr txBox="1"/>
+          <p:nvPr/>
+        </p:nvSpPr>
+        <p:spPr>
+          <a:xfrm>
+            <a:off x="548640" y="6473952"/>
+            <a:ext cx="6400800" cy="274320"/>
+          </a:xfrm>
+          <a:prstGeom prst="rect">
+            <a:avLst/>
+          </a:prstGeom>
+          <a:noFill/>
+        </p:spPr>
+        <p:txBody>
+          <a:bodyPr wrap="square" lIns="0" rIns="0" tIns="0" bIns="0" anchor="t">
+            <a:spAutoFit/>
+          </a:bodyPr>
+          <a:lstStyle/>
+          <a:p>
+            <a:r>
+              <a:rPr sz="1000" b="0">
+                <a:solidFill>
+                  <a:schemeClr val="tx2"/>
+                </a:solidFill>
+                <a:latin typeface="Calibri"/>
+              </a:rPr>
+              <a:t>app/ai/guardrails.py · PUBLIC_CONTACTS in .env · data/…/static/general_info.md</a:t>
+            </a:r>
+          </a:p>
+        </p:txBody>
+      </p:sp>
+      <p:sp>
+        <p:nvSpPr>
+          <p:cNvPr id="5" name="Footer brand"/>
+          <p:cNvSpPr txBox="1"/>
+          <p:nvPr/>
+        </p:nvSpPr>
+        <p:spPr>
+          <a:xfrm>
+            <a:off x="8897112" y="6473952"/>
+            <a:ext cx="2743200" cy="274320"/>
+          </a:xfrm>
+          <a:prstGeom prst="rect">
+            <a:avLst/>
+          </a:prstGeom>
+          <a:noFill/>
+        </p:spPr>
+        <p:txBody>
+          <a:bodyPr wrap="square" lIns="0" rIns="0" tIns="0" bIns="0" anchor="t">
+            <a:spAutoFit/>
+          </a:bodyPr>
+          <a:lstStyle/>
+          <a:p>
+            <a:pPr algn="r"/>
+            <a:r>
+              <a:rPr sz="1000" b="0">
+                <a:solidFill>
+                  <a:schemeClr val="tx2"/>
+                </a:solidFill>
+                <a:latin typeface="Calibri"/>
+              </a:rPr>
+              <a:t>VilniusPark Chatbot</a:t>
+            </a:r>
+          </a:p>
+        </p:txBody>
+      </p:sp>
+      <p:sp>
+        <p:nvSpPr>
+          <p:cNvPr id="6" name="Bullets"/>
+          <p:cNvSpPr txBox="1"/>
+          <p:nvPr/>
+        </p:nvSpPr>
+        <p:spPr>
+          <a:xfrm>
+            <a:off x="548640" y="1691640"/>
+            <a:ext cx="5486400" cy="4480560"/>
+          </a:xfrm>
+          <a:prstGeom prst="rect">
+            <a:avLst/>
+          </a:prstGeom>
+          <a:noFill/>
+        </p:spPr>
+        <p:txBody>
+          <a:bodyPr wrap="square" lIns="0" rIns="0" tIns="0" bIns="0" anchor="t">
+            <a:spAutoFit/>
+          </a:bodyPr>
+          <a:lstStyle/>
+          <a:p>
+            <a:pPr marL="342900" indent="-342900">
+              <a:lnSpc>
+                <a:spcPct val="125000"/>
+              </a:lnSpc>
+              <a:spcAft>
+                <a:spcPts val="1200"/>
+              </a:spcAft>
+              <a:buSzPct val="100000"/>
+              <a:buChar char="•"/>
+            </a:pPr>
+            <a:r>
+              <a:rPr sz="1400" b="1">
+                <a:solidFill>
+                  <a:schemeClr val="tx1"/>
+                </a:solidFill>
+                <a:latin typeface="Calibri"/>
+              </a:rPr>
+              <a:t>PIIGuard redacts </a:t>
+            </a:r>
+            <a:r>
+              <a:rPr sz="1400" b="0">
+                <a:solidFill>
+                  <a:schemeClr val="tx1"/>
+                </a:solidFill>
+                <a:latin typeface="Calibri"/>
+              </a:rPr>
+              <a:t>emails, phone numbers, names, plates and card numbers in search queries, stored chunks and answers</a:t>
+            </a:r>
+          </a:p>
+          <a:p>
+            <a:pPr marL="342900" indent="-342900">
+              <a:lnSpc>
+                <a:spcPct val="125000"/>
+              </a:lnSpc>
+              <a:spcAft>
+                <a:spcPts val="1200"/>
+              </a:spcAft>
+              <a:buSzPct val="100000"/>
+              <a:buChar char="•"/>
+            </a:pPr>
+            <a:r>
+              <a:rPr sz="1400" b="1">
+                <a:solidFill>
+                  <a:schemeClr val="tx1"/>
+                </a:solidFill>
+                <a:latin typeface="Calibri"/>
+              </a:rPr>
+              <a:t>An allow-list, PUBLIC_CONTACTS, </a:t>
+            </a:r>
+            <a:r>
+              <a:rPr sz="1400" b="0">
+                <a:solidFill>
+                  <a:schemeClr val="tx1"/>
+                </a:solidFill>
+                <a:latin typeface="Calibri"/>
+              </a:rPr>
+              <a:t>keeps the operator’s own published phone and email (+370 5 200 0000, info@vilpark.lt)</a:t>
+            </a:r>
+          </a:p>
+          <a:p>
+            <a:pPr marL="342900" indent="-342900">
+              <a:lnSpc>
+                <a:spcPct val="125000"/>
+              </a:lnSpc>
+              <a:spcAft>
+                <a:spcPts val="1200"/>
+              </a:spcAft>
+              <a:buSzPct val="100000"/>
+              <a:buChar char="•"/>
+            </a:pPr>
+            <a:r>
+              <a:rPr sz="1400" b="1">
+                <a:solidFill>
+                  <a:schemeClr val="tx1"/>
+                </a:solidFill>
+                <a:latin typeface="Calibri"/>
+              </a:rPr>
+              <a:t>So “How can I contact support?” </a:t>
+            </a:r>
+            <a:r>
+              <a:rPr sz="1400" b="0">
+                <a:solidFill>
+                  <a:schemeClr val="tx1"/>
+                </a:solidFill>
+                <a:latin typeface="Calibri"/>
+              </a:rPr>
+              <a:t>gets the real contacts, while a customer’s personal details never do</a:t>
+            </a:r>
+          </a:p>
+          <a:p>
+            <a:pPr marL="342900" indent="-342900">
+              <a:lnSpc>
+                <a:spcPct val="125000"/>
+              </a:lnSpc>
+              <a:spcAft>
+                <a:spcPts val="1200"/>
+              </a:spcAft>
+              <a:buSzPct val="100000"/>
+              <a:buChar char="•"/>
+            </a:pPr>
+            <a:r>
+              <a:rPr sz="1400" b="1">
+                <a:solidFill>
+                  <a:schemeClr val="tx1"/>
+                </a:solidFill>
+                <a:latin typeface="Calibri"/>
+              </a:rPr>
+              <a:t>Found by running it: </a:t>
+            </a:r>
+            <a:r>
+              <a:rPr sz="1400" b="0">
+                <a:solidFill>
+                  <a:schemeClr val="tx1"/>
+                </a:solidFill>
+                <a:latin typeface="Calibri"/>
+              </a:rPr>
+              <a:t>the filter once hid the support email too — fixed with the allow-list</a:t>
+            </a:r>
+          </a:p>
+        </p:txBody>
+      </p:sp>
+      <p:sp>
+        <p:nvSpPr>
+          <p:cNvPr id="7" name="Card"/>
+          <p:cNvSpPr/>
+          <p:nvPr/>
+        </p:nvSpPr>
+        <p:spPr>
+          <a:xfrm>
+            <a:off x="6355080" y="1600200"/>
+            <a:ext cx="5257800" cy="4663440"/>
+          </a:xfrm>
+          <a:prstGeom prst="roundRect">
+            <a:avLst>
+              <a:gd name="adj" fmla="val 1250"/>
+            </a:avLst>
+          </a:prstGeom>
+          <a:solidFill>
+            <a:srgbClr val="FFFFFF"/>
+          </a:solidFill>
+          <a:ln w="12700">
+            <a:solidFill>
+              <a:srgbClr val="DBE4EF"/>
+            </a:solidFill>
+          </a:ln>
+          <a:effectLst>
+            <a:outerShdw blurRad="127000" dist="38100" dir="5400000" algn="bl" rotWithShape="0">
+              <a:srgbClr val="172033">
+                <a:alpha val="15000"/>
+              </a:srgbClr>
+            </a:outerShdw>
+          </a:effectLst>
+        </p:spPr>
+        <p:style>
+          <a:lnRef idx="1">
+            <a:schemeClr val="accent1"/>
+          </a:lnRef>
+          <a:fillRef idx="3">
+            <a:schemeClr val="accent1"/>
+          </a:fillRef>
+          <a:effectRef idx="2">
+            <a:schemeClr val="accent1"/>
+          </a:effectRef>
+          <a:fontRef idx="minor">
+            <a:schemeClr val="lt1"/>
+          </a:fontRef>
+        </p:style>
+        <p:txBody>
+          <a:bodyPr rtlCol="0" anchor="ctr"/>
+          <a:lstStyle/>
+          <a:p>
+            <a:pPr algn="ctr"/>
+          </a:p>
+        </p:txBody>
+      </p:sp>
+      <p:pic>
+        <p:nvPicPr>
+          <p:cNvPr id="8" name="11-public-contacts.png" descr="“How can I contact VilniusPark customer support?”"/>
+          <p:cNvPicPr>
+            <a:picLocks noChangeAspect="1"/>
+          </p:cNvPicPr>
+          <p:nvPr/>
+        </p:nvPicPr>
+        <p:blipFill>
+          <a:blip r:embed="rId2"/>
+          <a:stretch>
+            <a:fillRect/>
+          </a:stretch>
+        </p:blipFill>
+        <p:spPr>
+          <a:xfrm>
+            <a:off x="6942200" y="1673352"/>
+            <a:ext cx="4083558" cy="4105655"/>
+          </a:xfrm>
+          <a:prstGeom prst="rect">
+            <a:avLst/>
+          </a:prstGeom>
+          <a:ln w="9525">
+            <a:solidFill>
+              <a:srgbClr val="DBE4EF"/>
+            </a:solidFill>
+          </a:ln>
+        </p:spPr>
+      </p:pic>
+      <p:sp>
+        <p:nvSpPr>
+          <p:cNvPr id="9" name="TextBox 8"/>
+          <p:cNvSpPr txBox="1"/>
+          <p:nvPr/>
+        </p:nvSpPr>
+        <p:spPr>
+          <a:xfrm>
+            <a:off x="6446520" y="5879592"/>
+            <a:ext cx="5074920" cy="320040"/>
+          </a:xfrm>
+          <a:prstGeom prst="rect">
+            <a:avLst/>
+          </a:prstGeom>
+          <a:noFill/>
+        </p:spPr>
+        <p:txBody>
+          <a:bodyPr wrap="square" lIns="0" rIns="0" tIns="0" bIns="0" anchor="ctr">
+            <a:spAutoFit/>
+          </a:bodyPr>
+          <a:lstStyle/>
+          <a:p>
+            <a:pPr algn="ctr"/>
+            <a:r>
+              <a:rPr sz="1100" b="0">
+                <a:solidFill>
+                  <a:schemeClr val="tx2"/>
+                </a:solidFill>
+                <a:latin typeface="Calibri"/>
+              </a:rPr>
+              <a:t>“How can I contact VilniusPark customer support?”</a:t>
+            </a:r>
+          </a:p>
+        </p:txBody>
+      </p:sp>
+    </p:spTree>
+  </p:cSld>
+  <p:clrMapOvr>
+    <a:masterClrMapping/>
+  </p:clrMapOvr>
+</p:sld>
+</file>
+
+<file path=ppt/slides/slide22.xml><?xml version="1.0" encoding="utf-8"?>
+<p:sld xmlns:a="http://schemas.openxmlformats.org/drawingml/2006/main" xmlns:p="http://schemas.openxmlformats.org/presentationml/2006/main" xmlns:r="http://schemas.openxmlformats.org/officeDocument/2006/relationships">
+  <p:cSld>
+    <p:spTree>
+      <p:nvGrpSpPr>
+        <p:cNvPr id="1" name=""/>
+        <p:cNvGrpSpPr/>
+        <p:nvPr/>
+      </p:nvGrpSpPr>
+      <p:grpSpPr/>
+      <p:sp>
+        <p:nvSpPr>
+          <p:cNvPr id="2" name="Kicker"/>
+          <p:cNvSpPr txBox="1"/>
+          <p:nvPr/>
+        </p:nvSpPr>
+        <p:spPr>
+          <a:xfrm>
+            <a:off x="548640" y="457200"/>
+            <a:ext cx="9144000" cy="320040"/>
+          </a:xfrm>
+          <a:prstGeom prst="rect">
+            <a:avLst/>
+          </a:prstGeom>
+          <a:noFill/>
+        </p:spPr>
+        <p:txBody>
+          <a:bodyPr wrap="square" lIns="0" rIns="0" tIns="0" bIns="0" anchor="t">
+            <a:spAutoFit/>
+          </a:bodyPr>
+          <a:lstStyle/>
+          <a:p>
+            <a:r>
+              <a:rPr sz="1200" b="1" spc="200">
+                <a:solidFill>
+                  <a:schemeClr val="accent1"/>
+                </a:solidFill>
+                <a:latin typeface="Calibri"/>
+              </a:rPr>
+              <a:t>ARCHITECTURE — CLASS RELATIONS</a:t>
+            </a:r>
+          </a:p>
+        </p:txBody>
+      </p:sp>
+      <p:sp>
+        <p:nvSpPr>
+          <p:cNvPr id="3" name="Title"/>
+          <p:cNvSpPr txBox="1"/>
+          <p:nvPr/>
+        </p:nvSpPr>
+        <p:spPr>
+          <a:xfrm>
+            <a:off x="548640" y="777240"/>
+            <a:ext cx="11091672" cy="731520"/>
+          </a:xfrm>
+          <a:prstGeom prst="rect">
+            <a:avLst/>
+          </a:prstGeom>
+          <a:noFill/>
+        </p:spPr>
+        <p:txBody>
+          <a:bodyPr wrap="square" lIns="0" rIns="0" tIns="0" bIns="0" anchor="t">
+            <a:spAutoFit/>
+          </a:bodyPr>
+          <a:lstStyle/>
+          <a:p>
+            <a:r>
+              <a:rPr sz="3000" b="1">
+                <a:solidFill>
+                  <a:schemeClr val="tx1"/>
+                </a:solidFill>
+                <a:latin typeface="Cambria"/>
+              </a:rPr>
+              <a:t>How the classes work together</a:t>
+            </a:r>
+          </a:p>
+        </p:txBody>
+      </p:sp>
+      <p:sp>
+        <p:nvSpPr>
+          <p:cNvPr id="4" name="Footer"/>
+          <p:cNvSpPr txBox="1"/>
+          <p:nvPr/>
+        </p:nvSpPr>
+        <p:spPr>
+          <a:xfrm>
+            <a:off x="548640" y="6473952"/>
+            <a:ext cx="6400800" cy="274320"/>
+          </a:xfrm>
+          <a:prstGeom prst="rect">
+            <a:avLst/>
+          </a:prstGeom>
+          <a:noFill/>
+        </p:spPr>
+        <p:txBody>
+          <a:bodyPr wrap="square" lIns="0" rIns="0" tIns="0" bIns="0" anchor="t">
+            <a:spAutoFit/>
+          </a:bodyPr>
+          <a:lstStyle/>
+          <a:p>
+            <a:r>
+              <a:rPr sz="1000" b="0">
+                <a:solidFill>
+                  <a:schemeClr val="tx2"/>
+                </a:solidFill>
+                <a:latin typeface="Calibri"/>
+              </a:rPr>
+              <a:t>app/api/routers · app/ai/graph.py · app/ai/agents.py · app/ai/tools.py · app/services/parking.py</a:t>
+            </a:r>
+          </a:p>
+        </p:txBody>
+      </p:sp>
+      <p:sp>
+        <p:nvSpPr>
+          <p:cNvPr id="5" name="Footer brand"/>
+          <p:cNvSpPr txBox="1"/>
+          <p:nvPr/>
+        </p:nvSpPr>
+        <p:spPr>
+          <a:xfrm>
+            <a:off x="8897112" y="6473952"/>
+            <a:ext cx="2743200" cy="274320"/>
+          </a:xfrm>
+          <a:prstGeom prst="rect">
+            <a:avLst/>
+          </a:prstGeom>
+          <a:noFill/>
+        </p:spPr>
+        <p:txBody>
+          <a:bodyPr wrap="square" lIns="0" rIns="0" tIns="0" bIns="0" anchor="t">
+            <a:spAutoFit/>
+          </a:bodyPr>
+          <a:lstStyle/>
+          <a:p>
+            <a:pPr algn="r"/>
+            <a:r>
+              <a:rPr sz="1000" b="0">
+                <a:solidFill>
+                  <a:schemeClr val="tx2"/>
+                </a:solidFill>
+                <a:latin typeface="Calibri"/>
+              </a:rPr>
+              <a:t>VilniusPark Chatbot</a:t>
+            </a:r>
+          </a:p>
+        </p:txBody>
+      </p:sp>
+      <p:sp>
+        <p:nvSpPr>
+          <p:cNvPr id="6" name="Class FastAPI routers"/>
+          <p:cNvSpPr/>
+          <p:nvPr/>
+        </p:nvSpPr>
+        <p:spPr>
+          <a:xfrm>
+            <a:off x="548640" y="1783080"/>
+            <a:ext cx="2176272" cy="914400"/>
+          </a:xfrm>
+          <a:prstGeom prst="roundRect">
+            <a:avLst>
+              <a:gd name="adj" fmla="val 8000"/>
+            </a:avLst>
+          </a:prstGeom>
+          <a:solidFill>
+            <a:srgbClr val="EFF6FF"/>
+          </a:solidFill>
+          <a:ln w="12700">
+            <a:solidFill>
+              <a:srgbClr val="DBE4EF"/>
+            </a:solidFill>
+          </a:ln>
+        </p:spPr>
+        <p:style>
+          <a:lnRef idx="1">
+            <a:schemeClr val="accent1"/>
+          </a:lnRef>
+          <a:fillRef idx="3">
+            <a:schemeClr val="accent1"/>
+          </a:fillRef>
+          <a:effectRef idx="2">
+            <a:schemeClr val="accent1"/>
+          </a:effectRef>
+          <a:fontRef idx="minor">
+            <a:schemeClr val="lt1"/>
+          </a:fontRef>
+        </p:style>
+        <p:txBody>
+          <a:bodyPr rtlCol="0" anchor="ctr" wrap="square" lIns="73152" rIns="73152" tIns="36576" bIns="36576"/>
+          <a:lstStyle/>
+          <a:p>
+            <a:pPr algn="ctr"/>
+            <a:r>
+              <a:rPr sz="1250" b="1">
+                <a:solidFill>
+                  <a:srgbClr val="132257"/>
+                </a:solidFill>
+                <a:latin typeface="Calibri"/>
+              </a:rPr>
+              <a:t>FastAPI routers</a:t>
+            </a:r>
+          </a:p>
+          <a:p>
+            <a:pPr algn="ctr"/>
+            <a:r>
+              <a:rPr sz="950" b="0">
+                <a:solidFill>
+                  <a:srgbClr val="64748B"/>
+                </a:solidFill>
+                <a:latin typeface="Calibri"/>
+              </a:rPr>
+              <a:t>chat.py · admin.py · pages.py</a:t>
+            </a:r>
+          </a:p>
+        </p:txBody>
+      </p:sp>
+      <p:sp>
+        <p:nvSpPr>
+          <p:cNvPr id="7" name="Class ParkingGraph"/>
+          <p:cNvSpPr/>
+          <p:nvPr/>
+        </p:nvSpPr>
+        <p:spPr>
+          <a:xfrm>
+            <a:off x="3520440" y="1783080"/>
+            <a:ext cx="2176272" cy="914400"/>
+          </a:xfrm>
+          <a:prstGeom prst="roundRect">
+            <a:avLst>
+              <a:gd name="adj" fmla="val 8000"/>
+            </a:avLst>
+          </a:prstGeom>
+          <a:solidFill>
+            <a:srgbClr val="2563EB"/>
+          </a:solidFill>
+          <a:ln w="12700">
+            <a:solidFill>
+              <a:srgbClr val="2563EB"/>
+            </a:solidFill>
+          </a:ln>
+        </p:spPr>
+        <p:style>
+          <a:lnRef idx="1">
+            <a:schemeClr val="accent1"/>
+          </a:lnRef>
+          <a:fillRef idx="3">
+            <a:schemeClr val="accent1"/>
+          </a:fillRef>
+          <a:effectRef idx="2">
+            <a:schemeClr val="accent1"/>
+          </a:effectRef>
+          <a:fontRef idx="minor">
+            <a:schemeClr val="lt1"/>
+          </a:fontRef>
+        </p:style>
+        <p:txBody>
+          <a:bodyPr rtlCol="0" anchor="ctr" wrap="square" lIns="73152" rIns="73152" tIns="36576" bIns="36576"/>
+          <a:lstStyle/>
+          <a:p>
+            <a:pPr algn="ctr"/>
+            <a:r>
+              <a:rPr sz="1250" b="1">
+                <a:solidFill>
+                  <a:srgbClr val="FFFFFF"/>
+                </a:solidFill>
+                <a:latin typeface="Courier New"/>
+              </a:rPr>
+              <a:t>ParkingGraph</a:t>
+            </a:r>
+          </a:p>
+          <a:p>
+            <a:pPr algn="ctr"/>
+            <a:r>
+              <a:rPr sz="950" b="0">
+                <a:solidFill>
+                  <a:srgbClr val="EFF6FF"/>
+                </a:solidFill>
+                <a:latin typeface="Calibri"/>
+              </a:rPr>
+              <a:t>StateGraph[ParkingState] · Postgres checkpointer</a:t>
+            </a:r>
+          </a:p>
+        </p:txBody>
+      </p:sp>
+      <p:sp>
+        <p:nvSpPr>
+          <p:cNvPr id="8" name="Class user agent"/>
+          <p:cNvSpPr/>
+          <p:nvPr/>
+        </p:nvSpPr>
+        <p:spPr>
+          <a:xfrm>
+            <a:off x="6492240" y="1783080"/>
+            <a:ext cx="2176272" cy="914400"/>
+          </a:xfrm>
+          <a:prstGeom prst="roundRect">
+            <a:avLst>
+              <a:gd name="adj" fmla="val 8000"/>
+            </a:avLst>
+          </a:prstGeom>
+          <a:solidFill>
+            <a:srgbClr val="EFF6FF"/>
+          </a:solidFill>
+          <a:ln w="12700">
+            <a:solidFill>
+              <a:srgbClr val="DBE4EF"/>
+            </a:solidFill>
+          </a:ln>
+        </p:spPr>
+        <p:style>
+          <a:lnRef idx="1">
+            <a:schemeClr val="accent1"/>
+          </a:lnRef>
+          <a:fillRef idx="3">
+            <a:schemeClr val="accent1"/>
+          </a:fillRef>
+          <a:effectRef idx="2">
+            <a:schemeClr val="accent1"/>
+          </a:effectRef>
+          <a:fontRef idx="minor">
+            <a:schemeClr val="lt1"/>
+          </a:fontRef>
+        </p:style>
+        <p:txBody>
+          <a:bodyPr rtlCol="0" anchor="ctr" wrap="square" lIns="73152" rIns="73152" tIns="36576" bIns="36576"/>
+          <a:lstStyle/>
+          <a:p>
+            <a:pPr algn="ctr"/>
+            <a:r>
+              <a:rPr sz="1250" b="1">
+                <a:solidFill>
+                  <a:srgbClr val="132257"/>
+                </a:solidFill>
+                <a:latin typeface="Courier New"/>
+              </a:rPr>
+              <a:t>user agent</a:t>
+            </a:r>
+          </a:p>
+          <a:p>
+            <a:pPr algn="ctr"/>
+            <a:r>
+              <a:rPr sz="950" b="0">
+                <a:solidFill>
+                  <a:srgbClr val="64748B"/>
+                </a:solidFill>
+                <a:latin typeface="Calibri"/>
+              </a:rPr>
+              <a:t>create_agent · UserAgentState · middleware</a:t>
+            </a:r>
+          </a:p>
+        </p:txBody>
+      </p:sp>
+      <p:sp>
+        <p:nvSpPr>
+          <p:cNvPr id="9" name="Class PIIGuard"/>
+          <p:cNvSpPr/>
+          <p:nvPr/>
+        </p:nvSpPr>
+        <p:spPr>
+          <a:xfrm>
+            <a:off x="9464040" y="1783080"/>
+            <a:ext cx="2176272" cy="914400"/>
+          </a:xfrm>
+          <a:prstGeom prst="roundRect">
+            <a:avLst>
+              <a:gd name="adj" fmla="val 8000"/>
+            </a:avLst>
+          </a:prstGeom>
+          <a:solidFill>
+            <a:srgbClr val="EFF6FF"/>
+          </a:solidFill>
+          <a:ln w="12700">
+            <a:solidFill>
+              <a:srgbClr val="DBE4EF"/>
+            </a:solidFill>
+          </a:ln>
+        </p:spPr>
+        <p:style>
+          <a:lnRef idx="1">
+            <a:schemeClr val="accent1"/>
+          </a:lnRef>
+          <a:fillRef idx="3">
+            <a:schemeClr val="accent1"/>
+          </a:fillRef>
+          <a:effectRef idx="2">
+            <a:schemeClr val="accent1"/>
+          </a:effectRef>
+          <a:fontRef idx="minor">
+            <a:schemeClr val="lt1"/>
+          </a:fontRef>
+        </p:style>
+        <p:txBody>
+          <a:bodyPr rtlCol="0" anchor="ctr" wrap="square" lIns="73152" rIns="73152" tIns="36576" bIns="36576"/>
+          <a:lstStyle/>
+          <a:p>
+            <a:pPr algn="ctr"/>
+            <a:r>
+              <a:rPr sz="1250" b="1">
+                <a:solidFill>
+                  <a:srgbClr val="132257"/>
+                </a:solidFill>
+                <a:latin typeface="Courier New"/>
+              </a:rPr>
+              <a:t>PIIGuard</a:t>
+            </a:r>
+          </a:p>
+          <a:p>
+            <a:pPr algn="ctr"/>
+            <a:r>
+              <a:rPr sz="950" b="0">
+                <a:solidFill>
+                  <a:srgbClr val="64748B"/>
+                </a:solidFill>
+                <a:latin typeface="Calibri"/>
+              </a:rPr>
+              <a:t>Presidio + spaCy · PUBLIC_CONTACTS</a:t>
+            </a:r>
+          </a:p>
+        </p:txBody>
+      </p:sp>
+      <p:sp>
+        <p:nvSpPr>
+          <p:cNvPr id="10" name="Class admin agent"/>
+          <p:cNvSpPr/>
+          <p:nvPr/>
+        </p:nvSpPr>
+        <p:spPr>
+          <a:xfrm>
+            <a:off x="3520440" y="3291840"/>
+            <a:ext cx="2176272" cy="914400"/>
+          </a:xfrm>
+          <a:prstGeom prst="roundRect">
+            <a:avLst>
+              <a:gd name="adj" fmla="val 8000"/>
+            </a:avLst>
+          </a:prstGeom>
+          <a:solidFill>
+            <a:srgbClr val="EFF6FF"/>
+          </a:solidFill>
+          <a:ln w="12700">
+            <a:solidFill>
+              <a:srgbClr val="DBE4EF"/>
+            </a:solidFill>
+          </a:ln>
+        </p:spPr>
+        <p:style>
+          <a:lnRef idx="1">
+            <a:schemeClr val="accent1"/>
+          </a:lnRef>
+          <a:fillRef idx="3">
+            <a:schemeClr val="accent1"/>
+          </a:fillRef>
+          <a:effectRef idx="2">
+            <a:schemeClr val="accent1"/>
+          </a:effectRef>
+          <a:fontRef idx="minor">
+            <a:schemeClr val="lt1"/>
+          </a:fontRef>
+        </p:style>
+        <p:txBody>
+          <a:bodyPr rtlCol="0" anchor="ctr" wrap="square" lIns="73152" rIns="73152" tIns="36576" bIns="36576"/>
+          <a:lstStyle/>
+          <a:p>
+            <a:pPr algn="ctr"/>
+            <a:r>
+              <a:rPr sz="1250" b="1">
+                <a:solidFill>
+                  <a:srgbClr val="132257"/>
+                </a:solidFill>
+                <a:latin typeface="Courier New"/>
+              </a:rPr>
+              <a:t>admin agent</a:t>
+            </a:r>
+          </a:p>
+          <a:p>
+            <a:pPr algn="ctr"/>
+            <a:r>
+              <a:rPr sz="950" b="0">
+                <a:solidFill>
+                  <a:srgbClr val="64748B"/>
+                </a:solidFill>
+                <a:latin typeface="Calibri"/>
+              </a:rPr>
+              <a:t>HumanInTheLoopMiddleware</a:t>
+            </a:r>
+          </a:p>
+        </p:txBody>
+      </p:sp>
+      <p:sp>
+        <p:nvSpPr>
+          <p:cNvPr id="11" name="Class tools + ChatContext"/>
+          <p:cNvSpPr/>
+          <p:nvPr/>
+        </p:nvSpPr>
+        <p:spPr>
+          <a:xfrm>
+            <a:off x="6492240" y="3291840"/>
+            <a:ext cx="2176272" cy="914400"/>
+          </a:xfrm>
+          <a:prstGeom prst="roundRect">
+            <a:avLst>
+              <a:gd name="adj" fmla="val 8000"/>
+            </a:avLst>
+          </a:prstGeom>
+          <a:solidFill>
+            <a:srgbClr val="EFF6FF"/>
+          </a:solidFill>
+          <a:ln w="12700">
+            <a:solidFill>
+              <a:srgbClr val="DBE4EF"/>
+            </a:solidFill>
+          </a:ln>
+        </p:spPr>
+        <p:style>
+          <a:lnRef idx="1">
+            <a:schemeClr val="accent1"/>
+          </a:lnRef>
+          <a:fillRef idx="3">
+            <a:schemeClr val="accent1"/>
+          </a:fillRef>
+          <a:effectRef idx="2">
+            <a:schemeClr val="accent1"/>
+          </a:effectRef>
+          <a:fontRef idx="minor">
+            <a:schemeClr val="lt1"/>
+          </a:fontRef>
+        </p:style>
+        <p:txBody>
+          <a:bodyPr rtlCol="0" anchor="ctr" wrap="square" lIns="73152" rIns="73152" tIns="36576" bIns="36576"/>
+          <a:lstStyle/>
+          <a:p>
+            <a:pPr algn="ctr"/>
+            <a:r>
+              <a:rPr sz="1250" b="1">
+                <a:solidFill>
+                  <a:srgbClr val="132257"/>
+                </a:solidFill>
+                <a:latin typeface="Courier New"/>
+              </a:rPr>
+              <a:t>tools + ChatContext</a:t>
+            </a:r>
+          </a:p>
+          <a:p>
+            <a:pPr algn="ctr"/>
+            <a:r>
+              <a:rPr sz="950" b="0">
+                <a:solidFill>
+                  <a:srgbClr val="64748B"/>
+                </a:solidFill>
+                <a:latin typeface="Calibri"/>
+              </a:rPr>
+              <a:t>search_public_rules · get_parking_info · prepare_reservation</a:t>
+            </a:r>
+          </a:p>
+        </p:txBody>
+      </p:sp>
+      <p:sp>
+        <p:nvSpPr>
+          <p:cNvPr id="12" name="Class MCP server"/>
+          <p:cNvSpPr/>
+          <p:nvPr/>
+        </p:nvSpPr>
+        <p:spPr>
+          <a:xfrm>
+            <a:off x="548640" y="4846320"/>
+            <a:ext cx="2176272" cy="914400"/>
+          </a:xfrm>
+          <a:prstGeom prst="roundRect">
+            <a:avLst>
+              <a:gd name="adj" fmla="val 8000"/>
+            </a:avLst>
+          </a:prstGeom>
+          <a:solidFill>
+            <a:srgbClr val="EFF6FF"/>
+          </a:solidFill>
+          <a:ln w="12700">
+            <a:solidFill>
+              <a:srgbClr val="DBE4EF"/>
+            </a:solidFill>
+          </a:ln>
+        </p:spPr>
+        <p:style>
+          <a:lnRef idx="1">
+            <a:schemeClr val="accent1"/>
+          </a:lnRef>
+          <a:fillRef idx="3">
+            <a:schemeClr val="accent1"/>
+          </a:fillRef>
+          <a:effectRef idx="2">
+            <a:schemeClr val="accent1"/>
+          </a:effectRef>
+          <a:fontRef idx="minor">
+            <a:schemeClr val="lt1"/>
+          </a:fontRef>
+        </p:style>
+        <p:txBody>
+          <a:bodyPr rtlCol="0" anchor="ctr" wrap="square" lIns="73152" rIns="73152" tIns="36576" bIns="36576"/>
+          <a:lstStyle/>
+          <a:p>
+            <a:pPr algn="ctr"/>
+            <a:r>
+              <a:rPr sz="1250" b="1">
+                <a:solidFill>
+                  <a:srgbClr val="132257"/>
+                </a:solidFill>
+                <a:latin typeface="Calibri"/>
+              </a:rPr>
+              <a:t>MCP server</a:t>
+            </a:r>
+          </a:p>
+          <a:p>
+            <a:pPr algn="ctr"/>
+            <a:r>
+              <a:rPr sz="950" b="0">
+                <a:solidFill>
+                  <a:srgbClr val="64748B"/>
+                </a:solidFill>
+                <a:latin typeface="Calibri"/>
+              </a:rPr>
+              <a:t>record_reservation · BearerAuth</a:t>
+            </a:r>
+          </a:p>
+        </p:txBody>
+      </p:sp>
+      <p:sp>
+        <p:nvSpPr>
+          <p:cNvPr id="13" name="Class ParkingService"/>
+          <p:cNvSpPr/>
+          <p:nvPr/>
+        </p:nvSpPr>
+        <p:spPr>
+          <a:xfrm>
+            <a:off x="3520440" y="4846320"/>
+            <a:ext cx="2176272" cy="914400"/>
+          </a:xfrm>
+          <a:prstGeom prst="roundRect">
+            <a:avLst>
+              <a:gd name="adj" fmla="val 8000"/>
+            </a:avLst>
+          </a:prstGeom>
+          <a:solidFill>
+            <a:srgbClr val="2563EB"/>
+          </a:solidFill>
+          <a:ln w="12700">
+            <a:solidFill>
+              <a:srgbClr val="2563EB"/>
+            </a:solidFill>
+          </a:ln>
+        </p:spPr>
+        <p:style>
+          <a:lnRef idx="1">
+            <a:schemeClr val="accent1"/>
+          </a:lnRef>
+          <a:fillRef idx="3">
+            <a:schemeClr val="accent1"/>
+          </a:fillRef>
+          <a:effectRef idx="2">
+            <a:schemeClr val="accent1"/>
+          </a:effectRef>
+          <a:fontRef idx="minor">
+            <a:schemeClr val="lt1"/>
+          </a:fontRef>
+        </p:style>
+        <p:txBody>
+          <a:bodyPr rtlCol="0" anchor="ctr" wrap="square" lIns="73152" rIns="73152" tIns="36576" bIns="36576"/>
+          <a:lstStyle/>
+          <a:p>
+            <a:pPr algn="ctr"/>
+            <a:r>
+              <a:rPr sz="1250" b="1">
+                <a:solidFill>
+                  <a:srgbClr val="FFFFFF"/>
+                </a:solidFill>
+                <a:latin typeface="Courier New"/>
+              </a:rPr>
+              <a:t>ParkingService</a:t>
+            </a:r>
+          </a:p>
+          <a:p>
+            <a:pPr algn="ctr"/>
+            <a:r>
+              <a:rPr sz="950" b="0">
+                <a:solidFill>
+                  <a:srgbClr val="EFF6FF"/>
+                </a:solidFill>
+                <a:latin typeface="Calibri"/>
+              </a:rPr>
+              <a:t>book · approval_facts · record_decision</a:t>
+            </a:r>
+          </a:p>
+        </p:txBody>
+      </p:sp>
+      <p:sp>
+        <p:nvSpPr>
+          <p:cNvPr id="14" name="Class Parking/Reservation Repository"/>
+          <p:cNvSpPr/>
+          <p:nvPr/>
+        </p:nvSpPr>
+        <p:spPr>
+          <a:xfrm>
+            <a:off x="6492240" y="4846320"/>
+            <a:ext cx="2176272" cy="914400"/>
+          </a:xfrm>
+          <a:prstGeom prst="roundRect">
+            <a:avLst>
+              <a:gd name="adj" fmla="val 8000"/>
+            </a:avLst>
+          </a:prstGeom>
+          <a:solidFill>
+            <a:srgbClr val="EFF6FF"/>
+          </a:solidFill>
+          <a:ln w="12700">
+            <a:solidFill>
+              <a:srgbClr val="DBE4EF"/>
+            </a:solidFill>
+          </a:ln>
+        </p:spPr>
+        <p:style>
+          <a:lnRef idx="1">
+            <a:schemeClr val="accent1"/>
+          </a:lnRef>
+          <a:fillRef idx="3">
+            <a:schemeClr val="accent1"/>
+          </a:fillRef>
+          <a:effectRef idx="2">
+            <a:schemeClr val="accent1"/>
+          </a:effectRef>
+          <a:fontRef idx="minor">
+            <a:schemeClr val="lt1"/>
+          </a:fontRef>
+        </p:style>
+        <p:txBody>
+          <a:bodyPr rtlCol="0" anchor="ctr" wrap="square" lIns="73152" rIns="73152" tIns="36576" bIns="36576"/>
+          <a:lstStyle/>
+          <a:p>
+            <a:pPr algn="ctr"/>
+            <a:r>
+              <a:rPr sz="1250" b="1">
+                <a:solidFill>
+                  <a:srgbClr val="132257"/>
+                </a:solidFill>
+                <a:latin typeface="Courier New"/>
+              </a:rPr>
+              <a:t>Parking/Reservation Repository</a:t>
+            </a:r>
+          </a:p>
+          <a:p>
+            <a:pPr algn="ctr"/>
+            <a:r>
+              <a:rPr sz="950" b="0">
+                <a:solidFill>
+                  <a:srgbClr val="64748B"/>
+                </a:solidFill>
+                <a:latin typeface="Calibri"/>
+              </a:rPr>
+              <a:t>Postgres (SQLAlchemy async)</a:t>
+            </a:r>
+          </a:p>
+        </p:txBody>
+      </p:sp>
+      <p:sp>
+        <p:nvSpPr>
+          <p:cNvPr id="15" name="Class MilvusRepository"/>
+          <p:cNvSpPr/>
+          <p:nvPr/>
+        </p:nvSpPr>
+        <p:spPr>
+          <a:xfrm>
+            <a:off x="9464040" y="4846320"/>
+            <a:ext cx="2176272" cy="914400"/>
+          </a:xfrm>
+          <a:prstGeom prst="roundRect">
+            <a:avLst>
+              <a:gd name="adj" fmla="val 8000"/>
+            </a:avLst>
+          </a:prstGeom>
+          <a:solidFill>
+            <a:srgbClr val="EFF6FF"/>
+          </a:solidFill>
+          <a:ln w="12700">
+            <a:solidFill>
+              <a:srgbClr val="DBE4EF"/>
+            </a:solidFill>
+          </a:ln>
+        </p:spPr>
+        <p:style>
+          <a:lnRef idx="1">
+            <a:schemeClr val="accent1"/>
+          </a:lnRef>
+          <a:fillRef idx="3">
+            <a:schemeClr val="accent1"/>
+          </a:fillRef>
+          <a:effectRef idx="2">
+            <a:schemeClr val="accent1"/>
+          </a:effectRef>
+          <a:fontRef idx="minor">
+            <a:schemeClr val="lt1"/>
+          </a:fontRef>
+        </p:style>
+        <p:txBody>
+          <a:bodyPr rtlCol="0" anchor="ctr" wrap="square" lIns="73152" rIns="73152" tIns="36576" bIns="36576"/>
+          <a:lstStyle/>
+          <a:p>
+            <a:pPr algn="ctr"/>
+            <a:r>
+              <a:rPr sz="1250" b="1">
+                <a:solidFill>
+                  <a:srgbClr val="132257"/>
+                </a:solidFill>
+                <a:latin typeface="Courier New"/>
+              </a:rPr>
+              <a:t>MilvusRepository</a:t>
+            </a:r>
+          </a:p>
+          <a:p>
+            <a:pPr algn="ctr"/>
+            <a:r>
+              <a:rPr sz="950" b="0">
+                <a:solidFill>
+                  <a:srgbClr val="64748B"/>
+                </a:solidFill>
+                <a:latin typeface="Calibri"/>
+              </a:rPr>
+              <a:t>hybrid search (vectors + BM25)</a:t>
+            </a:r>
+          </a:p>
+        </p:txBody>
+      </p:sp>
+      <p:cxnSp>
+        <p:nvCxnSpPr>
+          <p:cNvPr id="16" name="Arrow"/>
+          <p:cNvCxnSpPr/>
+          <p:nvPr/>
+        </p:nvCxnSpPr>
+        <p:spPr>
+          <a:xfrm>
+            <a:off x="2724912" y="2240280"/>
+            <a:ext cx="795528" cy="0"/>
+          </a:xfrm>
+          <a:prstGeom prst="line">
+            <a:avLst/>
+          </a:prstGeom>
+          <a:ln w="19050">
+            <a:solidFill>
+              <a:srgbClr val="64748B"/>
+            </a:solidFill>
+            <a:tailEnd type="triangle" w="med" len="med"/>
+          </a:ln>
+        </p:spPr>
+        <p:style>
+          <a:lnRef idx="2">
+            <a:schemeClr val="accent1"/>
+          </a:lnRef>
+          <a:fillRef idx="0">
+            <a:schemeClr val="accent1"/>
+          </a:fillRef>
+          <a:effectRef idx="1">
+            <a:schemeClr val="accent1"/>
+          </a:effectRef>
+          <a:fontRef idx="minor">
+            <a:schemeClr val="tx1"/>
+          </a:fontRef>
+        </p:style>
+      </p:cxnSp>
+      <p:sp>
+        <p:nvSpPr>
+          <p:cNvPr id="17" name="TextBox 16"/>
+          <p:cNvSpPr txBox="1"/>
+          <p:nvPr/>
+        </p:nvSpPr>
+        <p:spPr>
+          <a:xfrm>
+            <a:off x="2724912" y="1801368"/>
+            <a:ext cx="795528" cy="274320"/>
+          </a:xfrm>
+          <a:prstGeom prst="rect">
+            <a:avLst/>
+          </a:prstGeom>
+          <a:noFill/>
+        </p:spPr>
+        <p:txBody>
+          <a:bodyPr wrap="square" lIns="0" rIns="0" tIns="0" bIns="0" anchor="ctr">
+            <a:spAutoFit/>
+          </a:bodyPr>
+          <a:lstStyle/>
+          <a:p>
+            <a:pPr algn="ctr"/>
+            <a:r>
+              <a:rPr sz="950" b="0">
+                <a:solidFill>
+                  <a:srgbClr val="64748B"/>
+                </a:solidFill>
+                <a:latin typeface="Calibri"/>
+              </a:rPr>
+              <a:t>chat() · resume()</a:t>
+            </a:r>
+          </a:p>
+        </p:txBody>
+      </p:sp>
+      <p:cxnSp>
+        <p:nvCxnSpPr>
+          <p:cNvPr id="18" name="Arrow"/>
+          <p:cNvCxnSpPr/>
+          <p:nvPr/>
+        </p:nvCxnSpPr>
+        <p:spPr>
+          <a:xfrm>
+            <a:off x="5696712" y="2240280"/>
+            <a:ext cx="795528" cy="0"/>
+          </a:xfrm>
+          <a:prstGeom prst="line">
+            <a:avLst/>
+          </a:prstGeom>
+          <a:ln w="19050">
+            <a:solidFill>
+              <a:srgbClr val="64748B"/>
+            </a:solidFill>
+            <a:tailEnd type="triangle" w="med" len="med"/>
+          </a:ln>
+        </p:spPr>
+        <p:style>
+          <a:lnRef idx="2">
+            <a:schemeClr val="accent1"/>
+          </a:lnRef>
+          <a:fillRef idx="0">
+            <a:schemeClr val="accent1"/>
+          </a:fillRef>
+          <a:effectRef idx="1">
+            <a:schemeClr val="accent1"/>
+          </a:effectRef>
+          <a:fontRef idx="minor">
+            <a:schemeClr val="tx1"/>
+          </a:fontRef>
+        </p:style>
+      </p:cxnSp>
+      <p:sp>
+        <p:nvSpPr>
+          <p:cNvPr id="19" name="TextBox 18"/>
+          <p:cNvSpPr txBox="1"/>
+          <p:nvPr/>
+        </p:nvSpPr>
+        <p:spPr>
+          <a:xfrm>
+            <a:off x="5696712" y="1801368"/>
+            <a:ext cx="795528" cy="274320"/>
+          </a:xfrm>
+          <a:prstGeom prst="rect">
+            <a:avLst/>
+          </a:prstGeom>
+          <a:noFill/>
+        </p:spPr>
+        <p:txBody>
+          <a:bodyPr wrap="square" lIns="0" rIns="0" tIns="0" bIns="0" anchor="ctr">
+            <a:spAutoFit/>
+          </a:bodyPr>
+          <a:lstStyle/>
+          <a:p>
+            <a:pPr algn="ctr"/>
+            <a:r>
+              <a:rPr sz="950" b="0">
+                <a:solidFill>
+                  <a:srgbClr val="64748B"/>
+                </a:solidFill>
+                <a:latin typeface="Calibri"/>
+              </a:rPr>
+              <a:t>user_agent node</a:t>
+            </a:r>
+          </a:p>
+        </p:txBody>
+      </p:sp>
+      <p:cxnSp>
+        <p:nvCxnSpPr>
+          <p:cNvPr id="20" name="Arrow"/>
+          <p:cNvCxnSpPr/>
+          <p:nvPr/>
+        </p:nvCxnSpPr>
+        <p:spPr>
+          <a:xfrm>
+            <a:off x="8668512" y="2240280"/>
+            <a:ext cx="795528" cy="0"/>
+          </a:xfrm>
+          <a:prstGeom prst="line">
+            <a:avLst/>
+          </a:prstGeom>
+          <a:ln w="19050">
+            <a:solidFill>
+              <a:srgbClr val="64748B"/>
+            </a:solidFill>
+            <a:tailEnd type="triangle" w="med" len="med"/>
+          </a:ln>
+        </p:spPr>
+        <p:style>
+          <a:lnRef idx="2">
+            <a:schemeClr val="accent1"/>
+          </a:lnRef>
+          <a:fillRef idx="0">
+            <a:schemeClr val="accent1"/>
+          </a:fillRef>
+          <a:effectRef idx="1">
+            <a:schemeClr val="accent1"/>
+          </a:effectRef>
+          <a:fontRef idx="minor">
+            <a:schemeClr val="tx1"/>
+          </a:fontRef>
+        </p:style>
+      </p:cxnSp>
+      <p:sp>
+        <p:nvSpPr>
+          <p:cNvPr id="21" name="TextBox 20"/>
+          <p:cNvSpPr txBox="1"/>
+          <p:nvPr/>
+        </p:nvSpPr>
+        <p:spPr>
+          <a:xfrm>
+            <a:off x="8668511" y="1801368"/>
+            <a:ext cx="795528" cy="274320"/>
+          </a:xfrm>
+          <a:prstGeom prst="rect">
+            <a:avLst/>
+          </a:prstGeom>
+          <a:noFill/>
+        </p:spPr>
+        <p:txBody>
+          <a:bodyPr wrap="square" lIns="0" rIns="0" tIns="0" bIns="0" anchor="ctr">
+            <a:spAutoFit/>
+          </a:bodyPr>
+          <a:lstStyle/>
+          <a:p>
+            <a:pPr algn="ctr"/>
+            <a:r>
+              <a:rPr sz="950" b="0">
+                <a:solidFill>
+                  <a:srgbClr val="64748B"/>
+                </a:solidFill>
+                <a:latin typeface="Calibri"/>
+              </a:rPr>
+              <a:t>redacts PII</a:t>
+            </a:r>
+          </a:p>
+        </p:txBody>
+      </p:sp>
+      <p:cxnSp>
+        <p:nvCxnSpPr>
+          <p:cNvPr id="22" name="Arrow"/>
+          <p:cNvCxnSpPr/>
+          <p:nvPr/>
+        </p:nvCxnSpPr>
+        <p:spPr>
+          <a:xfrm>
+            <a:off x="4608576" y="2697480"/>
+            <a:ext cx="0" cy="594360"/>
+          </a:xfrm>
+          <a:prstGeom prst="line">
+            <a:avLst/>
+          </a:prstGeom>
+          <a:ln w="19050">
+            <a:solidFill>
+              <a:srgbClr val="64748B"/>
+            </a:solidFill>
+            <a:tailEnd type="triangle" w="med" len="med"/>
+          </a:ln>
+        </p:spPr>
+        <p:style>
+          <a:lnRef idx="2">
+            <a:schemeClr val="accent1"/>
+          </a:lnRef>
+          <a:fillRef idx="0">
+            <a:schemeClr val="accent1"/>
+          </a:fillRef>
+          <a:effectRef idx="1">
+            <a:schemeClr val="accent1"/>
+          </a:effectRef>
+          <a:fontRef idx="minor">
+            <a:schemeClr val="tx1"/>
+          </a:fontRef>
+        </p:style>
+      </p:cxnSp>
+      <p:sp>
+        <p:nvSpPr>
+          <p:cNvPr id="23" name="TextBox 22"/>
+          <p:cNvSpPr txBox="1"/>
+          <p:nvPr/>
+        </p:nvSpPr>
+        <p:spPr>
+          <a:xfrm>
+            <a:off x="4105656" y="2848356"/>
+            <a:ext cx="2011680" cy="274320"/>
+          </a:xfrm>
+          <a:prstGeom prst="rect">
+            <a:avLst/>
+          </a:prstGeom>
+          <a:noFill/>
+        </p:spPr>
+        <p:txBody>
+          <a:bodyPr wrap="square" lIns="0" rIns="0" tIns="0" bIns="0" anchor="ctr">
+            <a:spAutoFit/>
+          </a:bodyPr>
+          <a:lstStyle/>
+          <a:p>
+            <a:pPr algn="ctr"/>
+            <a:r>
+              <a:rPr sz="950" b="0">
+                <a:solidFill>
+                  <a:srgbClr val="64748B"/>
+                </a:solidFill>
+                <a:latin typeface="Calibri"/>
+              </a:rPr>
+              <a:t>admin node</a:t>
+            </a:r>
+          </a:p>
+        </p:txBody>
+      </p:sp>
+      <p:cxnSp>
+        <p:nvCxnSpPr>
+          <p:cNvPr id="24" name="Arrow"/>
+          <p:cNvCxnSpPr/>
+          <p:nvPr/>
+        </p:nvCxnSpPr>
+        <p:spPr>
+          <a:xfrm>
+            <a:off x="7580375" y="2697480"/>
+            <a:ext cx="0" cy="594360"/>
+          </a:xfrm>
+          <a:prstGeom prst="line">
+            <a:avLst/>
+          </a:prstGeom>
+          <a:ln w="19050">
+            <a:solidFill>
+              <a:srgbClr val="64748B"/>
+            </a:solidFill>
+            <a:tailEnd type="triangle" w="med" len="med"/>
+          </a:ln>
+        </p:spPr>
+        <p:style>
+          <a:lnRef idx="2">
+            <a:schemeClr val="accent1"/>
+          </a:lnRef>
+          <a:fillRef idx="0">
+            <a:schemeClr val="accent1"/>
+          </a:fillRef>
+          <a:effectRef idx="1">
+            <a:schemeClr val="accent1"/>
+          </a:effectRef>
+          <a:fontRef idx="minor">
+            <a:schemeClr val="tx1"/>
+          </a:fontRef>
+        </p:style>
+      </p:cxnSp>
+      <p:sp>
+        <p:nvSpPr>
+          <p:cNvPr id="25" name="TextBox 24"/>
+          <p:cNvSpPr txBox="1"/>
+          <p:nvPr/>
+        </p:nvSpPr>
+        <p:spPr>
+          <a:xfrm>
+            <a:off x="6894575" y="2848356"/>
+            <a:ext cx="2011680" cy="274320"/>
+          </a:xfrm>
+          <a:prstGeom prst="rect">
+            <a:avLst/>
+          </a:prstGeom>
+          <a:noFill/>
+        </p:spPr>
+        <p:txBody>
+          <a:bodyPr wrap="square" lIns="0" rIns="0" tIns="0" bIns="0" anchor="ctr">
+            <a:spAutoFit/>
+          </a:bodyPr>
+          <a:lstStyle/>
+          <a:p>
+            <a:pPr algn="ctr"/>
+            <a:r>
+              <a:rPr sz="950" b="0">
+                <a:solidFill>
+                  <a:srgbClr val="64748B"/>
+                </a:solidFill>
+                <a:latin typeface="Calibri"/>
+              </a:rPr>
+              <a:t>calls</a:t>
+            </a:r>
+          </a:p>
+        </p:txBody>
+      </p:sp>
+      <p:cxnSp>
+        <p:nvCxnSpPr>
+          <p:cNvPr id="26" name="Arrow"/>
+          <p:cNvCxnSpPr/>
+          <p:nvPr/>
+        </p:nvCxnSpPr>
+        <p:spPr>
+          <a:xfrm>
+            <a:off x="4608576" y="4206240"/>
+            <a:ext cx="0" cy="640080"/>
+          </a:xfrm>
+          <a:prstGeom prst="line">
+            <a:avLst/>
+          </a:prstGeom>
+          <a:ln w="19050">
+            <a:solidFill>
+              <a:srgbClr val="64748B"/>
+            </a:solidFill>
+            <a:tailEnd type="triangle" w="med" len="med"/>
+          </a:ln>
+        </p:spPr>
+        <p:style>
+          <a:lnRef idx="2">
+            <a:schemeClr val="accent1"/>
+          </a:lnRef>
+          <a:fillRef idx="0">
+            <a:schemeClr val="accent1"/>
+          </a:fillRef>
+          <a:effectRef idx="1">
+            <a:schemeClr val="accent1"/>
+          </a:effectRef>
+          <a:fontRef idx="minor">
+            <a:schemeClr val="tx1"/>
+          </a:fontRef>
+        </p:style>
+      </p:cxnSp>
+      <p:sp>
+        <p:nvSpPr>
+          <p:cNvPr id="27" name="TextBox 26"/>
+          <p:cNvSpPr txBox="1"/>
+          <p:nvPr/>
+        </p:nvSpPr>
+        <p:spPr>
+          <a:xfrm>
+            <a:off x="4151375" y="4379975"/>
+            <a:ext cx="2011680" cy="274320"/>
+          </a:xfrm>
+          <a:prstGeom prst="rect">
+            <a:avLst/>
+          </a:prstGeom>
+          <a:noFill/>
+        </p:spPr>
+        <p:txBody>
+          <a:bodyPr wrap="square" lIns="0" rIns="0" tIns="0" bIns="0" anchor="ctr">
+            <a:spAutoFit/>
+          </a:bodyPr>
+          <a:lstStyle/>
+          <a:p>
+            <a:pPr algn="ctr"/>
+            <a:r>
+              <a:rPr sz="950" b="0">
+                <a:solidFill>
+                  <a:srgbClr val="64748B"/>
+                </a:solidFill>
+                <a:latin typeface="Calibri"/>
+              </a:rPr>
+              <a:t>record node</a:t>
+            </a:r>
+          </a:p>
+        </p:txBody>
+      </p:sp>
+      <p:cxnSp>
+        <p:nvCxnSpPr>
+          <p:cNvPr id="28" name="Arrow"/>
+          <p:cNvCxnSpPr/>
+          <p:nvPr/>
+        </p:nvCxnSpPr>
+        <p:spPr>
+          <a:xfrm flipH="1">
+            <a:off x="5696712" y="4206240"/>
+            <a:ext cx="795528" cy="640080"/>
+          </a:xfrm>
+          <a:prstGeom prst="line">
+            <a:avLst/>
+          </a:prstGeom>
+          <a:ln w="19050">
+            <a:solidFill>
+              <a:srgbClr val="64748B"/>
+            </a:solidFill>
+            <a:tailEnd type="triangle" w="med" len="med"/>
+          </a:ln>
+        </p:spPr>
+        <p:style>
+          <a:lnRef idx="2">
+            <a:schemeClr val="accent1"/>
+          </a:lnRef>
+          <a:fillRef idx="0">
+            <a:schemeClr val="accent1"/>
+          </a:fillRef>
+          <a:effectRef idx="1">
+            <a:schemeClr val="accent1"/>
+          </a:effectRef>
+          <a:fontRef idx="minor">
+            <a:schemeClr val="tx1"/>
+          </a:fontRef>
+        </p:style>
+      </p:cxnSp>
+      <p:sp>
+        <p:nvSpPr>
+          <p:cNvPr id="29" name="TextBox 28"/>
+          <p:cNvSpPr txBox="1"/>
+          <p:nvPr/>
+        </p:nvSpPr>
+        <p:spPr>
+          <a:xfrm>
+            <a:off x="6510527" y="4315968"/>
+            <a:ext cx="1463040" cy="457200"/>
+          </a:xfrm>
+          <a:prstGeom prst="rect">
+            <a:avLst/>
+          </a:prstGeom>
+          <a:noFill/>
+        </p:spPr>
+        <p:txBody>
+          <a:bodyPr wrap="square" lIns="0" rIns="0" tIns="0" bIns="0" anchor="t">
+            <a:spAutoFit/>
+          </a:bodyPr>
+          <a:lstStyle/>
+          <a:p>
+            <a:r>
+              <a:rPr sz="950" b="0">
+                <a:solidFill>
+                  <a:srgbClr val="64748B"/>
+                </a:solidFill>
+                <a:latin typeface="Calibri"/>
+              </a:rPr>
+              <a:t>ChatContext
+.parking_service</a:t>
+            </a:r>
+          </a:p>
+        </p:txBody>
+      </p:sp>
+      <p:cxnSp>
+        <p:nvCxnSpPr>
+          <p:cNvPr id="30" name="Arrow"/>
+          <p:cNvCxnSpPr/>
+          <p:nvPr/>
+        </p:nvCxnSpPr>
+        <p:spPr>
+          <a:xfrm>
+            <a:off x="8668512" y="4206240"/>
+            <a:ext cx="795528" cy="640080"/>
+          </a:xfrm>
+          <a:prstGeom prst="line">
+            <a:avLst/>
+          </a:prstGeom>
+          <a:ln w="19050">
+            <a:solidFill>
+              <a:srgbClr val="64748B"/>
+            </a:solidFill>
+            <a:tailEnd type="triangle" w="med" len="med"/>
+          </a:ln>
+        </p:spPr>
+        <p:style>
+          <a:lnRef idx="2">
+            <a:schemeClr val="accent1"/>
+          </a:lnRef>
+          <a:fillRef idx="0">
+            <a:schemeClr val="accent1"/>
+          </a:fillRef>
+          <a:effectRef idx="1">
+            <a:schemeClr val="accent1"/>
+          </a:effectRef>
+          <a:fontRef idx="minor">
+            <a:schemeClr val="tx1"/>
+          </a:fontRef>
+        </p:style>
+      </p:cxnSp>
+      <p:sp>
+        <p:nvSpPr>
+          <p:cNvPr id="31" name="TextBox 30"/>
+          <p:cNvSpPr txBox="1"/>
+          <p:nvPr/>
+        </p:nvSpPr>
+        <p:spPr>
+          <a:xfrm>
+            <a:off x="8563356" y="4334255"/>
+            <a:ext cx="2011680" cy="274320"/>
+          </a:xfrm>
+          <a:prstGeom prst="rect">
+            <a:avLst/>
+          </a:prstGeom>
+          <a:noFill/>
+        </p:spPr>
+        <p:txBody>
+          <a:bodyPr wrap="square" lIns="0" rIns="0" tIns="0" bIns="0" anchor="ctr">
+            <a:spAutoFit/>
+          </a:bodyPr>
+          <a:lstStyle/>
+          <a:p>
+            <a:pPr algn="ctr"/>
+            <a:r>
+              <a:rPr sz="950" b="0">
+                <a:solidFill>
+                  <a:srgbClr val="64748B"/>
+                </a:solidFill>
+                <a:latin typeface="Calibri"/>
+              </a:rPr>
+              <a:t>vector search</a:t>
+            </a:r>
+          </a:p>
+        </p:txBody>
+      </p:sp>
+      <p:cxnSp>
+        <p:nvCxnSpPr>
+          <p:cNvPr id="32" name="Arrow"/>
+          <p:cNvCxnSpPr/>
+          <p:nvPr/>
+        </p:nvCxnSpPr>
+        <p:spPr>
+          <a:xfrm>
+            <a:off x="5696712" y="5303520"/>
+            <a:ext cx="795528" cy="0"/>
+          </a:xfrm>
+          <a:prstGeom prst="line">
+            <a:avLst/>
+          </a:prstGeom>
+          <a:ln w="19050">
+            <a:solidFill>
+              <a:srgbClr val="64748B"/>
+            </a:solidFill>
+            <a:tailEnd type="triangle" w="med" len="med"/>
+          </a:ln>
+        </p:spPr>
+        <p:style>
+          <a:lnRef idx="2">
+            <a:schemeClr val="accent1"/>
+          </a:lnRef>
+          <a:fillRef idx="0">
+            <a:schemeClr val="accent1"/>
+          </a:fillRef>
+          <a:effectRef idx="1">
+            <a:schemeClr val="accent1"/>
+          </a:effectRef>
+          <a:fontRef idx="minor">
+            <a:schemeClr val="tx1"/>
+          </a:fontRef>
+        </p:style>
+      </p:cxnSp>
+      <p:sp>
+        <p:nvSpPr>
+          <p:cNvPr id="33" name="TextBox 32"/>
+          <p:cNvSpPr txBox="1"/>
+          <p:nvPr/>
+        </p:nvSpPr>
+        <p:spPr>
+          <a:xfrm>
+            <a:off x="5696712" y="4864607"/>
+            <a:ext cx="795528" cy="274320"/>
+          </a:xfrm>
+          <a:prstGeom prst="rect">
+            <a:avLst/>
+          </a:prstGeom>
+          <a:noFill/>
+        </p:spPr>
+        <p:txBody>
+          <a:bodyPr wrap="square" lIns="0" rIns="0" tIns="0" bIns="0" anchor="ctr">
+            <a:spAutoFit/>
+          </a:bodyPr>
+          <a:lstStyle/>
+          <a:p>
+            <a:pPr algn="ctr"/>
+            <a:r>
+              <a:rPr sz="950" b="0">
+                <a:solidFill>
+                  <a:srgbClr val="64748B"/>
+                </a:solidFill>
+                <a:latin typeface="Calibri"/>
+              </a:rPr>
+              <a:t>reads / writes</a:t>
+            </a:r>
+          </a:p>
+        </p:txBody>
+      </p:sp>
+      <p:cxnSp>
+        <p:nvCxnSpPr>
+          <p:cNvPr id="34" name="Arrow"/>
+          <p:cNvCxnSpPr/>
+          <p:nvPr/>
+        </p:nvCxnSpPr>
+        <p:spPr>
+          <a:xfrm flipH="1">
+            <a:off x="2724912" y="5303520"/>
+            <a:ext cx="795528" cy="0"/>
+          </a:xfrm>
+          <a:prstGeom prst="line">
+            <a:avLst/>
+          </a:prstGeom>
+          <a:ln w="19050">
+            <a:solidFill>
+              <a:srgbClr val="64748B"/>
+            </a:solidFill>
+            <a:tailEnd type="triangle" w="med" len="med"/>
+          </a:ln>
+        </p:spPr>
+        <p:style>
+          <a:lnRef idx="2">
+            <a:schemeClr val="accent1"/>
+          </a:lnRef>
+          <a:fillRef idx="0">
+            <a:schemeClr val="accent1"/>
+          </a:fillRef>
+          <a:effectRef idx="1">
+            <a:schemeClr val="accent1"/>
+          </a:effectRef>
+          <a:fontRef idx="minor">
+            <a:schemeClr val="tx1"/>
+          </a:fontRef>
+        </p:style>
+      </p:cxnSp>
+      <p:sp>
+        <p:nvSpPr>
+          <p:cNvPr id="35" name="TextBox 34"/>
+          <p:cNvSpPr txBox="1"/>
+          <p:nvPr/>
+        </p:nvSpPr>
+        <p:spPr>
+          <a:xfrm>
+            <a:off x="2724912" y="4864607"/>
+            <a:ext cx="795528" cy="274320"/>
+          </a:xfrm>
+          <a:prstGeom prst="rect">
+            <a:avLst/>
+          </a:prstGeom>
+          <a:noFill/>
+        </p:spPr>
+        <p:txBody>
+          <a:bodyPr wrap="square" lIns="0" rIns="0" tIns="0" bIns="0" anchor="ctr">
+            <a:spAutoFit/>
+          </a:bodyPr>
+          <a:lstStyle/>
+          <a:p>
+            <a:pPr algn="ctr"/>
+            <a:r>
+              <a:rPr sz="950" b="0">
+                <a:solidFill>
+                  <a:srgbClr val="64748B"/>
+                </a:solidFill>
+                <a:latin typeface="Calibri"/>
+              </a:rPr>
+              <a:t>MCP client</a:t>
+            </a:r>
+          </a:p>
+        </p:txBody>
+      </p:sp>
+      <p:sp>
+        <p:nvSpPr>
+          <p:cNvPr id="36" name="TextBox 35"/>
+          <p:cNvSpPr txBox="1"/>
+          <p:nvPr/>
+        </p:nvSpPr>
+        <p:spPr>
+          <a:xfrm>
+            <a:off x="9464040" y="3337560"/>
+            <a:ext cx="2176272" cy="914400"/>
+          </a:xfrm>
+          <a:prstGeom prst="rect">
+            <a:avLst/>
+          </a:prstGeom>
+          <a:noFill/>
+        </p:spPr>
+        <p:txBody>
+          <a:bodyPr wrap="square" lIns="0" rIns="0" tIns="0" bIns="0" anchor="t">
+            <a:spAutoFit/>
+          </a:bodyPr>
+          <a:lstStyle/>
+          <a:p>
+            <a:r>
+              <a:rPr sz="950" b="0">
+                <a:solidFill>
+                  <a:srgbClr val="64748B"/>
+                </a:solidFill>
+                <a:latin typeface="Calibri"/>
+              </a:rPr>
+              <a:t>Blue: the two classes everything goes through. Arrows: “calls / uses”. ParkingService is created per request, ParkingGraph once at startup.</a:t>
+            </a:r>
+          </a:p>
+        </p:txBody>
+      </p:sp>
+    </p:spTree>
+  </p:cSld>
+  <p:clrMapOvr>
+    <a:masterClrMapping/>
+  </p:clrMapOvr>
+</p:sld>
+</file>
+
+<file path=ppt/slides/slide23.xml><?xml version="1.0" encoding="utf-8"?>
+<p:sld xmlns:a="http://schemas.openxmlformats.org/drawingml/2006/main" xmlns:p="http://schemas.openxmlformats.org/presentationml/2006/main" xmlns:r="http://schemas.openxmlformats.org/officeDocument/2006/relationships">
+  <p:cSld>
+    <p:spTree>
+      <p:nvGrpSpPr>
+        <p:cNvPr id="1" name=""/>
+        <p:cNvGrpSpPr/>
+        <p:nvPr/>
+      </p:nvGrpSpPr>
+      <p:grpSpPr/>
+      <p:sp>
+        <p:nvSpPr>
+          <p:cNvPr id="2" name="Kicker"/>
+          <p:cNvSpPr txBox="1"/>
+          <p:nvPr/>
+        </p:nvSpPr>
+        <p:spPr>
+          <a:xfrm>
+            <a:off x="548640" y="457200"/>
+            <a:ext cx="9144000" cy="320040"/>
+          </a:xfrm>
+          <a:prstGeom prst="rect">
+            <a:avLst/>
+          </a:prstGeom>
+          <a:noFill/>
+        </p:spPr>
+        <p:txBody>
+          <a:bodyPr wrap="square" lIns="0" rIns="0" tIns="0" bIns="0" anchor="t">
+            <a:spAutoFit/>
+          </a:bodyPr>
+          <a:lstStyle/>
+          <a:p>
+            <a:r>
+              <a:rPr sz="1200" b="1" spc="200">
+                <a:solidFill>
+                  <a:schemeClr val="accent1"/>
+                </a:solidFill>
+                <a:latin typeface="Calibri"/>
+              </a:rPr>
+              <a:t>ARCHITECTURE — CLASS RELATIONS</a:t>
+            </a:r>
+          </a:p>
+        </p:txBody>
+      </p:sp>
+      <p:sp>
+        <p:nvSpPr>
+          <p:cNvPr id="3" name="Title"/>
+          <p:cNvSpPr txBox="1"/>
+          <p:nvPr/>
+        </p:nvSpPr>
+        <p:spPr>
+          <a:xfrm>
+            <a:off x="548640" y="777240"/>
+            <a:ext cx="11091672" cy="731520"/>
+          </a:xfrm>
+          <a:prstGeom prst="rect">
+            <a:avLst/>
+          </a:prstGeom>
+          <a:noFill/>
+        </p:spPr>
+        <p:txBody>
+          <a:bodyPr wrap="square" lIns="0" rIns="0" tIns="0" bIns="0" anchor="t">
+            <a:spAutoFit/>
+          </a:bodyPr>
+          <a:lstStyle/>
+          <a:p>
+            <a:r>
+              <a:rPr sz="3000" b="1">
+                <a:solidFill>
+                  <a:schemeClr val="tx1"/>
+                </a:solidFill>
+                <a:latin typeface="Cambria"/>
+              </a:rPr>
+              <a:t>Repositories and the data model</a:t>
+            </a:r>
+          </a:p>
+        </p:txBody>
+      </p:sp>
+      <p:sp>
+        <p:nvSpPr>
+          <p:cNvPr id="4" name="Footer"/>
+          <p:cNvSpPr txBox="1"/>
+          <p:nvPr/>
+        </p:nvSpPr>
+        <p:spPr>
+          <a:xfrm>
+            <a:off x="548640" y="6473952"/>
+            <a:ext cx="6400800" cy="274320"/>
+          </a:xfrm>
+          <a:prstGeom prst="rect">
+            <a:avLst/>
+          </a:prstGeom>
+          <a:noFill/>
+        </p:spPr>
+        <p:txBody>
+          <a:bodyPr wrap="square" lIns="0" rIns="0" tIns="0" bIns="0" anchor="t">
+            <a:spAutoFit/>
+          </a:bodyPr>
+          <a:lstStyle/>
+          <a:p>
+            <a:r>
+              <a:rPr sz="1000" b="0">
+                <a:solidFill>
+                  <a:schemeClr val="tx2"/>
+                </a:solidFill>
+                <a:latin typeface="Calibri"/>
+              </a:rPr>
+              <a:t>app/db/repositories/*.py · app/db/models/*.py</a:t>
+            </a:r>
+          </a:p>
+        </p:txBody>
+      </p:sp>
+      <p:sp>
+        <p:nvSpPr>
+          <p:cNvPr id="5" name="Footer brand"/>
+          <p:cNvSpPr txBox="1"/>
+          <p:nvPr/>
+        </p:nvSpPr>
+        <p:spPr>
+          <a:xfrm>
+            <a:off x="8897112" y="6473952"/>
+            <a:ext cx="2743200" cy="274320"/>
+          </a:xfrm>
+          <a:prstGeom prst="rect">
+            <a:avLst/>
+          </a:prstGeom>
+          <a:noFill/>
+        </p:spPr>
+        <p:txBody>
+          <a:bodyPr wrap="square" lIns="0" rIns="0" tIns="0" bIns="0" anchor="t">
+            <a:spAutoFit/>
+          </a:bodyPr>
+          <a:lstStyle/>
+          <a:p>
+            <a:pPr algn="r"/>
+            <a:r>
+              <a:rPr sz="1000" b="0">
+                <a:solidFill>
+                  <a:schemeClr val="tx2"/>
+                </a:solidFill>
+                <a:latin typeface="Calibri"/>
+              </a:rPr>
+              <a:t>VilniusPark Chatbot</a:t>
+            </a:r>
+          </a:p>
+        </p:txBody>
+      </p:sp>
+      <p:sp>
+        <p:nvSpPr>
+          <p:cNvPr id="6" name="TextBox 5"/>
+          <p:cNvSpPr txBox="1"/>
+          <p:nvPr/>
+        </p:nvSpPr>
+        <p:spPr>
+          <a:xfrm>
+            <a:off x="548640" y="1554480"/>
+            <a:ext cx="5303520" cy="274320"/>
+          </a:xfrm>
+          <a:prstGeom prst="rect">
+            <a:avLst/>
+          </a:prstGeom>
+          <a:noFill/>
+        </p:spPr>
+        <p:txBody>
+          <a:bodyPr wrap="square" lIns="0" rIns="0" tIns="0" bIns="0" anchor="t">
+            <a:spAutoFit/>
+          </a:bodyPr>
+          <a:lstStyle/>
+          <a:p>
+            <a:r>
+              <a:rPr sz="1100" b="1">
+                <a:solidFill>
+                  <a:srgbClr val="64748B"/>
+                </a:solidFill>
+                <a:latin typeface="Calibri"/>
+              </a:rPr>
+              <a:t>Repositories — arrows point to the parent class</a:t>
+            </a:r>
+          </a:p>
+        </p:txBody>
+      </p:sp>
+      <p:sp>
+        <p:nvSpPr>
+          <p:cNvPr id="7" name="Class AbstractSQLRepository"/>
+          <p:cNvSpPr/>
+          <p:nvPr/>
+        </p:nvSpPr>
+        <p:spPr>
+          <a:xfrm>
+            <a:off x="548640" y="1920240"/>
+            <a:ext cx="2514600" cy="777240"/>
+          </a:xfrm>
+          <a:prstGeom prst="roundRect">
+            <a:avLst>
+              <a:gd name="adj" fmla="val 8000"/>
+            </a:avLst>
+          </a:prstGeom>
+          <a:solidFill>
+            <a:srgbClr val="EFF6FF"/>
+          </a:solidFill>
+          <a:ln w="12700">
+            <a:solidFill>
+              <a:srgbClr val="DBE4EF"/>
+            </a:solidFill>
+          </a:ln>
+        </p:spPr>
+        <p:style>
+          <a:lnRef idx="1">
+            <a:schemeClr val="accent1"/>
+          </a:lnRef>
+          <a:fillRef idx="3">
+            <a:schemeClr val="accent1"/>
+          </a:fillRef>
+          <a:effectRef idx="2">
+            <a:schemeClr val="accent1"/>
+          </a:effectRef>
+          <a:fontRef idx="minor">
+            <a:schemeClr val="lt1"/>
+          </a:fontRef>
+        </p:style>
+        <p:txBody>
+          <a:bodyPr rtlCol="0" anchor="ctr" wrap="square" lIns="73152" rIns="73152" tIns="36576" bIns="36576"/>
+          <a:lstStyle/>
+          <a:p>
+            <a:pPr algn="ctr"/>
+            <a:r>
+              <a:rPr sz="1250" b="1">
+                <a:solidFill>
+                  <a:srgbClr val="132257"/>
+                </a:solidFill>
+                <a:latin typeface="Courier New"/>
+              </a:rPr>
+              <a:t>AbstractSQLRepository</a:t>
+            </a:r>
+          </a:p>
+          <a:p>
+            <a:pPr algn="ctr"/>
+            <a:r>
+              <a:rPr sz="950" b="0">
+                <a:solidFill>
+                  <a:srgbClr val="64748B"/>
+                </a:solidFill>
+                <a:latin typeface="Calibri"/>
+              </a:rPr>
+              <a:t>generic CRUD interface</a:t>
+            </a:r>
+          </a:p>
+        </p:txBody>
+      </p:sp>
+      <p:sp>
+        <p:nvSpPr>
+          <p:cNvPr id="8" name="Class SQLAlchemyRepository"/>
+          <p:cNvSpPr/>
+          <p:nvPr/>
+        </p:nvSpPr>
+        <p:spPr>
+          <a:xfrm>
+            <a:off x="548640" y="2971800"/>
+            <a:ext cx="2514600" cy="777240"/>
+          </a:xfrm>
+          <a:prstGeom prst="roundRect">
+            <a:avLst>
+              <a:gd name="adj" fmla="val 8000"/>
+            </a:avLst>
+          </a:prstGeom>
+          <a:solidFill>
+            <a:srgbClr val="EFF6FF"/>
+          </a:solidFill>
+          <a:ln w="12700">
+            <a:solidFill>
+              <a:srgbClr val="DBE4EF"/>
+            </a:solidFill>
+          </a:ln>
+        </p:spPr>
+        <p:style>
+          <a:lnRef idx="1">
+            <a:schemeClr val="accent1"/>
+          </a:lnRef>
+          <a:fillRef idx="3">
+            <a:schemeClr val="accent1"/>
+          </a:fillRef>
+          <a:effectRef idx="2">
+            <a:schemeClr val="accent1"/>
+          </a:effectRef>
+          <a:fontRef idx="minor">
+            <a:schemeClr val="lt1"/>
+          </a:fontRef>
+        </p:style>
+        <p:txBody>
+          <a:bodyPr rtlCol="0" anchor="ctr" wrap="square" lIns="73152" rIns="73152" tIns="36576" bIns="36576"/>
+          <a:lstStyle/>
+          <a:p>
+            <a:pPr algn="ctr"/>
+            <a:r>
+              <a:rPr sz="1250" b="1">
+                <a:solidFill>
+                  <a:srgbClr val="132257"/>
+                </a:solidFill>
+                <a:latin typeface="Courier New"/>
+              </a:rPr>
+              <a:t>SQLAlchemyRepository</a:t>
+            </a:r>
+          </a:p>
+          <a:p>
+            <a:pPr algn="ctr"/>
+            <a:r>
+              <a:rPr sz="950" b="0">
+                <a:solidFill>
+                  <a:srgbClr val="64748B"/>
+                </a:solidFill>
+                <a:latin typeface="Calibri"/>
+              </a:rPr>
+              <a:t>async session CRUD</a:t>
+            </a:r>
+          </a:p>
+        </p:txBody>
+      </p:sp>
+      <p:sp>
+        <p:nvSpPr>
+          <p:cNvPr id="9" name="Class PostgresRepository"/>
+          <p:cNvSpPr/>
+          <p:nvPr/>
+        </p:nvSpPr>
+        <p:spPr>
+          <a:xfrm>
+            <a:off x="548640" y="4023360"/>
+            <a:ext cx="2514600" cy="777240"/>
+          </a:xfrm>
+          <a:prstGeom prst="roundRect">
+            <a:avLst>
+              <a:gd name="adj" fmla="val 8000"/>
+            </a:avLst>
+          </a:prstGeom>
+          <a:solidFill>
+            <a:srgbClr val="EFF6FF"/>
+          </a:solidFill>
+          <a:ln w="12700">
+            <a:solidFill>
+              <a:srgbClr val="DBE4EF"/>
+            </a:solidFill>
+          </a:ln>
+        </p:spPr>
+        <p:style>
+          <a:lnRef idx="1">
+            <a:schemeClr val="accent1"/>
+          </a:lnRef>
+          <a:fillRef idx="3">
+            <a:schemeClr val="accent1"/>
+          </a:fillRef>
+          <a:effectRef idx="2">
+            <a:schemeClr val="accent1"/>
+          </a:effectRef>
+          <a:fontRef idx="minor">
+            <a:schemeClr val="lt1"/>
+          </a:fontRef>
+        </p:style>
+        <p:txBody>
+          <a:bodyPr rtlCol="0" anchor="ctr" wrap="square" lIns="73152" rIns="73152" tIns="36576" bIns="36576"/>
+          <a:lstStyle/>
+          <a:p>
+            <a:pPr algn="ctr"/>
+            <a:r>
+              <a:rPr sz="1250" b="1">
+                <a:solidFill>
+                  <a:srgbClr val="132257"/>
+                </a:solidFill>
+                <a:latin typeface="Courier New"/>
+              </a:rPr>
+              <a:t>PostgresRepository</a:t>
+            </a:r>
+          </a:p>
+          <a:p>
+            <a:pPr algn="ctr"/>
+            <a:r>
+              <a:rPr sz="950" b="0">
+                <a:solidFill>
+                  <a:srgbClr val="64748B"/>
+                </a:solidFill>
+                <a:latin typeface="Calibri"/>
+              </a:rPr>
+              <a:t>row locks · upserts</a:t>
+            </a:r>
+          </a:p>
+        </p:txBody>
+      </p:sp>
+      <p:sp>
+        <p:nvSpPr>
+          <p:cNvPr id="10" name="Class ParkingRepository"/>
+          <p:cNvSpPr/>
+          <p:nvPr/>
+        </p:nvSpPr>
+        <p:spPr>
+          <a:xfrm>
+            <a:off x="548640" y="5120640"/>
+            <a:ext cx="2514600" cy="777240"/>
+          </a:xfrm>
+          <a:prstGeom prst="roundRect">
+            <a:avLst>
+              <a:gd name="adj" fmla="val 8000"/>
+            </a:avLst>
+          </a:prstGeom>
+          <a:solidFill>
+            <a:srgbClr val="2563EB"/>
+          </a:solidFill>
+          <a:ln w="12700">
+            <a:solidFill>
+              <a:srgbClr val="2563EB"/>
+            </a:solidFill>
+          </a:ln>
+        </p:spPr>
+        <p:style>
+          <a:lnRef idx="1">
+            <a:schemeClr val="accent1"/>
+          </a:lnRef>
+          <a:fillRef idx="3">
+            <a:schemeClr val="accent1"/>
+          </a:fillRef>
+          <a:effectRef idx="2">
+            <a:schemeClr val="accent1"/>
+          </a:effectRef>
+          <a:fontRef idx="minor">
+            <a:schemeClr val="lt1"/>
+          </a:fontRef>
+        </p:style>
+        <p:txBody>
+          <a:bodyPr rtlCol="0" anchor="ctr" wrap="square" lIns="73152" rIns="73152" tIns="36576" bIns="36576"/>
+          <a:lstStyle/>
+          <a:p>
+            <a:pPr algn="ctr"/>
+            <a:r>
+              <a:rPr sz="1250" b="1">
+                <a:solidFill>
+                  <a:srgbClr val="FFFFFF"/>
+                </a:solidFill>
+                <a:latin typeface="Courier New"/>
+              </a:rPr>
+              <a:t>ParkingRepository</a:t>
+            </a:r>
+          </a:p>
+          <a:p>
+            <a:pPr algn="ctr"/>
+            <a:r>
+              <a:rPr sz="950" b="0">
+                <a:solidFill>
+                  <a:srgbClr val="EFF6FF"/>
+                </a:solidFill>
+                <a:latin typeface="Calibri"/>
+              </a:rPr>
+              <a:t>hours · prices · availability</a:t>
+            </a:r>
+          </a:p>
+        </p:txBody>
+      </p:sp>
+      <p:sp>
+        <p:nvSpPr>
+          <p:cNvPr id="11" name="Class ReservationRepository"/>
+          <p:cNvSpPr/>
+          <p:nvPr/>
+        </p:nvSpPr>
+        <p:spPr>
+          <a:xfrm>
+            <a:off x="3291840" y="5120640"/>
+            <a:ext cx="2514600" cy="777240"/>
+          </a:xfrm>
+          <a:prstGeom prst="roundRect">
+            <a:avLst>
+              <a:gd name="adj" fmla="val 8000"/>
+            </a:avLst>
+          </a:prstGeom>
+          <a:solidFill>
+            <a:srgbClr val="2563EB"/>
+          </a:solidFill>
+          <a:ln w="12700">
+            <a:solidFill>
+              <a:srgbClr val="2563EB"/>
+            </a:solidFill>
+          </a:ln>
+        </p:spPr>
+        <p:style>
+          <a:lnRef idx="1">
+            <a:schemeClr val="accent1"/>
+          </a:lnRef>
+          <a:fillRef idx="3">
+            <a:schemeClr val="accent1"/>
+          </a:fillRef>
+          <a:effectRef idx="2">
+            <a:schemeClr val="accent1"/>
+          </a:effectRef>
+          <a:fontRef idx="minor">
+            <a:schemeClr val="lt1"/>
+          </a:fontRef>
+        </p:style>
+        <p:txBody>
+          <a:bodyPr rtlCol="0" anchor="ctr" wrap="square" lIns="73152" rIns="73152" tIns="36576" bIns="36576"/>
+          <a:lstStyle/>
+          <a:p>
+            <a:pPr algn="ctr"/>
+            <a:r>
+              <a:rPr sz="1250" b="1">
+                <a:solidFill>
+                  <a:srgbClr val="FFFFFF"/>
+                </a:solidFill>
+                <a:latin typeface="Courier New"/>
+              </a:rPr>
+              <a:t>ReservationRepository</a:t>
+            </a:r>
+          </a:p>
+          <a:p>
+            <a:pPr algn="ctr"/>
+            <a:r>
+              <a:rPr sz="950" b="0">
+                <a:solidFill>
+                  <a:srgbClr val="EFF6FF"/>
+                </a:solidFill>
+                <a:latin typeface="Calibri"/>
+              </a:rPr>
+              <a:t>pending → approved / rejected</a:t>
+            </a:r>
+          </a:p>
+        </p:txBody>
+      </p:sp>
+      <p:sp>
+        <p:nvSpPr>
+          <p:cNvPr id="12" name="Class AbstractVectorRepository"/>
+          <p:cNvSpPr/>
+          <p:nvPr/>
+        </p:nvSpPr>
+        <p:spPr>
+          <a:xfrm>
+            <a:off x="3291840" y="1920240"/>
+            <a:ext cx="2514600" cy="777240"/>
+          </a:xfrm>
+          <a:prstGeom prst="roundRect">
+            <a:avLst>
+              <a:gd name="adj" fmla="val 8000"/>
+            </a:avLst>
+          </a:prstGeom>
+          <a:solidFill>
+            <a:srgbClr val="EFF6FF"/>
+          </a:solidFill>
+          <a:ln w="12700">
+            <a:solidFill>
+              <a:srgbClr val="DBE4EF"/>
+            </a:solidFill>
+          </a:ln>
+        </p:spPr>
+        <p:style>
+          <a:lnRef idx="1">
+            <a:schemeClr val="accent1"/>
+          </a:lnRef>
+          <a:fillRef idx="3">
+            <a:schemeClr val="accent1"/>
+          </a:fillRef>
+          <a:effectRef idx="2">
+            <a:schemeClr val="accent1"/>
+          </a:effectRef>
+          <a:fontRef idx="minor">
+            <a:schemeClr val="lt1"/>
+          </a:fontRef>
+        </p:style>
+        <p:txBody>
+          <a:bodyPr rtlCol="0" anchor="ctr" wrap="square" lIns="73152" rIns="73152" tIns="36576" bIns="36576"/>
+          <a:lstStyle/>
+          <a:p>
+            <a:pPr algn="ctr"/>
+            <a:r>
+              <a:rPr sz="1250" b="1">
+                <a:solidFill>
+                  <a:srgbClr val="132257"/>
+                </a:solidFill>
+                <a:latin typeface="Courier New"/>
+              </a:rPr>
+              <a:t>AbstractVectorRepository</a:t>
+            </a:r>
+          </a:p>
+          <a:p>
+            <a:pPr algn="ctr"/>
+            <a:r>
+              <a:rPr sz="950" b="0">
+                <a:solidFill>
+                  <a:srgbClr val="64748B"/>
+                </a:solidFill>
+                <a:latin typeface="Calibri"/>
+              </a:rPr>
+              <a:t>add · search · delete</a:t>
+            </a:r>
+          </a:p>
+        </p:txBody>
+      </p:sp>
+      <p:sp>
+        <p:nvSpPr>
+          <p:cNvPr id="13" name="Class MilvusRepository"/>
+          <p:cNvSpPr/>
+          <p:nvPr/>
+        </p:nvSpPr>
+        <p:spPr>
+          <a:xfrm>
+            <a:off x="3291840" y="2971800"/>
+            <a:ext cx="2514600" cy="777240"/>
+          </a:xfrm>
+          <a:prstGeom prst="roundRect">
+            <a:avLst>
+              <a:gd name="adj" fmla="val 8000"/>
+            </a:avLst>
+          </a:prstGeom>
+          <a:solidFill>
+            <a:srgbClr val="2563EB"/>
+          </a:solidFill>
+          <a:ln w="12700">
+            <a:solidFill>
+              <a:srgbClr val="2563EB"/>
+            </a:solidFill>
+          </a:ln>
+        </p:spPr>
+        <p:style>
+          <a:lnRef idx="1">
+            <a:schemeClr val="accent1"/>
+          </a:lnRef>
+          <a:fillRef idx="3">
+            <a:schemeClr val="accent1"/>
+          </a:fillRef>
+          <a:effectRef idx="2">
+            <a:schemeClr val="accent1"/>
+          </a:effectRef>
+          <a:fontRef idx="minor">
+            <a:schemeClr val="lt1"/>
+          </a:fontRef>
+        </p:style>
+        <p:txBody>
+          <a:bodyPr rtlCol="0" anchor="ctr" wrap="square" lIns="73152" rIns="73152" tIns="36576" bIns="36576"/>
+          <a:lstStyle/>
+          <a:p>
+            <a:pPr algn="ctr"/>
+            <a:r>
+              <a:rPr sz="1250" b="1">
+                <a:solidFill>
+                  <a:srgbClr val="FFFFFF"/>
+                </a:solidFill>
+                <a:latin typeface="Courier New"/>
+              </a:rPr>
+              <a:t>MilvusRepository</a:t>
+            </a:r>
+          </a:p>
+          <a:p>
+            <a:pPr algn="ctr"/>
+            <a:r>
+              <a:rPr sz="950" b="0">
+                <a:solidFill>
+                  <a:srgbClr val="EFF6FF"/>
+                </a:solidFill>
+                <a:latin typeface="Calibri"/>
+              </a:rPr>
+              <a:t>hybrid / semantic / keyword</a:t>
+            </a:r>
+          </a:p>
+        </p:txBody>
+      </p:sp>
+      <p:sp>
+        <p:nvSpPr>
+          <p:cNvPr id="14" name="Class ChatThreadRepository"/>
+          <p:cNvSpPr/>
+          <p:nvPr/>
+        </p:nvSpPr>
+        <p:spPr>
+          <a:xfrm>
+            <a:off x="3291840" y="4023360"/>
+            <a:ext cx="2514600" cy="777240"/>
+          </a:xfrm>
+          <a:prstGeom prst="roundRect">
+            <a:avLst>
+              <a:gd name="adj" fmla="val 8000"/>
+            </a:avLst>
+          </a:prstGeom>
+          <a:solidFill>
+            <a:srgbClr val="EFF6FF"/>
+          </a:solidFill>
+          <a:ln w="12700">
+            <a:solidFill>
+              <a:srgbClr val="DBE4EF"/>
+            </a:solidFill>
+          </a:ln>
+        </p:spPr>
+        <p:style>
+          <a:lnRef idx="1">
+            <a:schemeClr val="accent1"/>
+          </a:lnRef>
+          <a:fillRef idx="3">
+            <a:schemeClr val="accent1"/>
+          </a:fillRef>
+          <a:effectRef idx="2">
+            <a:schemeClr val="accent1"/>
+          </a:effectRef>
+          <a:fontRef idx="minor">
+            <a:schemeClr val="lt1"/>
+          </a:fontRef>
+        </p:style>
+        <p:txBody>
+          <a:bodyPr rtlCol="0" anchor="ctr" wrap="square" lIns="73152" rIns="73152" tIns="36576" bIns="36576"/>
+          <a:lstStyle/>
+          <a:p>
+            <a:pPr algn="ctr"/>
+            <a:r>
+              <a:rPr sz="1250" b="1">
+                <a:solidFill>
+                  <a:srgbClr val="132257"/>
+                </a:solidFill>
+                <a:latin typeface="Courier New"/>
+              </a:rPr>
+              <a:t>ChatThreadRepository</a:t>
+            </a:r>
+          </a:p>
+          <a:p>
+            <a:pPr algn="ctr"/>
+            <a:r>
+              <a:rPr sz="950" b="0">
+                <a:solidFill>
+                  <a:srgbClr val="64748B"/>
+                </a:solidFill>
+                <a:latin typeface="Calibri"/>
+              </a:rPr>
+              <a:t>idle-thread cleanup</a:t>
+            </a:r>
+          </a:p>
+        </p:txBody>
+      </p:sp>
+      <p:cxnSp>
+        <p:nvCxnSpPr>
+          <p:cNvPr id="15" name="Arrow"/>
+          <p:cNvCxnSpPr/>
+          <p:nvPr/>
+        </p:nvCxnSpPr>
+        <p:spPr>
+          <a:xfrm flipV="1">
+            <a:off x="1805940" y="2697480"/>
+            <a:ext cx="0" cy="274320"/>
+          </a:xfrm>
+          <a:prstGeom prst="line">
+            <a:avLst/>
+          </a:prstGeom>
+          <a:ln w="19050">
+            <a:solidFill>
+              <a:srgbClr val="64748B"/>
+            </a:solidFill>
+            <a:tailEnd type="triangle" w="med" len="med"/>
+          </a:ln>
+        </p:spPr>
+        <p:style>
+          <a:lnRef idx="2">
+            <a:schemeClr val="accent1"/>
+          </a:lnRef>
+          <a:fillRef idx="0">
+            <a:schemeClr val="accent1"/>
+          </a:fillRef>
+          <a:effectRef idx="1">
+            <a:schemeClr val="accent1"/>
+          </a:effectRef>
+          <a:fontRef idx="minor">
+            <a:schemeClr val="tx1"/>
+          </a:fontRef>
+        </p:style>
+      </p:cxnSp>
+      <p:cxnSp>
+        <p:nvCxnSpPr>
+          <p:cNvPr id="16" name="Arrow"/>
+          <p:cNvCxnSpPr/>
+          <p:nvPr/>
+        </p:nvCxnSpPr>
+        <p:spPr>
+          <a:xfrm flipV="1">
+            <a:off x="1805940" y="3749039"/>
+            <a:ext cx="0" cy="274321"/>
+          </a:xfrm>
+          <a:prstGeom prst="line">
+            <a:avLst/>
+          </a:prstGeom>
+          <a:ln w="19050">
+            <a:solidFill>
+              <a:srgbClr val="64748B"/>
+            </a:solidFill>
+            <a:tailEnd type="triangle" w="med" len="med"/>
+          </a:ln>
+        </p:spPr>
+        <p:style>
+          <a:lnRef idx="2">
+            <a:schemeClr val="accent1"/>
+          </a:lnRef>
+          <a:fillRef idx="0">
+            <a:schemeClr val="accent1"/>
+          </a:fillRef>
+          <a:effectRef idx="1">
+            <a:schemeClr val="accent1"/>
+          </a:effectRef>
+          <a:fontRef idx="minor">
+            <a:schemeClr val="tx1"/>
+          </a:fontRef>
+        </p:style>
+      </p:cxnSp>
+      <p:cxnSp>
+        <p:nvCxnSpPr>
+          <p:cNvPr id="17" name="Arrow"/>
+          <p:cNvCxnSpPr/>
+          <p:nvPr/>
+        </p:nvCxnSpPr>
+        <p:spPr>
+          <a:xfrm flipV="1">
+            <a:off x="1805940" y="4800600"/>
+            <a:ext cx="0" cy="320040"/>
+          </a:xfrm>
+          <a:prstGeom prst="line">
+            <a:avLst/>
+          </a:prstGeom>
+          <a:ln w="19050">
+            <a:solidFill>
+              <a:srgbClr val="64748B"/>
+            </a:solidFill>
+            <a:tailEnd type="triangle" w="med" len="med"/>
+          </a:ln>
+        </p:spPr>
+        <p:style>
+          <a:lnRef idx="2">
+            <a:schemeClr val="accent1"/>
+          </a:lnRef>
+          <a:fillRef idx="0">
+            <a:schemeClr val="accent1"/>
+          </a:fillRef>
+          <a:effectRef idx="1">
+            <a:schemeClr val="accent1"/>
+          </a:effectRef>
+          <a:fontRef idx="minor">
+            <a:schemeClr val="tx1"/>
+          </a:fontRef>
+        </p:style>
+      </p:cxnSp>
+      <p:cxnSp>
+        <p:nvCxnSpPr>
+          <p:cNvPr id="18" name="Arrow"/>
+          <p:cNvCxnSpPr/>
+          <p:nvPr/>
+        </p:nvCxnSpPr>
+        <p:spPr>
+          <a:xfrm flipV="1">
+            <a:off x="4549140" y="2697480"/>
+            <a:ext cx="0" cy="274320"/>
+          </a:xfrm>
+          <a:prstGeom prst="line">
+            <a:avLst/>
+          </a:prstGeom>
+          <a:ln w="19050">
+            <a:solidFill>
+              <a:srgbClr val="64748B"/>
+            </a:solidFill>
+            <a:tailEnd type="triangle" w="med" len="med"/>
+          </a:ln>
+        </p:spPr>
+        <p:style>
+          <a:lnRef idx="2">
+            <a:schemeClr val="accent1"/>
+          </a:lnRef>
+          <a:fillRef idx="0">
+            <a:schemeClr val="accent1"/>
+          </a:fillRef>
+          <a:effectRef idx="1">
+            <a:schemeClr val="accent1"/>
+          </a:effectRef>
+          <a:fontRef idx="minor">
+            <a:schemeClr val="tx1"/>
+          </a:fontRef>
+        </p:style>
+      </p:cxnSp>
+      <p:cxnSp>
+        <p:nvCxnSpPr>
+          <p:cNvPr id="19" name="Arrow"/>
+          <p:cNvCxnSpPr/>
+          <p:nvPr/>
+        </p:nvCxnSpPr>
+        <p:spPr>
+          <a:xfrm flipH="1" flipV="1">
+            <a:off x="3063240" y="4617720"/>
+            <a:ext cx="228600" cy="685800"/>
+          </a:xfrm>
+          <a:prstGeom prst="line">
+            <a:avLst/>
+          </a:prstGeom>
+          <a:ln w="19050">
+            <a:solidFill>
+              <a:srgbClr val="64748B"/>
+            </a:solidFill>
+            <a:tailEnd type="triangle" w="med" len="med"/>
+          </a:ln>
+        </p:spPr>
+        <p:style>
+          <a:lnRef idx="2">
+            <a:schemeClr val="accent1"/>
+          </a:lnRef>
+          <a:fillRef idx="0">
+            <a:schemeClr val="accent1"/>
+          </a:fillRef>
+          <a:effectRef idx="1">
+            <a:schemeClr val="accent1"/>
+          </a:effectRef>
+          <a:fontRef idx="minor">
+            <a:schemeClr val="tx1"/>
+          </a:fontRef>
+        </p:style>
+      </p:cxnSp>
+      <p:sp>
+        <p:nvSpPr>
+          <p:cNvPr id="20" name="TextBox 19"/>
+          <p:cNvSpPr txBox="1"/>
+          <p:nvPr/>
+        </p:nvSpPr>
+        <p:spPr>
+          <a:xfrm>
+            <a:off x="6400800" y="1554480"/>
+            <a:ext cx="5212080" cy="274320"/>
+          </a:xfrm>
+          <a:prstGeom prst="rect">
+            <a:avLst/>
+          </a:prstGeom>
+          <a:noFill/>
+        </p:spPr>
+        <p:txBody>
+          <a:bodyPr wrap="square" lIns="0" rIns="0" tIns="0" bIns="0" anchor="t">
+            <a:spAutoFit/>
+          </a:bodyPr>
+          <a:lstStyle/>
+          <a:p>
+            <a:r>
+              <a:rPr sz="1100" b="1">
+                <a:solidFill>
+                  <a:srgbClr val="64748B"/>
+                </a:solidFill>
+                <a:latin typeface="Calibri"/>
+              </a:rPr>
+              <a:t>Data model (SQLAlchemy) — one Parking has many of each</a:t>
+            </a:r>
+          </a:p>
+        </p:txBody>
+      </p:sp>
+      <p:sp>
+        <p:nvSpPr>
+          <p:cNvPr id="21" name="Class Parking"/>
+          <p:cNvSpPr/>
+          <p:nvPr/>
+        </p:nvSpPr>
+        <p:spPr>
+          <a:xfrm>
+            <a:off x="6400800" y="3246120"/>
+            <a:ext cx="2011680" cy="1005840"/>
+          </a:xfrm>
+          <a:prstGeom prst="roundRect">
+            <a:avLst>
+              <a:gd name="adj" fmla="val 8000"/>
+            </a:avLst>
+          </a:prstGeom>
+          <a:solidFill>
+            <a:srgbClr val="2563EB"/>
+          </a:solidFill>
+          <a:ln w="12700">
+            <a:solidFill>
+              <a:srgbClr val="2563EB"/>
+            </a:solidFill>
+          </a:ln>
+        </p:spPr>
+        <p:style>
+          <a:lnRef idx="1">
+            <a:schemeClr val="accent1"/>
+          </a:lnRef>
+          <a:fillRef idx="3">
+            <a:schemeClr val="accent1"/>
+          </a:fillRef>
+          <a:effectRef idx="2">
+            <a:schemeClr val="accent1"/>
+          </a:effectRef>
+          <a:fontRef idx="minor">
+            <a:schemeClr val="lt1"/>
+          </a:fontRef>
+        </p:style>
+        <p:txBody>
+          <a:bodyPr rtlCol="0" anchor="ctr" wrap="square" lIns="73152" rIns="73152" tIns="36576" bIns="36576"/>
+          <a:lstStyle/>
+          <a:p>
+            <a:pPr algn="ctr"/>
+            <a:r>
+              <a:rPr sz="1250" b="1">
+                <a:solidFill>
+                  <a:srgbClr val="FFFFFF"/>
+                </a:solidFill>
+                <a:latin typeface="Courier New"/>
+              </a:rPr>
+              <a:t>Parking</a:t>
+            </a:r>
+          </a:p>
+          <a:p>
+            <a:pPr algn="ctr"/>
+            <a:r>
+              <a:rPr sz="950" b="0">
+                <a:solidFill>
+                  <a:srgbClr val="EFF6FF"/>
+                </a:solidFill>
+                <a:latin typeface="Calibri"/>
+              </a:rPr>
+              <a:t>a car park</a:t>
+            </a:r>
+          </a:p>
+        </p:txBody>
+      </p:sp>
+      <p:sp>
+        <p:nvSpPr>
+          <p:cNvPr id="22" name="Class ParkingSpaceType"/>
+          <p:cNvSpPr/>
+          <p:nvPr/>
+        </p:nvSpPr>
+        <p:spPr>
+          <a:xfrm>
+            <a:off x="9281160" y="1874519"/>
+            <a:ext cx="2331720" cy="621792"/>
+          </a:xfrm>
+          <a:prstGeom prst="roundRect">
+            <a:avLst>
+              <a:gd name="adj" fmla="val 8000"/>
+            </a:avLst>
+          </a:prstGeom>
+          <a:solidFill>
+            <a:srgbClr val="EFF6FF"/>
+          </a:solidFill>
+          <a:ln w="12700">
+            <a:solidFill>
+              <a:srgbClr val="DBE4EF"/>
+            </a:solidFill>
+          </a:ln>
+        </p:spPr>
+        <p:style>
+          <a:lnRef idx="1">
+            <a:schemeClr val="accent1"/>
+          </a:lnRef>
+          <a:fillRef idx="3">
+            <a:schemeClr val="accent1"/>
+          </a:fillRef>
+          <a:effectRef idx="2">
+            <a:schemeClr val="accent1"/>
+          </a:effectRef>
+          <a:fontRef idx="minor">
+            <a:schemeClr val="lt1"/>
+          </a:fontRef>
+        </p:style>
+        <p:txBody>
+          <a:bodyPr rtlCol="0" anchor="ctr" wrap="square" lIns="73152" rIns="73152" tIns="36576" bIns="36576"/>
+          <a:lstStyle/>
+          <a:p>
+            <a:pPr algn="ctr"/>
+            <a:r>
+              <a:rPr sz="1250" b="1">
+                <a:solidFill>
+                  <a:srgbClr val="132257"/>
+                </a:solidFill>
+                <a:latin typeface="Courier New"/>
+              </a:rPr>
+              <a:t>ParkingSpaceType</a:t>
+            </a:r>
+          </a:p>
+          <a:p>
+            <a:pPr algn="ctr"/>
+            <a:r>
+              <a:rPr sz="950" b="0">
+                <a:solidFill>
+                  <a:srgbClr val="64748B"/>
+                </a:solidFill>
+                <a:latin typeface="Calibri"/>
+              </a:rPr>
+              <a:t>standard / EV · capacity</a:t>
+            </a:r>
+          </a:p>
+        </p:txBody>
+      </p:sp>
+      <p:cxnSp>
+        <p:nvCxnSpPr>
+          <p:cNvPr id="23" name="Arrow"/>
+          <p:cNvCxnSpPr/>
+          <p:nvPr/>
+        </p:nvCxnSpPr>
+        <p:spPr>
+          <a:xfrm flipV="1">
+            <a:off x="8412480" y="2185415"/>
+            <a:ext cx="868680" cy="1563624"/>
+          </a:xfrm>
+          <a:prstGeom prst="line">
+            <a:avLst/>
+          </a:prstGeom>
+          <a:ln w="19050">
+            <a:solidFill>
+              <a:srgbClr val="64748B"/>
+            </a:solidFill>
+            <a:tailEnd type="none" w="med" len="med"/>
+          </a:ln>
+        </p:spPr>
+        <p:style>
+          <a:lnRef idx="2">
+            <a:schemeClr val="accent1"/>
+          </a:lnRef>
+          <a:fillRef idx="0">
+            <a:schemeClr val="accent1"/>
+          </a:fillRef>
+          <a:effectRef idx="1">
+            <a:schemeClr val="accent1"/>
+          </a:effectRef>
+          <a:fontRef idx="minor">
+            <a:schemeClr val="tx1"/>
+          </a:fontRef>
+        </p:style>
+      </p:cxnSp>
+      <p:sp>
+        <p:nvSpPr>
+          <p:cNvPr id="24" name="Class WorkingHours"/>
+          <p:cNvSpPr/>
+          <p:nvPr/>
+        </p:nvSpPr>
+        <p:spPr>
+          <a:xfrm>
+            <a:off x="9281160" y="2606039"/>
+            <a:ext cx="2331720" cy="621792"/>
+          </a:xfrm>
+          <a:prstGeom prst="roundRect">
+            <a:avLst>
+              <a:gd name="adj" fmla="val 8000"/>
+            </a:avLst>
+          </a:prstGeom>
+          <a:solidFill>
+            <a:srgbClr val="EFF6FF"/>
+          </a:solidFill>
+          <a:ln w="12700">
+            <a:solidFill>
+              <a:srgbClr val="DBE4EF"/>
+            </a:solidFill>
+          </a:ln>
+        </p:spPr>
+        <p:style>
+          <a:lnRef idx="1">
+            <a:schemeClr val="accent1"/>
+          </a:lnRef>
+          <a:fillRef idx="3">
+            <a:schemeClr val="accent1"/>
+          </a:fillRef>
+          <a:effectRef idx="2">
+            <a:schemeClr val="accent1"/>
+          </a:effectRef>
+          <a:fontRef idx="minor">
+            <a:schemeClr val="lt1"/>
+          </a:fontRef>
+        </p:style>
+        <p:txBody>
+          <a:bodyPr rtlCol="0" anchor="ctr" wrap="square" lIns="73152" rIns="73152" tIns="36576" bIns="36576"/>
+          <a:lstStyle/>
+          <a:p>
+            <a:pPr algn="ctr"/>
+            <a:r>
+              <a:rPr sz="1250" b="1">
+                <a:solidFill>
+                  <a:srgbClr val="132257"/>
+                </a:solidFill>
+                <a:latin typeface="Courier New"/>
+              </a:rPr>
+              <a:t>WorkingHours</a:t>
+            </a:r>
+          </a:p>
+          <a:p>
+            <a:pPr algn="ctr"/>
+            <a:r>
+              <a:rPr sz="950" b="0">
+                <a:solidFill>
+                  <a:srgbClr val="64748B"/>
+                </a:solidFill>
+                <a:latin typeface="Calibri"/>
+              </a:rPr>
+              <a:t>per weekday</a:t>
+            </a:r>
+          </a:p>
+        </p:txBody>
+      </p:sp>
+      <p:cxnSp>
+        <p:nvCxnSpPr>
+          <p:cNvPr id="25" name="Arrow"/>
+          <p:cNvCxnSpPr/>
+          <p:nvPr/>
+        </p:nvCxnSpPr>
+        <p:spPr>
+          <a:xfrm flipV="1">
+            <a:off x="8412480" y="2916935"/>
+            <a:ext cx="868680" cy="832104"/>
+          </a:xfrm>
+          <a:prstGeom prst="line">
+            <a:avLst/>
+          </a:prstGeom>
+          <a:ln w="19050">
+            <a:solidFill>
+              <a:srgbClr val="64748B"/>
+            </a:solidFill>
+            <a:tailEnd type="none" w="med" len="med"/>
+          </a:ln>
+        </p:spPr>
+        <p:style>
+          <a:lnRef idx="2">
+            <a:schemeClr val="accent1"/>
+          </a:lnRef>
+          <a:fillRef idx="0">
+            <a:schemeClr val="accent1"/>
+          </a:fillRef>
+          <a:effectRef idx="1">
+            <a:schemeClr val="accent1"/>
+          </a:effectRef>
+          <a:fontRef idx="minor">
+            <a:schemeClr val="tx1"/>
+          </a:fontRef>
+        </p:style>
+      </p:cxnSp>
+      <p:sp>
+        <p:nvSpPr>
+          <p:cNvPr id="26" name="Class SpecialHours"/>
+          <p:cNvSpPr/>
+          <p:nvPr/>
+        </p:nvSpPr>
+        <p:spPr>
+          <a:xfrm>
+            <a:off x="9281160" y="3337560"/>
+            <a:ext cx="2331720" cy="621792"/>
+          </a:xfrm>
+          <a:prstGeom prst="roundRect">
+            <a:avLst>
+              <a:gd name="adj" fmla="val 8000"/>
+            </a:avLst>
+          </a:prstGeom>
+          <a:solidFill>
+            <a:srgbClr val="EFF6FF"/>
+          </a:solidFill>
+          <a:ln w="12700">
+            <a:solidFill>
+              <a:srgbClr val="DBE4EF"/>
+            </a:solidFill>
+          </a:ln>
+        </p:spPr>
+        <p:style>
+          <a:lnRef idx="1">
+            <a:schemeClr val="accent1"/>
+          </a:lnRef>
+          <a:fillRef idx="3">
+            <a:schemeClr val="accent1"/>
+          </a:fillRef>
+          <a:effectRef idx="2">
+            <a:schemeClr val="accent1"/>
+          </a:effectRef>
+          <a:fontRef idx="minor">
+            <a:schemeClr val="lt1"/>
+          </a:fontRef>
+        </p:style>
+        <p:txBody>
+          <a:bodyPr rtlCol="0" anchor="ctr" wrap="square" lIns="73152" rIns="73152" tIns="36576" bIns="36576"/>
+          <a:lstStyle/>
+          <a:p>
+            <a:pPr algn="ctr"/>
+            <a:r>
+              <a:rPr sz="1250" b="1">
+                <a:solidFill>
+                  <a:srgbClr val="132257"/>
+                </a:solidFill>
+                <a:latin typeface="Courier New"/>
+              </a:rPr>
+              <a:t>SpecialHours</a:t>
+            </a:r>
+          </a:p>
+          <a:p>
+            <a:pPr algn="ctr"/>
+            <a:r>
+              <a:rPr sz="950" b="0">
+                <a:solidFill>
+                  <a:srgbClr val="64748B"/>
+                </a:solidFill>
+                <a:latin typeface="Calibri"/>
+              </a:rPr>
+              <a:t>holidays, closures</a:t>
+            </a:r>
+          </a:p>
+        </p:txBody>
+      </p:sp>
+      <p:cxnSp>
+        <p:nvCxnSpPr>
+          <p:cNvPr id="27" name="Arrow"/>
+          <p:cNvCxnSpPr/>
+          <p:nvPr/>
+        </p:nvCxnSpPr>
+        <p:spPr>
+          <a:xfrm flipV="1">
+            <a:off x="8412480" y="3648456"/>
+            <a:ext cx="868680" cy="100583"/>
+          </a:xfrm>
+          <a:prstGeom prst="line">
+            <a:avLst/>
+          </a:prstGeom>
+          <a:ln w="19050">
+            <a:solidFill>
+              <a:srgbClr val="64748B"/>
+            </a:solidFill>
+            <a:tailEnd type="none" w="med" len="med"/>
+          </a:ln>
+        </p:spPr>
+        <p:style>
+          <a:lnRef idx="2">
+            <a:schemeClr val="accent1"/>
+          </a:lnRef>
+          <a:fillRef idx="0">
+            <a:schemeClr val="accent1"/>
+          </a:fillRef>
+          <a:effectRef idx="1">
+            <a:schemeClr val="accent1"/>
+          </a:effectRef>
+          <a:fontRef idx="minor">
+            <a:schemeClr val="tx1"/>
+          </a:fontRef>
+        </p:style>
+      </p:cxnSp>
+      <p:sp>
+        <p:nvSpPr>
+          <p:cNvPr id="28" name="Class Price"/>
+          <p:cNvSpPr/>
+          <p:nvPr/>
+        </p:nvSpPr>
+        <p:spPr>
+          <a:xfrm>
+            <a:off x="9281160" y="4069080"/>
+            <a:ext cx="2331720" cy="621792"/>
+          </a:xfrm>
+          <a:prstGeom prst="roundRect">
+            <a:avLst>
+              <a:gd name="adj" fmla="val 8000"/>
+            </a:avLst>
+          </a:prstGeom>
+          <a:solidFill>
+            <a:srgbClr val="EFF6FF"/>
+          </a:solidFill>
+          <a:ln w="12700">
+            <a:solidFill>
+              <a:srgbClr val="DBE4EF"/>
+            </a:solidFill>
+          </a:ln>
+        </p:spPr>
+        <p:style>
+          <a:lnRef idx="1">
+            <a:schemeClr val="accent1"/>
+          </a:lnRef>
+          <a:fillRef idx="3">
+            <a:schemeClr val="accent1"/>
+          </a:fillRef>
+          <a:effectRef idx="2">
+            <a:schemeClr val="accent1"/>
+          </a:effectRef>
+          <a:fontRef idx="minor">
+            <a:schemeClr val="lt1"/>
+          </a:fontRef>
+        </p:style>
+        <p:txBody>
+          <a:bodyPr rtlCol="0" anchor="ctr" wrap="square" lIns="73152" rIns="73152" tIns="36576" bIns="36576"/>
+          <a:lstStyle/>
+          <a:p>
+            <a:pPr algn="ctr"/>
+            <a:r>
+              <a:rPr sz="1250" b="1">
+                <a:solidFill>
+                  <a:srgbClr val="132257"/>
+                </a:solidFill>
+                <a:latin typeface="Courier New"/>
+              </a:rPr>
+              <a:t>Price</a:t>
+            </a:r>
+          </a:p>
+          <a:p>
+            <a:pPr algn="ctr"/>
+            <a:r>
+              <a:rPr sz="950" b="0">
+                <a:solidFill>
+                  <a:srgbClr val="64748B"/>
+                </a:solidFill>
+                <a:latin typeface="Calibri"/>
+              </a:rPr>
+              <a:t>per space type, day type</a:t>
+            </a:r>
+          </a:p>
+        </p:txBody>
+      </p:sp>
+      <p:cxnSp>
+        <p:nvCxnSpPr>
+          <p:cNvPr id="29" name="Arrow"/>
+          <p:cNvCxnSpPr/>
+          <p:nvPr/>
+        </p:nvCxnSpPr>
+        <p:spPr>
+          <a:xfrm>
+            <a:off x="8412480" y="3749039"/>
+            <a:ext cx="868680" cy="630937"/>
+          </a:xfrm>
+          <a:prstGeom prst="line">
+            <a:avLst/>
+          </a:prstGeom>
+          <a:ln w="19050">
+            <a:solidFill>
+              <a:srgbClr val="64748B"/>
+            </a:solidFill>
+            <a:tailEnd type="none" w="med" len="med"/>
+          </a:ln>
+        </p:spPr>
+        <p:style>
+          <a:lnRef idx="2">
+            <a:schemeClr val="accent1"/>
+          </a:lnRef>
+          <a:fillRef idx="0">
+            <a:schemeClr val="accent1"/>
+          </a:fillRef>
+          <a:effectRef idx="1">
+            <a:schemeClr val="accent1"/>
+          </a:effectRef>
+          <a:fontRef idx="minor">
+            <a:schemeClr val="tx1"/>
+          </a:fontRef>
+        </p:style>
+      </p:cxnSp>
+      <p:sp>
+        <p:nvSpPr>
+          <p:cNvPr id="30" name="Class CapacityOverride"/>
+          <p:cNvSpPr/>
+          <p:nvPr/>
+        </p:nvSpPr>
+        <p:spPr>
+          <a:xfrm>
+            <a:off x="9281160" y="4800600"/>
+            <a:ext cx="2331720" cy="621792"/>
+          </a:xfrm>
+          <a:prstGeom prst="roundRect">
+            <a:avLst>
+              <a:gd name="adj" fmla="val 8000"/>
+            </a:avLst>
+          </a:prstGeom>
+          <a:solidFill>
+            <a:srgbClr val="EFF6FF"/>
+          </a:solidFill>
+          <a:ln w="12700">
+            <a:solidFill>
+              <a:srgbClr val="DBE4EF"/>
+            </a:solidFill>
+          </a:ln>
+        </p:spPr>
+        <p:style>
+          <a:lnRef idx="1">
+            <a:schemeClr val="accent1"/>
+          </a:lnRef>
+          <a:fillRef idx="3">
+            <a:schemeClr val="accent1"/>
+          </a:fillRef>
+          <a:effectRef idx="2">
+            <a:schemeClr val="accent1"/>
+          </a:effectRef>
+          <a:fontRef idx="minor">
+            <a:schemeClr val="lt1"/>
+          </a:fontRef>
+        </p:style>
+        <p:txBody>
+          <a:bodyPr rtlCol="0" anchor="ctr" wrap="square" lIns="73152" rIns="73152" tIns="36576" bIns="36576"/>
+          <a:lstStyle/>
+          <a:p>
+            <a:pPr algn="ctr"/>
+            <a:r>
+              <a:rPr sz="1250" b="1">
+                <a:solidFill>
+                  <a:srgbClr val="132257"/>
+                </a:solidFill>
+                <a:latin typeface="Courier New"/>
+              </a:rPr>
+              <a:t>CapacityOverride</a:t>
+            </a:r>
+          </a:p>
+          <a:p>
+            <a:pPr algn="ctr"/>
+            <a:r>
+              <a:rPr sz="950" b="0">
+                <a:solidFill>
+                  <a:srgbClr val="64748B"/>
+                </a:solidFill>
+                <a:latin typeface="Calibri"/>
+              </a:rPr>
+              <a:t>temporary capacity</a:t>
+            </a:r>
+          </a:p>
+        </p:txBody>
+      </p:sp>
+      <p:cxnSp>
+        <p:nvCxnSpPr>
+          <p:cNvPr id="31" name="Arrow"/>
+          <p:cNvCxnSpPr/>
+          <p:nvPr/>
+        </p:nvCxnSpPr>
+        <p:spPr>
+          <a:xfrm>
+            <a:off x="8412480" y="3749039"/>
+            <a:ext cx="868680" cy="1362457"/>
+          </a:xfrm>
+          <a:prstGeom prst="line">
+            <a:avLst/>
+          </a:prstGeom>
+          <a:ln w="19050">
+            <a:solidFill>
+              <a:srgbClr val="64748B"/>
+            </a:solidFill>
+            <a:tailEnd type="none" w="med" len="med"/>
+          </a:ln>
+        </p:spPr>
+        <p:style>
+          <a:lnRef idx="2">
+            <a:schemeClr val="accent1"/>
+          </a:lnRef>
+          <a:fillRef idx="0">
+            <a:schemeClr val="accent1"/>
+          </a:fillRef>
+          <a:effectRef idx="1">
+            <a:schemeClr val="accent1"/>
+          </a:effectRef>
+          <a:fontRef idx="minor">
+            <a:schemeClr val="tx1"/>
+          </a:fontRef>
+        </p:style>
+      </p:cxnSp>
+      <p:sp>
+        <p:nvSpPr>
+          <p:cNvPr id="32" name="Class Reservation"/>
+          <p:cNvSpPr/>
+          <p:nvPr/>
+        </p:nvSpPr>
+        <p:spPr>
+          <a:xfrm>
+            <a:off x="9281160" y="5532120"/>
+            <a:ext cx="2331720" cy="621792"/>
+          </a:xfrm>
+          <a:prstGeom prst="roundRect">
+            <a:avLst>
+              <a:gd name="adj" fmla="val 8000"/>
+            </a:avLst>
+          </a:prstGeom>
+          <a:solidFill>
+            <a:srgbClr val="EFF6FF"/>
+          </a:solidFill>
+          <a:ln w="12700">
+            <a:solidFill>
+              <a:srgbClr val="DBE4EF"/>
+            </a:solidFill>
+          </a:ln>
+        </p:spPr>
+        <p:style>
+          <a:lnRef idx="1">
+            <a:schemeClr val="accent1"/>
+          </a:lnRef>
+          <a:fillRef idx="3">
+            <a:schemeClr val="accent1"/>
+          </a:fillRef>
+          <a:effectRef idx="2">
+            <a:schemeClr val="accent1"/>
+          </a:effectRef>
+          <a:fontRef idx="minor">
+            <a:schemeClr val="lt1"/>
+          </a:fontRef>
+        </p:style>
+        <p:txBody>
+          <a:bodyPr rtlCol="0" anchor="ctr" wrap="square" lIns="73152" rIns="73152" tIns="36576" bIns="36576"/>
+          <a:lstStyle/>
+          <a:p>
+            <a:pPr algn="ctr"/>
+            <a:r>
+              <a:rPr sz="1250" b="1">
+                <a:solidFill>
+                  <a:srgbClr val="132257"/>
+                </a:solidFill>
+                <a:latin typeface="Courier New"/>
+              </a:rPr>
+              <a:t>Reservation</a:t>
+            </a:r>
+          </a:p>
+          <a:p>
+            <a:pPr algn="ctr"/>
+            <a:r>
+              <a:rPr sz="950" b="0">
+                <a:solidFill>
+                  <a:srgbClr val="64748B"/>
+                </a:solidFill>
+                <a:latin typeface="Calibri"/>
+              </a:rPr>
+              <a:t>per space type</a:t>
+            </a:r>
+          </a:p>
+        </p:txBody>
+      </p:sp>
+      <p:cxnSp>
+        <p:nvCxnSpPr>
+          <p:cNvPr id="33" name="Arrow"/>
+          <p:cNvCxnSpPr/>
+          <p:nvPr/>
+        </p:nvCxnSpPr>
+        <p:spPr>
+          <a:xfrm>
+            <a:off x="8412480" y="3749039"/>
+            <a:ext cx="868680" cy="2093977"/>
+          </a:xfrm>
+          <a:prstGeom prst="line">
+            <a:avLst/>
+          </a:prstGeom>
+          <a:ln w="19050">
+            <a:solidFill>
+              <a:srgbClr val="64748B"/>
+            </a:solidFill>
+            <a:tailEnd type="none" w="med" len="med"/>
+          </a:ln>
+        </p:spPr>
+        <p:style>
+          <a:lnRef idx="2">
+            <a:schemeClr val="accent1"/>
+          </a:lnRef>
+          <a:fillRef idx="0">
+            <a:schemeClr val="accent1"/>
+          </a:fillRef>
+          <a:effectRef idx="1">
+            <a:schemeClr val="accent1"/>
+          </a:effectRef>
+          <a:fontRef idx="minor">
+            <a:schemeClr val="tx1"/>
+          </a:fontRef>
+        </p:style>
+      </p:cxnSp>
+      <p:sp>
+        <p:nvSpPr>
+          <p:cNvPr id="34" name="TextBox 33"/>
+          <p:cNvSpPr txBox="1"/>
+          <p:nvPr/>
+        </p:nvSpPr>
+        <p:spPr>
+          <a:xfrm>
+            <a:off x="6400800" y="4434840"/>
+            <a:ext cx="1874519" cy="1463040"/>
+          </a:xfrm>
+          <a:prstGeom prst="rect">
+            <a:avLst/>
+          </a:prstGeom>
+          <a:noFill/>
+        </p:spPr>
+        <p:txBody>
+          <a:bodyPr wrap="square" lIns="0" rIns="0" tIns="0" bIns="0" anchor="t">
+            <a:spAutoFit/>
+          </a:bodyPr>
+          <a:lstStyle/>
+          <a:p>
+            <a:r>
+              <a:rPr sz="950" b="0">
+                <a:solidFill>
+                  <a:srgbClr val="64748B"/>
+                </a:solidFill>
+                <a:latin typeface="Calibri"/>
+              </a:rPr>
+              <a:t>ParkingSpaceType in turn has many Prices, Reservations and CapacityOverrides — availability is counted per space type.</a:t>
+            </a:r>
+          </a:p>
+        </p:txBody>
+      </p:sp>
+    </p:spTree>
+  </p:cSld>
+  <p:clrMapOvr>
+    <a:masterClrMapping/>
+  </p:clrMapOvr>
+</p:sld>
+</file>
+
+<file path=ppt/slides/slide24.xml><?xml version="1.0" encoding="utf-8"?>
+<p:sld xmlns:a="http://schemas.openxmlformats.org/drawingml/2006/main" xmlns:p="http://schemas.openxmlformats.org/presentationml/2006/main" xmlns:r="http://schemas.openxmlformats.org/officeDocument/2006/relationships">
+  <p:cSld>
+    <p:spTree>
+      <p:nvGrpSpPr>
+        <p:cNvPr id="1" name=""/>
+        <p:cNvGrpSpPr/>
+        <p:nvPr/>
+      </p:nvGrpSpPr>
+      <p:grpSpPr/>
+      <p:sp>
+        <p:nvSpPr>
+          <p:cNvPr id="2" name="Kicker"/>
+          <p:cNvSpPr txBox="1"/>
+          <p:nvPr/>
+        </p:nvSpPr>
+        <p:spPr>
+          <a:xfrm>
+            <a:off x="548640" y="457200"/>
+            <a:ext cx="9144000" cy="320040"/>
+          </a:xfrm>
+          <a:prstGeom prst="rect">
+            <a:avLst/>
+          </a:prstGeom>
+          <a:noFill/>
+        </p:spPr>
+        <p:txBody>
+          <a:bodyPr wrap="square" lIns="0" rIns="0" tIns="0" bIns="0" anchor="t">
+            <a:spAutoFit/>
+          </a:bodyPr>
+          <a:lstStyle/>
+          <a:p>
+            <a:r>
+              <a:rPr sz="1200" b="1" spc="200">
+                <a:solidFill>
+                  <a:schemeClr val="accent1"/>
+                </a:solidFill>
+                <a:latin typeface="Calibri"/>
+              </a:rPr>
+              <a:t>TEST RESULTS</a:t>
+            </a:r>
+          </a:p>
+        </p:txBody>
+      </p:sp>
+      <p:sp>
+        <p:nvSpPr>
+          <p:cNvPr id="3" name="Title"/>
+          <p:cNvSpPr txBox="1"/>
+          <p:nvPr/>
+        </p:nvSpPr>
+        <p:spPr>
+          <a:xfrm>
+            <a:off x="548640" y="777240"/>
+            <a:ext cx="11091672" cy="731520"/>
+          </a:xfrm>
+          <a:prstGeom prst="rect">
+            <a:avLst/>
+          </a:prstGeom>
+          <a:noFill/>
+        </p:spPr>
+        <p:txBody>
+          <a:bodyPr wrap="square" lIns="0" rIns="0" tIns="0" bIns="0" anchor="t">
+            <a:spAutoFit/>
+          </a:bodyPr>
+          <a:lstStyle/>
+          <a:p>
+            <a:r>
+              <a:rPr sz="3000" b="1">
+                <a:solidFill>
+                  <a:schemeClr val="tx1"/>
+                </a:solidFill>
+                <a:latin typeface="Cambria"/>
+              </a:rPr>
+              <a:t>Evaluation: 30 questions, 15 of them hard</a:t>
+            </a:r>
+          </a:p>
+        </p:txBody>
+      </p:sp>
+      <p:sp>
+        <p:nvSpPr>
+          <p:cNvPr id="4" name="Footer"/>
+          <p:cNvSpPr txBox="1"/>
+          <p:nvPr/>
+        </p:nvSpPr>
+        <p:spPr>
+          <a:xfrm>
+            <a:off x="548640" y="6473952"/>
+            <a:ext cx="6400800" cy="274320"/>
+          </a:xfrm>
+          <a:prstGeom prst="rect">
+            <a:avLst/>
+          </a:prstGeom>
+          <a:noFill/>
+        </p:spPr>
+        <p:txBody>
+          <a:bodyPr wrap="square" lIns="0" rIns="0" tIns="0" bIns="0" anchor="t">
+            <a:spAutoFit/>
+          </a:bodyPr>
+          <a:lstStyle/>
+          <a:p>
+            <a:r>
+              <a:rPr sz="1000" b="0">
+                <a:solidFill>
+                  <a:schemeClr val="tx2"/>
+                </a:solidFill>
+                <a:latin typeface="Calibri"/>
+              </a:rPr>
+              <a:t>evals/report.md · evals/evidently_report.html · evals/golden_qa.json</a:t>
+            </a:r>
+          </a:p>
+        </p:txBody>
+      </p:sp>
+      <p:sp>
+        <p:nvSpPr>
+          <p:cNvPr id="5" name="Footer brand"/>
+          <p:cNvSpPr txBox="1"/>
+          <p:nvPr/>
+        </p:nvSpPr>
+        <p:spPr>
+          <a:xfrm>
+            <a:off x="8897112" y="6473952"/>
+            <a:ext cx="2743200" cy="274320"/>
+          </a:xfrm>
+          <a:prstGeom prst="rect">
+            <a:avLst/>
+          </a:prstGeom>
+          <a:noFill/>
+        </p:spPr>
+        <p:txBody>
+          <a:bodyPr wrap="square" lIns="0" rIns="0" tIns="0" bIns="0" anchor="t">
+            <a:spAutoFit/>
+          </a:bodyPr>
+          <a:lstStyle/>
+          <a:p>
+            <a:pPr algn="r"/>
+            <a:r>
+              <a:rPr sz="1000" b="0">
+                <a:solidFill>
+                  <a:schemeClr val="tx2"/>
+                </a:solidFill>
+                <a:latin typeface="Calibri"/>
+              </a:rPr>
+              <a:t>VilniusPark Chatbot</a:t>
+            </a:r>
+          </a:p>
+        </p:txBody>
+      </p:sp>
+      <p:sp>
+        <p:nvSpPr>
+          <p:cNvPr id="6" name="TextBox 5"/>
+          <p:cNvSpPr txBox="1"/>
+          <p:nvPr/>
+        </p:nvSpPr>
+        <p:spPr>
+          <a:xfrm>
+            <a:off x="548640" y="1600200"/>
+            <a:ext cx="4937760" cy="274320"/>
+          </a:xfrm>
+          <a:prstGeom prst="rect">
+            <a:avLst/>
+          </a:prstGeom>
+          <a:noFill/>
+        </p:spPr>
+        <p:txBody>
+          <a:bodyPr wrap="square" lIns="0" rIns="0" tIns="0" bIns="0" anchor="t">
+            <a:spAutoFit/>
+          </a:bodyPr>
+          <a:lstStyle/>
+          <a:p>
+            <a:r>
+              <a:rPr sz="1100" b="1">
+                <a:solidFill>
+                  <a:srgbClr val="64748B"/>
+                </a:solidFill>
+                <a:latin typeface="Calibri"/>
+              </a:rPr>
+              <a:t>Retrieval — 23 answerable questions, K=3, hybrid search</a:t>
+            </a:r>
+          </a:p>
+        </p:txBody>
+      </p:sp>
+      <p:sp>
+        <p:nvSpPr>
+          <p:cNvPr id="7" name="Card"/>
+          <p:cNvSpPr/>
+          <p:nvPr/>
+        </p:nvSpPr>
+        <p:spPr>
+          <a:xfrm>
+            <a:off x="548640" y="1965960"/>
+            <a:ext cx="1554480" cy="1325880"/>
+          </a:xfrm>
+          <a:prstGeom prst="roundRect">
+            <a:avLst>
+              <a:gd name="adj" fmla="val 1250"/>
+            </a:avLst>
+          </a:prstGeom>
+          <a:solidFill>
+            <a:srgbClr val="FFFFFF"/>
+          </a:solidFill>
+          <a:ln w="12700">
+            <a:solidFill>
+              <a:srgbClr val="DBE4EF"/>
+            </a:solidFill>
+          </a:ln>
+          <a:effectLst>
+            <a:outerShdw blurRad="127000" dist="38100" dir="5400000" algn="bl" rotWithShape="0">
+              <a:srgbClr val="172033">
+                <a:alpha val="15000"/>
+              </a:srgbClr>
+            </a:outerShdw>
+          </a:effectLst>
+        </p:spPr>
+        <p:style>
+          <a:lnRef idx="1">
+            <a:schemeClr val="accent1"/>
+          </a:lnRef>
+          <a:fillRef idx="3">
+            <a:schemeClr val="accent1"/>
+          </a:fillRef>
+          <a:effectRef idx="2">
+            <a:schemeClr val="accent1"/>
+          </a:effectRef>
+          <a:fontRef idx="minor">
+            <a:schemeClr val="lt1"/>
+          </a:fontRef>
+        </p:style>
+        <p:txBody>
+          <a:bodyPr rtlCol="0" anchor="ctr"/>
+          <a:lstStyle/>
+          <a:p>
+            <a:pPr algn="ctr"/>
+          </a:p>
+        </p:txBody>
+      </p:sp>
+      <p:sp>
+        <p:nvSpPr>
+          <p:cNvPr id="8" name="TextBox 7"/>
+          <p:cNvSpPr txBox="1"/>
+          <p:nvPr/>
+        </p:nvSpPr>
+        <p:spPr>
+          <a:xfrm>
+            <a:off x="548640" y="2057400"/>
+            <a:ext cx="1554480" cy="685800"/>
+          </a:xfrm>
+          <a:prstGeom prst="rect">
+            <a:avLst/>
+          </a:prstGeom>
+          <a:noFill/>
+        </p:spPr>
+        <p:txBody>
+          <a:bodyPr wrap="square" lIns="0" rIns="0" tIns="0" bIns="0" anchor="ctr">
+            <a:spAutoFit/>
+          </a:bodyPr>
+          <a:lstStyle/>
+          <a:p>
+            <a:pPr algn="ctr"/>
+            <a:r>
+              <a:rPr sz="3000" b="1">
+                <a:solidFill>
+                  <a:schemeClr val="accent1"/>
+                </a:solidFill>
+                <a:latin typeface="Cambria"/>
+              </a:rPr>
+              <a:t>0.96</a:t>
+            </a:r>
+          </a:p>
+        </p:txBody>
+      </p:sp>
+      <p:sp>
+        <p:nvSpPr>
+          <p:cNvPr id="9" name="TextBox 8"/>
+          <p:cNvSpPr txBox="1"/>
+          <p:nvPr/>
+        </p:nvSpPr>
+        <p:spPr>
+          <a:xfrm>
+            <a:off x="548640" y="2743200"/>
+            <a:ext cx="1554480" cy="411480"/>
+          </a:xfrm>
+          <a:prstGeom prst="rect">
+            <a:avLst/>
+          </a:prstGeom>
+          <a:noFill/>
+        </p:spPr>
+        <p:txBody>
+          <a:bodyPr wrap="square" lIns="0" rIns="0" tIns="0" bIns="0" anchor="ctr">
+            <a:spAutoFit/>
+          </a:bodyPr>
+          <a:lstStyle/>
+          <a:p>
+            <a:pPr algn="ctr"/>
+            <a:r>
+              <a:rPr sz="1100" b="0">
+                <a:solidFill>
+                  <a:schemeClr val="tx2"/>
+                </a:solidFill>
+                <a:latin typeface="Calibri"/>
+              </a:rPr>
+              <a:t>Recall@3</a:t>
+            </a:r>
+          </a:p>
+        </p:txBody>
+      </p:sp>
+      <p:sp>
+        <p:nvSpPr>
+          <p:cNvPr id="10" name="Card"/>
+          <p:cNvSpPr/>
+          <p:nvPr/>
+        </p:nvSpPr>
+        <p:spPr>
+          <a:xfrm>
+            <a:off x="2240280" y="1965960"/>
+            <a:ext cx="1554480" cy="1325880"/>
+          </a:xfrm>
+          <a:prstGeom prst="roundRect">
+            <a:avLst>
+              <a:gd name="adj" fmla="val 1250"/>
+            </a:avLst>
+          </a:prstGeom>
+          <a:solidFill>
+            <a:srgbClr val="FFFFFF"/>
+          </a:solidFill>
+          <a:ln w="12700">
+            <a:solidFill>
+              <a:srgbClr val="DBE4EF"/>
+            </a:solidFill>
+          </a:ln>
+          <a:effectLst>
+            <a:outerShdw blurRad="127000" dist="38100" dir="5400000" algn="bl" rotWithShape="0">
+              <a:srgbClr val="172033">
+                <a:alpha val="15000"/>
+              </a:srgbClr>
+            </a:outerShdw>
+          </a:effectLst>
+        </p:spPr>
+        <p:style>
+          <a:lnRef idx="1">
+            <a:schemeClr val="accent1"/>
+          </a:lnRef>
+          <a:fillRef idx="3">
+            <a:schemeClr val="accent1"/>
+          </a:fillRef>
+          <a:effectRef idx="2">
+            <a:schemeClr val="accent1"/>
+          </a:effectRef>
+          <a:fontRef idx="minor">
+            <a:schemeClr val="lt1"/>
+          </a:fontRef>
+        </p:style>
+        <p:txBody>
+          <a:bodyPr rtlCol="0" anchor="ctr"/>
+          <a:lstStyle/>
+          <a:p>
+            <a:pPr algn="ctr"/>
+          </a:p>
+        </p:txBody>
+      </p:sp>
+      <p:sp>
+        <p:nvSpPr>
+          <p:cNvPr id="11" name="TextBox 10"/>
+          <p:cNvSpPr txBox="1"/>
+          <p:nvPr/>
+        </p:nvSpPr>
+        <p:spPr>
+          <a:xfrm>
+            <a:off x="2240280" y="2057400"/>
+            <a:ext cx="1554480" cy="685800"/>
+          </a:xfrm>
+          <a:prstGeom prst="rect">
+            <a:avLst/>
+          </a:prstGeom>
+          <a:noFill/>
+        </p:spPr>
+        <p:txBody>
+          <a:bodyPr wrap="square" lIns="0" rIns="0" tIns="0" bIns="0" anchor="ctr">
+            <a:spAutoFit/>
+          </a:bodyPr>
+          <a:lstStyle/>
+          <a:p>
+            <a:pPr algn="ctr"/>
+            <a:r>
+              <a:rPr sz="3000" b="1">
+                <a:solidFill>
+                  <a:schemeClr val="accent2"/>
+                </a:solidFill>
+                <a:latin typeface="Cambria"/>
+              </a:rPr>
+              <a:t>0.91</a:t>
+            </a:r>
+          </a:p>
+        </p:txBody>
+      </p:sp>
+      <p:sp>
+        <p:nvSpPr>
+          <p:cNvPr id="12" name="TextBox 11"/>
+          <p:cNvSpPr txBox="1"/>
+          <p:nvPr/>
+        </p:nvSpPr>
+        <p:spPr>
+          <a:xfrm>
+            <a:off x="2240280" y="2743200"/>
+            <a:ext cx="1554480" cy="411480"/>
+          </a:xfrm>
+          <a:prstGeom prst="rect">
+            <a:avLst/>
+          </a:prstGeom>
+          <a:noFill/>
+        </p:spPr>
+        <p:txBody>
+          <a:bodyPr wrap="square" lIns="0" rIns="0" tIns="0" bIns="0" anchor="ctr">
+            <a:spAutoFit/>
+          </a:bodyPr>
+          <a:lstStyle/>
+          <a:p>
+            <a:pPr algn="ctr"/>
+            <a:r>
+              <a:rPr sz="1100" b="0">
+                <a:solidFill>
+                  <a:schemeClr val="tx2"/>
+                </a:solidFill>
+                <a:latin typeface="Calibri"/>
+              </a:rPr>
+              <a:t>MRR</a:t>
+            </a:r>
+          </a:p>
+        </p:txBody>
+      </p:sp>
+      <p:sp>
+        <p:nvSpPr>
+          <p:cNvPr id="13" name="Card"/>
+          <p:cNvSpPr/>
+          <p:nvPr/>
+        </p:nvSpPr>
+        <p:spPr>
+          <a:xfrm>
+            <a:off x="3931920" y="1965960"/>
+            <a:ext cx="1554480" cy="1325880"/>
+          </a:xfrm>
+          <a:prstGeom prst="roundRect">
+            <a:avLst>
+              <a:gd name="adj" fmla="val 1250"/>
+            </a:avLst>
+          </a:prstGeom>
+          <a:solidFill>
+            <a:srgbClr val="FFFFFF"/>
+          </a:solidFill>
+          <a:ln w="12700">
+            <a:solidFill>
+              <a:srgbClr val="DBE4EF"/>
+            </a:solidFill>
+          </a:ln>
+          <a:effectLst>
+            <a:outerShdw blurRad="127000" dist="38100" dir="5400000" algn="bl" rotWithShape="0">
+              <a:srgbClr val="172033">
+                <a:alpha val="15000"/>
+              </a:srgbClr>
+            </a:outerShdw>
+          </a:effectLst>
+        </p:spPr>
+        <p:style>
+          <a:lnRef idx="1">
+            <a:schemeClr val="accent1"/>
+          </a:lnRef>
+          <a:fillRef idx="3">
+            <a:schemeClr val="accent1"/>
+          </a:fillRef>
+          <a:effectRef idx="2">
+            <a:schemeClr val="accent1"/>
+          </a:effectRef>
+          <a:fontRef idx="minor">
+            <a:schemeClr val="lt1"/>
+          </a:fontRef>
+        </p:style>
+        <p:txBody>
+          <a:bodyPr rtlCol="0" anchor="ctr"/>
+          <a:lstStyle/>
+          <a:p>
+            <a:pPr algn="ctr"/>
+          </a:p>
+        </p:txBody>
+      </p:sp>
+      <p:sp>
+        <p:nvSpPr>
+          <p:cNvPr id="14" name="TextBox 13"/>
+          <p:cNvSpPr txBox="1"/>
+          <p:nvPr/>
+        </p:nvSpPr>
+        <p:spPr>
+          <a:xfrm>
+            <a:off x="3931920" y="2057400"/>
+            <a:ext cx="1554480" cy="685800"/>
+          </a:xfrm>
+          <a:prstGeom prst="rect">
+            <a:avLst/>
+          </a:prstGeom>
+          <a:noFill/>
+        </p:spPr>
+        <p:txBody>
+          <a:bodyPr wrap="square" lIns="0" rIns="0" tIns="0" bIns="0" anchor="ctr">
+            <a:spAutoFit/>
+          </a:bodyPr>
+          <a:lstStyle/>
+          <a:p>
+            <a:pPr algn="ctr"/>
+            <a:r>
+              <a:rPr sz="3000" b="1">
+                <a:solidFill>
+                  <a:schemeClr val="accent4"/>
+                </a:solidFill>
+                <a:latin typeface="Cambria"/>
+              </a:rPr>
+              <a:t>0.87</a:t>
+            </a:r>
+          </a:p>
+        </p:txBody>
+      </p:sp>
+      <p:sp>
+        <p:nvSpPr>
+          <p:cNvPr id="15" name="TextBox 14"/>
+          <p:cNvSpPr txBox="1"/>
+          <p:nvPr/>
+        </p:nvSpPr>
+        <p:spPr>
+          <a:xfrm>
+            <a:off x="3931920" y="2743200"/>
+            <a:ext cx="1554480" cy="411480"/>
+          </a:xfrm>
+          <a:prstGeom prst="rect">
+            <a:avLst/>
+          </a:prstGeom>
+          <a:noFill/>
+        </p:spPr>
+        <p:txBody>
+          <a:bodyPr wrap="square" lIns="0" rIns="0" tIns="0" bIns="0" anchor="ctr">
+            <a:spAutoFit/>
+          </a:bodyPr>
+          <a:lstStyle/>
+          <a:p>
+            <a:pPr algn="ctr"/>
+            <a:r>
+              <a:rPr sz="1100" b="0">
+                <a:solidFill>
+                  <a:schemeClr val="tx2"/>
+                </a:solidFill>
+                <a:latin typeface="Calibri"/>
+              </a:rPr>
+              <a:t>Precision@1</a:t>
+            </a:r>
+          </a:p>
+        </p:txBody>
+      </p:sp>
+      <p:sp>
+        <p:nvSpPr>
+          <p:cNvPr id="16" name="Bullets"/>
+          <p:cNvSpPr txBox="1"/>
+          <p:nvPr/>
+        </p:nvSpPr>
+        <p:spPr>
+          <a:xfrm>
+            <a:off x="548640" y="3611880"/>
+            <a:ext cx="4937760" cy="2651760"/>
+          </a:xfrm>
+          <a:prstGeom prst="rect">
+            <a:avLst/>
+          </a:prstGeom>
+          <a:noFill/>
+        </p:spPr>
+        <p:txBody>
+          <a:bodyPr wrap="square" lIns="0" rIns="0" tIns="0" bIns="0" anchor="t">
+            <a:spAutoFit/>
+          </a:bodyPr>
+          <a:lstStyle/>
+          <a:p>
+            <a:pPr marL="342900" indent="-342900">
+              <a:lnSpc>
+                <a:spcPct val="125000"/>
+              </a:lnSpc>
+              <a:spcAft>
+                <a:spcPts val="1200"/>
+              </a:spcAft>
+              <a:buSzPct val="100000"/>
+              <a:buChar char="•"/>
+            </a:pPr>
+            <a:r>
+              <a:rPr sz="1250" b="1">
+                <a:solidFill>
+                  <a:schemeClr val="tx1"/>
+                </a:solidFill>
+                <a:latin typeface="Calibri"/>
+              </a:rPr>
+              <a:t>Answer quality </a:t>
+            </a:r>
+            <a:r>
+              <a:rPr sz="1250" b="0">
+                <a:solidFill>
+                  <a:schemeClr val="tx1"/>
+                </a:solidFill>
+                <a:latin typeface="Calibri"/>
+              </a:rPr>
+              <a:t>(Evidently LLM judges): faithfulness 83%, completeness 87%, no personal data in any answer</a:t>
+            </a:r>
+          </a:p>
+          <a:p>
+            <a:pPr marL="342900" indent="-342900">
+              <a:lnSpc>
+                <a:spcPct val="125000"/>
+              </a:lnSpc>
+              <a:spcAft>
+                <a:spcPts val="1200"/>
+              </a:spcAft>
+              <a:buSzPct val="100000"/>
+              <a:buChar char="•"/>
+            </a:pPr>
+            <a:r>
+              <a:rPr sz="1250" b="1">
+                <a:solidFill>
+                  <a:schemeClr val="tx1"/>
+                </a:solidFill>
+                <a:latin typeface="Calibri"/>
+              </a:rPr>
+              <a:t>77% of all questions pass every check. </a:t>
+            </a:r>
+            <a:r>
+              <a:rPr sz="1250" b="0">
+                <a:solidFill>
+                  <a:schemeClr val="tx1"/>
+                </a:solidFill>
+                <a:latin typeface="Calibri"/>
+              </a:rPr>
+              <a:t>Reviewing each failure: most are judge errors, a few are real bugs — kept visible, not tuned away</a:t>
+            </a:r>
+          </a:p>
+        </p:txBody>
+      </p:sp>
+      <p:graphicFrame>
+        <p:nvGraphicFramePr>
+          <p:cNvPr id="17" name="Evaluation by category"/>
+          <p:cNvGraphicFramePr>
+            <a:graphicFrameLocks noGrp="1"/>
+          </p:cNvGraphicFramePr>
+          <p:nvPr/>
+        </p:nvGraphicFramePr>
+        <p:xfrm>
+          <a:off x="5852160" y="1600200"/>
+          <a:ext cx="5760720" cy="4663440"/>
+        </p:xfrm>
+        <a:graphic>
+          <a:graphicData uri="http://schemas.openxmlformats.org/drawingml/2006/chart">
+            <c:chart xmlns:c="http://schemas.openxmlformats.org/drawingml/2006/chart" r:id="rId2"/>
+          </a:graphicData>
+        </a:graphic>
+      </p:graphicFrame>
+    </p:spTree>
+  </p:cSld>
+  <p:clrMapOvr>
+    <a:masterClrMapping/>
+  </p:clrMapOvr>
+</p:sld>
+</file>
+
 <file path=ppt/slides/slide3.xml><?xml version="1.0" encoding="utf-8"?>
 <p:sld xmlns:a="http://schemas.openxmlformats.org/drawingml/2006/main" xmlns:r="http://schemas.openxmlformats.org/officeDocument/2006/relationships" xmlns:p="http://schemas.openxmlformats.org/presentationml/2006/main">
   <p:cSld name="Slide 3">
@@ -8096,386 +15430,6 @@
                 <a:cs typeface="Calibri" pitchFamily="34" charset="-120"/>
               </a:rPr>
               <a:t>app/templates/chat.html · app/static/chat.js</a:t>
-            </a:r>
-            <a:endParaRPr lang="en-US" sz="1000" dirty="0"/>
-          </a:p>
-        </p:txBody>
-      </p:sp>
-      <p:sp>
-        <p:nvSpPr>
-          <p:cNvPr id="11" name="Text 7"/>
-          <p:cNvSpPr txBox="1"/>
-          <p:nvPr/>
-        </p:nvSpPr>
-        <p:spPr>
-          <a:xfrm>
-            <a:off x="8897112" y="6473952"/>
-            <a:ext cx="2743200" cy="274320"/>
-          </a:xfrm>
-          <a:prstGeom prst="rect">
-            <a:avLst/>
-          </a:prstGeom>
-          <a:noFill/>
-          <a:ln/>
-        </p:spPr>
-        <p:txBody>
-          <a:bodyPr wrap="square" lIns="0" tIns="0" rIns="0" bIns="0" rtlCol="0" anchor="ctr"/>
-          <a:lstStyle/>
-          <a:p>
-            <a:pPr algn="r" indent="0" marL="0">
-              <a:buNone/>
-            </a:pPr>
-            <a:r>
-              <a:rPr lang="en-US" sz="1000" dirty="0">
-                <a:solidFill>
-                  <a:schemeClr val="tx2"/>
-                </a:solidFill>
-                <a:latin typeface="Calibri" pitchFamily="34" charset="0"/>
-                <a:ea typeface="Calibri" pitchFamily="34" charset="-122"/>
-                <a:cs typeface="Calibri" pitchFamily="34" charset="-120"/>
-              </a:rPr>
-              <a:t>VilniusPark Chatbot</a:t>
-            </a:r>
-            <a:endParaRPr lang="en-US" sz="1000" dirty="0"/>
-          </a:p>
-        </p:txBody>
-      </p:sp>
-    </p:spTree>
-  </p:cSld>
-  <p:clrMapOvr>
-    <a:masterClrMapping/>
-  </p:clrMapOvr>
-</p:sld>
-</file>
-
-<file path=ppt/slides/slide7.xml><?xml version="1.0" encoding="utf-8"?>
-<p:sld xmlns:a="http://schemas.openxmlformats.org/drawingml/2006/main" xmlns:r="http://schemas.openxmlformats.org/officeDocument/2006/relationships" xmlns:p="http://schemas.openxmlformats.org/presentationml/2006/main">
-  <p:cSld name="Slide 7">
-    <p:bg>
-      <p:bgPr>
-        <a:solidFill>
-          <a:schemeClr val="bg1"/>
-        </a:solidFill>
-      </p:bgPr>
-    </p:bg>
-    <p:spTree>
-      <p:nvGrpSpPr>
-        <p:cNvPr id="1" name=""/>
-        <p:cNvGrpSpPr/>
-        <p:nvPr/>
-      </p:nvGrpSpPr>
-      <p:grpSpPr>
-        <a:xfrm>
-          <a:off x="0" y="0"/>
-          <a:ext cx="0" cy="0"/>
-          <a:chOff x="0" y="0"/>
-          <a:chExt cx="0" cy="0"/>
-        </a:xfrm>
-      </p:grpSpPr>
-      <p:sp>
-        <p:nvSpPr>
-          <p:cNvPr id="2" name="Text 0"/>
-          <p:cNvSpPr txBox="1"/>
-          <p:nvPr/>
-        </p:nvSpPr>
-        <p:spPr>
-          <a:xfrm>
-            <a:off x="548640" y="457200"/>
-            <a:ext cx="9144000" cy="320040"/>
-          </a:xfrm>
-          <a:prstGeom prst="rect">
-            <a:avLst/>
-          </a:prstGeom>
-          <a:noFill/>
-          <a:ln/>
-        </p:spPr>
-        <p:txBody>
-          <a:bodyPr wrap="square" lIns="0" tIns="0" rIns="0" bIns="0" rtlCol="0" anchor="ctr"/>
-          <a:lstStyle/>
-          <a:p>
-            <a:pPr indent="0" marL="0">
-              <a:buNone/>
-            </a:pPr>
-            <a:r>
-              <a:rPr lang="en-US" sz="1200" b="1" spc="200" kern="0" dirty="0">
-                <a:solidFill>
-                  <a:schemeClr val="accent1"/>
-                </a:solidFill>
-                <a:latin typeface="Calibri" pitchFamily="34" charset="0"/>
-                <a:ea typeface="Calibri" pitchFamily="34" charset="-122"/>
-                <a:cs typeface="Calibri" pitchFamily="34" charset="-120"/>
-              </a:rPr>
-              <a:t>IN ACTION</a:t>
-            </a:r>
-            <a:endParaRPr lang="en-US" sz="1200" dirty="0"/>
-          </a:p>
-        </p:txBody>
-      </p:sp>
-      <p:sp>
-        <p:nvSpPr>
-          <p:cNvPr id="3" name="Text 1"/>
-          <p:cNvSpPr txBox="1"/>
-          <p:nvPr/>
-        </p:nvSpPr>
-        <p:spPr>
-          <a:xfrm>
-            <a:off x="548640" y="777240"/>
-            <a:ext cx="11091672" cy="731520"/>
-          </a:xfrm>
-          <a:prstGeom prst="rect">
-            <a:avLst/>
-          </a:prstGeom>
-          <a:noFill/>
-          <a:ln/>
-        </p:spPr>
-        <p:txBody>
-          <a:bodyPr wrap="square" lIns="0" tIns="0" rIns="0" bIns="0" rtlCol="0" anchor="ctr"/>
-          <a:lstStyle/>
-          <a:p>
-            <a:pPr indent="0" marL="0">
-              <a:buNone/>
-            </a:pPr>
-            <a:r>
-              <a:rPr lang="en-US" sz="3000" b="1" dirty="0">
-                <a:solidFill>
-                  <a:schemeClr val="tx1"/>
-                </a:solidFill>
-                <a:latin typeface="Cambria" pitchFamily="34" charset="0"/>
-                <a:ea typeface="Cambria" pitchFamily="34" charset="-122"/>
-                <a:cs typeface="Cambria" pitchFamily="34" charset="-120"/>
-              </a:rPr>
-              <a:t>From review to an approved reservation</a:t>
-            </a:r>
-            <a:endParaRPr lang="en-US" sz="3000" dirty="0"/>
-          </a:p>
-        </p:txBody>
-      </p:sp>
-      <p:sp>
-        <p:nvSpPr>
-          <p:cNvPr id="4" name="Shape 2"/>
-          <p:cNvSpPr/>
-          <p:nvPr/>
-        </p:nvSpPr>
-        <p:spPr>
-          <a:xfrm>
-            <a:off x="548640" y="1691640"/>
-            <a:ext cx="5349240" cy="4389120"/>
-          </a:xfrm>
-          <a:prstGeom prst="roundRect">
-            <a:avLst>
-              <a:gd name="adj" fmla="val 1250"/>
-            </a:avLst>
-          </a:prstGeom>
-          <a:solidFill>
-            <a:srgbClr val="FFFFFF"/>
-          </a:solidFill>
-          <a:ln w="12700">
-            <a:solidFill>
-              <a:srgbClr val="DBE4EF"/>
-            </a:solidFill>
-            <a:prstDash val="solid"/>
-          </a:ln>
-          <a:effectLst>
-            <a:outerShdw sx="100000" sy="100000" kx="0" ky="0" algn="bl" rotWithShape="0" blurRad="127000" dist="38100" dir="5400000">
-              <a:srgbClr val="172033">
-                <a:alpha val="15000"/>
-              </a:srgbClr>
-            </a:outerShdw>
-          </a:effectLst>
-        </p:spPr>
-      </p:sp>
-      <p:pic>
-        <p:nvPicPr>
-          <p:cNvPr id="5" name="Image 0" descr="/private/tmp/claude-501/-Users-kiryll-fiodarau-parking-reservation-chatbot/482ae88f-4f64-4e1d-b8b2-9ecbe3b20b7a/scratchpad/deck/images/chat-review.jpg">    </p:cNvPr>
-          <p:cNvPicPr>
-            <a:picLocks noChangeAspect="1"/>
-          </p:cNvPicPr>
-          <p:nvPr/>
-        </p:nvPicPr>
-        <p:blipFill>
-          <a:blip r:embed="rId1"/>
-          <a:srcRect l="0" r="0" t="0" b="0"/>
-          <a:stretch/>
-        </p:blipFill>
-        <p:spPr>
-          <a:xfrm>
-            <a:off x="621792" y="1764792"/>
-            <a:ext cx="5202936" cy="3877056"/>
-          </a:xfrm>
-          <a:prstGeom prst="rect">
-            <a:avLst/>
-          </a:prstGeom>
-        </p:spPr>
-      </p:pic>
-      <p:sp>
-        <p:nvSpPr>
-          <p:cNvPr id="6" name="Text 3"/>
-          <p:cNvSpPr txBox="1"/>
-          <p:nvPr/>
-        </p:nvSpPr>
-        <p:spPr>
-          <a:xfrm>
-            <a:off x="640080" y="5715000"/>
-            <a:ext cx="5166360" cy="320040"/>
-          </a:xfrm>
-          <a:prstGeom prst="rect">
-            <a:avLst/>
-          </a:prstGeom>
-          <a:noFill/>
-          <a:ln/>
-        </p:spPr>
-        <p:txBody>
-          <a:bodyPr wrap="square" lIns="0" tIns="0" rIns="0" bIns="0" rtlCol="0" anchor="ctr"/>
-          <a:lstStyle/>
-          <a:p>
-            <a:pPr algn="ctr" indent="0" marL="0">
-              <a:buNone/>
-            </a:pPr>
-            <a:r>
-              <a:rPr lang="en-US" sz="1100" dirty="0">
-                <a:solidFill>
-                  <a:schemeClr val="tx2"/>
-                </a:solidFill>
-                <a:latin typeface="Calibri" pitchFamily="34" charset="0"/>
-                <a:ea typeface="Calibri" pitchFamily="34" charset="-122"/>
-                <a:cs typeface="Calibri" pitchFamily="34" charset="-120"/>
-              </a:rPr>
-              <a:t>prepare_reservation's review, with Confirm / Cancel</a:t>
-            </a:r>
-            <a:endParaRPr lang="en-US" sz="1100" dirty="0"/>
-          </a:p>
-        </p:txBody>
-      </p:sp>
-      <p:sp>
-        <p:nvSpPr>
-          <p:cNvPr id="7" name="Shape 4"/>
-          <p:cNvSpPr/>
-          <p:nvPr/>
-        </p:nvSpPr>
-        <p:spPr>
-          <a:xfrm>
-            <a:off x="6172200" y="1691640"/>
-            <a:ext cx="5349240" cy="4389120"/>
-          </a:xfrm>
-          <a:prstGeom prst="roundRect">
-            <a:avLst>
-              <a:gd name="adj" fmla="val 1250"/>
-            </a:avLst>
-          </a:prstGeom>
-          <a:solidFill>
-            <a:srgbClr val="FFFFFF"/>
-          </a:solidFill>
-          <a:ln w="12700">
-            <a:solidFill>
-              <a:srgbClr val="DBE4EF"/>
-            </a:solidFill>
-            <a:prstDash val="solid"/>
-          </a:ln>
-          <a:effectLst>
-            <a:outerShdw sx="100000" sy="100000" kx="0" ky="0" algn="bl" rotWithShape="0" blurRad="127000" dist="38100" dir="5400000">
-              <a:srgbClr val="172033">
-                <a:alpha val="15000"/>
-              </a:srgbClr>
-            </a:outerShdw>
-          </a:effectLst>
-        </p:spPr>
-      </p:sp>
-      <p:pic>
-        <p:nvPicPr>
-          <p:cNvPr id="8" name="Image 1" descr="/private/tmp/claude-501/-Users-kiryll-fiodarau-parking-reservation-chatbot/482ae88f-4f64-4e1d-b8b2-9ecbe3b20b7a/scratchpad/deck/images/chat-confirm.jpg">    </p:cNvPr>
-          <p:cNvPicPr>
-            <a:picLocks noChangeAspect="1"/>
-          </p:cNvPicPr>
-          <p:nvPr/>
-        </p:nvPicPr>
-        <p:blipFill>
-          <a:blip r:embed="rId2"/>
-          <a:srcRect l="0" r="0" t="0" b="0"/>
-          <a:stretch/>
-        </p:blipFill>
-        <p:spPr>
-          <a:xfrm>
-            <a:off x="6245352" y="1764792"/>
-            <a:ext cx="5202936" cy="3877056"/>
-          </a:xfrm>
-          <a:prstGeom prst="rect">
-            <a:avLst/>
-          </a:prstGeom>
-        </p:spPr>
-      </p:pic>
-      <p:sp>
-        <p:nvSpPr>
-          <p:cNvPr id="9" name="Text 5"/>
-          <p:cNvSpPr txBox="1"/>
-          <p:nvPr/>
-        </p:nvSpPr>
-        <p:spPr>
-          <a:xfrm>
-            <a:off x="6263640" y="5715000"/>
-            <a:ext cx="5166360" cy="320040"/>
-          </a:xfrm>
-          <a:prstGeom prst="rect">
-            <a:avLst/>
-          </a:prstGeom>
-          <a:noFill/>
-          <a:ln/>
-        </p:spPr>
-        <p:txBody>
-          <a:bodyPr wrap="square" lIns="0" tIns="0" rIns="0" bIns="0" rtlCol="0" anchor="ctr"/>
-          <a:lstStyle/>
-          <a:p>
-            <a:pPr algn="ctr" indent="0" marL="0">
-              <a:buNone/>
-            </a:pPr>
-            <a:r>
-              <a:rPr lang="en-US" sz="1100" dirty="0">
-                <a:solidFill>
-                  <a:schemeClr val="tx2"/>
-                </a:solidFill>
-                <a:latin typeface="Calibri" pitchFamily="34" charset="0"/>
-                <a:ea typeface="Calibri" pitchFamily="34" charset="-122"/>
-                <a:cs typeface="Calibri" pitchFamily="34" charset="-120"/>
-              </a:rPr>
-              <a:t>Confirm → admin approves → pop-up in the chat</a:t>
-            </a:r>
-            <a:endParaRPr lang="en-US" sz="1100" dirty="0"/>
-          </a:p>
-        </p:txBody>
-      </p:sp>
-      <p:sp>
-        <p:nvSpPr>
-          <p:cNvPr id="10" name="Text 6"/>
-          <p:cNvSpPr txBox="1"/>
-          <p:nvPr/>
-        </p:nvSpPr>
-        <p:spPr>
-          <a:xfrm>
-            <a:off x="548640" y="6473952"/>
-            <a:ext cx="6400800" cy="274320"/>
-          </a:xfrm>
-          <a:prstGeom prst="rect">
-            <a:avLst/>
-          </a:prstGeom>
-          <a:noFill/>
-          <a:ln/>
-        </p:spPr>
-        <p:txBody>
-          <a:bodyPr wrap="square" lIns="0" tIns="0" rIns="0" bIns="0" rtlCol="0" anchor="ctr"/>
-          <a:lstStyle/>
-          <a:p>
-            <a:pPr indent="0" marL="0">
-              <a:buNone/>
-            </a:pPr>
-            <a:r>
-              <a:rPr lang="en-US" sz="1000" dirty="0">
-                <a:solidFill>
-                  <a:schemeClr val="tx2"/>
-                </a:solidFill>
-                <a:latin typeface="Calibri" pitchFamily="34" charset="0"/>
-                <a:ea typeface="Calibri" pitchFamily="34" charset="-122"/>
-                <a:cs typeface="Calibri" pitchFamily="34" charset="-120"/>
-              </a:rPr>
-              <a:t>app/ai/tools.py · app/ai/graph.py</a:t>
             </a:r>
             <a:endParaRPr lang="en-US" sz="1000" dirty="0"/>
           </a:p>
